--- a/public/fun/pack/pptx/review/보장점검양식_28_가족점검_감나무집.pptx
+++ b/public/fun/pack/pptx/review/보장점검양식_28_가족점검_감나무집.pptx
@@ -3286,6 +3286,14 @@
 <file path=ppt/slides/slide1.xml><?xml version="1.0" encoding="utf-8"?>
 <p:sld xmlns:a="http://schemas.openxmlformats.org/drawingml/2006/main" xmlns:p="http://schemas.openxmlformats.org/presentationml/2006/main" xmlns:r="http://schemas.openxmlformats.org/officeDocument/2006/relationships">
   <p:cSld>
+    <p:bg>
+      <p:bgPr>
+        <a:solidFill>
+          <a:srgbClr val="493727"/>
+        </a:solidFill>
+        <a:effectLst/>
+      </p:bgPr>
+    </p:bg>
     <p:spTree>
       <p:nvGrpSpPr>
         <p:cNvPr id="1" name=""/>
@@ -3293,30 +3301,102 @@
         <p:nvPr/>
       </p:nvGrpSpPr>
       <p:grpSpPr/>
-      <p:pic>
-        <p:nvPicPr>
-          <p:cNvPr id="3" name="표지 그림" descr="review-28.jpg"/>
-          <p:cNvPicPr>
-            <a:picLocks noChangeAspect="1"/>
-          </p:cNvPicPr>
+      <p:sp>
+        <p:nvSpPr>
+          <p:cNvPr id="3" name="장식"/>
+          <p:cNvSpPr/>
           <p:nvPr/>
-        </p:nvPicPr>
-        <p:blipFill>
-          <a:blip r:embed="rId2"/>
-          <a:stretch>
-            <a:fillRect/>
-          </a:stretch>
-        </p:blipFill>
+        </p:nvSpPr>
         <p:spPr>
           <a:xfrm>
             <a:off x="0" y="0"/>
-            <a:ext cx="12191695" cy="6858000"/>
+            <a:ext cx="12191695" cy="3154680"/>
           </a:xfrm>
           <a:prstGeom prst="rect">
             <a:avLst/>
           </a:prstGeom>
-        </p:spPr>
-      </p:pic>
+          <a:solidFill>
+            <a:srgbClr val="D8A579"/>
+          </a:solidFill>
+          <a:ln>
+            <a:noFill/>
+          </a:ln>
+        </p:spPr>
+        <p:txBody>
+          <a:bodyPr rtlCol="0" anchor="ctr"/>
+          <a:lstStyle/>
+          <a:p>
+            <a:pPr algn="ctr"/>
+          </a:p>
+        </p:txBody>
+      </p:sp>
+      <p:sp>
+        <p:nvSpPr>
+          <p:cNvPr id="4" name="장식"/>
+          <p:cNvSpPr/>
+          <p:nvPr/>
+        </p:nvSpPr>
+        <p:spPr>
+          <a:xfrm>
+            <a:off x="8778020" y="1965960"/>
+            <a:ext cx="2377440" cy="2377440"/>
+          </a:xfrm>
+          <a:prstGeom prst="ellipse">
+            <a:avLst/>
+          </a:prstGeom>
+          <a:solidFill>
+            <a:srgbClr val="A67E5C"/>
+          </a:solidFill>
+          <a:ln>
+            <a:noFill/>
+          </a:ln>
+        </p:spPr>
+        <p:txBody>
+          <a:bodyPr rtlCol="0" anchor="ctr"/>
+          <a:lstStyle/>
+          <a:p>
+            <a:pPr algn="ctr"/>
+          </a:p>
+        </p:txBody>
+      </p:sp>
+      <p:sp>
+        <p:nvSpPr>
+          <p:cNvPr id="5" name="라벨"/>
+          <p:cNvSpPr txBox="1"/>
+          <p:nvPr/>
+        </p:nvSpPr>
+        <p:spPr>
+          <a:xfrm>
+            <a:off x="822960" y="3657600"/>
+            <a:ext cx="7315017" cy="274320"/>
+          </a:xfrm>
+          <a:prstGeom prst="rect">
+            <a:avLst/>
+          </a:prstGeom>
+          <a:noFill/>
+        </p:spPr>
+        <p:txBody>
+          <a:bodyPr wrap="square" lIns="54864" rIns="54864" tIns="27432" bIns="27432" anchor="t">
+            <a:noAutofit/>
+          </a:bodyPr>
+          <a:lstStyle/>
+          <a:p>
+            <a:pPr algn="l">
+              <a:lnSpc>
+                <a:spcPct val="115000"/>
+              </a:lnSpc>
+            </a:pPr>
+            <a:r>
+              <a:rPr sz="1000" b="1" i="0" spc="250">
+                <a:solidFill>
+                  <a:srgbClr val="FFFFFF"/>
+                </a:solidFill>
+              </a:rPr>
+              <a:t>INSURANCE CHECK</a:t>
+            </a:r>
+          </a:p>
+        </p:txBody>
+      </p:sp>
       <p:sp>
         <p:nvSpPr>
           <p:cNvPr id="2" name="Title 1"/>
@@ -3329,8 +3409,8 @@
         </p:nvSpPr>
         <p:spPr>
           <a:xfrm>
-            <a:off x="853418" y="2057400"/>
-            <a:ext cx="6095847" cy="1554480"/>
+            <a:off x="822960" y="4114800"/>
+            <a:ext cx="7315017" cy="1188720"/>
           </a:xfrm>
         </p:spPr>
         <p:txBody>
@@ -3347,7 +3427,7 @@
             <a:r>
               <a:rPr sz="3600" b="1" i="0">
                 <a:solidFill>
-                  <a:srgbClr val="723F13"/>
+                  <a:srgbClr val="FFFFFF"/>
                 </a:solidFill>
               </a:rPr>
               <a:t>우리 보험 점검 시간</a:t>
@@ -3357,14 +3437,14 @@
       </p:sp>
       <p:sp>
         <p:nvSpPr>
-          <p:cNvPr id="4" name="한 줄 문구"/>
+          <p:cNvPr id="6" name="한 줄 문구"/>
           <p:cNvSpPr txBox="1"/>
           <p:nvPr/>
         </p:nvSpPr>
         <p:spPr>
           <a:xfrm>
-            <a:off x="853418" y="3749039"/>
-            <a:ext cx="6095847" cy="822960"/>
+            <a:off x="822960" y="5394960"/>
+            <a:ext cx="7315017" cy="822960"/>
           </a:xfrm>
           <a:prstGeom prst="rect">
             <a:avLst/>
@@ -3383,9 +3463,9 @@
               </a:lnSpc>
             </a:pPr>
             <a:r>
-              <a:rPr sz="1700" b="0" i="1">
+              <a:rPr sz="1700" b="0" i="0">
                 <a:solidFill>
-                  <a:srgbClr val="723F13"/>
+                  <a:srgbClr val="FFFFFF"/>
                 </a:solidFill>
               </a:rPr>
               <a:t>자녀 학교와 나이도 함께 적어 둡니다</a:t>
@@ -3395,14 +3475,14 @@
       </p:sp>
       <p:sp>
         <p:nvSpPr>
-          <p:cNvPr id="5" name="안내 문구"/>
+          <p:cNvPr id="7" name="안내 문구"/>
           <p:cNvSpPr txBox="1"/>
           <p:nvPr/>
         </p:nvSpPr>
         <p:spPr>
           <a:xfrm>
-            <a:off x="853418" y="4617720"/>
-            <a:ext cx="6095847" cy="914400"/>
+            <a:off x="822960" y="6263640"/>
+            <a:ext cx="7315017" cy="914400"/>
           </a:xfrm>
           <a:prstGeom prst="rect">
             <a:avLst/>
@@ -3423,10 +3503,10 @@
             <a:r>
               <a:rPr sz="1400" b="0" i="0">
                 <a:solidFill>
-                  <a:srgbClr val="666666"/>
+                  <a:srgbClr val="FFFFFF"/>
                 </a:solidFill>
               </a:rPr>
-              <a:t>가족 점검 · 2027. 00. 00</a:t>
+              <a:t>가족 점검 · 날짜 입력</a:t>
             </a:r>
           </a:p>
           <a:p>
@@ -3438,7 +3518,7 @@
             <a:r>
               <a:rPr sz="1400" b="0" i="0">
                 <a:solidFill>
-                  <a:srgbClr val="666666"/>
+                  <a:srgbClr val="FFFFFF"/>
                 </a:solidFill>
               </a:rPr>
               <a:t>가입 내용을 정리하고 함께 확인하는 양식</a:t>
@@ -3460,7 +3540,7 @@
     <p:bg>
       <p:bgPr>
         <a:solidFill>
-          <a:srgbClr val="FCF4ED"/>
+          <a:srgbClr val="FBF3EC"/>
         </a:solidFill>
         <a:effectLst/>
       </p:bgPr>
@@ -3480,14 +3560,14 @@
         </p:nvSpPr>
         <p:spPr>
           <a:xfrm>
-            <a:off x="0" y="0"/>
-            <a:ext cx="411480" cy="6858000"/>
+            <a:off x="640080" y="6400800"/>
+            <a:ext cx="10911535" cy="10972"/>
           </a:xfrm>
           <a:prstGeom prst="rect">
             <a:avLst/>
           </a:prstGeom>
           <a:solidFill>
-            <a:srgbClr val="CA7021"/>
+            <a:srgbClr val="26231F"/>
           </a:solidFill>
           <a:ln>
             <a:noFill/>
@@ -3503,20 +3583,58 @@
       </p:sp>
       <p:sp>
         <p:nvSpPr>
-          <p:cNvPr id="4" name="장식"/>
-          <p:cNvSpPr/>
+          <p:cNvPr id="4" name="하단 라벨"/>
+          <p:cNvSpPr txBox="1"/>
           <p:nvPr/>
         </p:nvSpPr>
         <p:spPr>
           <a:xfrm>
-            <a:off x="411480" y="0"/>
-            <a:ext cx="64008" cy="6858000"/>
+            <a:off x="640080" y="6437376"/>
+            <a:ext cx="5486400" cy="274320"/>
           </a:xfrm>
           <a:prstGeom prst="rect">
             <a:avLst/>
           </a:prstGeom>
+          <a:noFill/>
+        </p:spPr>
+        <p:txBody>
+          <a:bodyPr wrap="square" lIns="54864" rIns="54864" tIns="27432" bIns="27432" anchor="ctr">
+            <a:noAutofit/>
+          </a:bodyPr>
+          <a:lstStyle/>
+          <a:p>
+            <a:pPr algn="l">
+              <a:lnSpc>
+                <a:spcPct val="115000"/>
+              </a:lnSpc>
+            </a:pPr>
+            <a:r>
+              <a:rPr sz="900" b="1" i="0" spc="250">
+                <a:solidFill>
+                  <a:srgbClr val="26231F"/>
+                </a:solidFill>
+              </a:rPr>
+              <a:t>INSURANCE CHECK</a:t>
+            </a:r>
+          </a:p>
+        </p:txBody>
+      </p:sp>
+      <p:sp>
+        <p:nvSpPr>
+          <p:cNvPr id="5" name="포인트"/>
+          <p:cNvSpPr/>
+          <p:nvPr/>
+        </p:nvSpPr>
+        <p:spPr>
+          <a:xfrm rot="18900000">
+            <a:off x="11213287" y="6473952"/>
+            <a:ext cx="219456" cy="219456"/>
+          </a:xfrm>
+          <a:prstGeom prst="teardrop">
+            <a:avLst/>
+          </a:prstGeom>
           <a:solidFill>
-            <a:srgbClr val="3B918E"/>
+            <a:srgbClr val="D8A579"/>
           </a:solidFill>
           <a:ln>
             <a:noFill/>
@@ -3542,8 +3660,8 @@
         </p:nvSpPr>
         <p:spPr>
           <a:xfrm>
-            <a:off x="914400" y="457200"/>
-            <a:ext cx="9448495" cy="868680"/>
+            <a:off x="640080" y="502920"/>
+            <a:ext cx="10911535" cy="914400"/>
           </a:xfrm>
         </p:spPr>
         <p:txBody>
@@ -3560,7 +3678,7 @@
             <a:r>
               <a:rPr sz="3000" b="1" i="0">
                 <a:solidFill>
-                  <a:srgbClr val="723F13"/>
+                  <a:srgbClr val="26231F"/>
                 </a:solidFill>
               </a:rPr>
               <a:t>점검 대상 현황</a:t>
@@ -3570,15 +3688,15 @@
       </p:sp>
       <p:graphicFrame>
         <p:nvGraphicFramePr>
-          <p:cNvPr id="5" name="표"/>
+          <p:cNvPr id="6" name="표"/>
           <p:cNvGraphicFramePr>
             <a:graphicFrameLocks noGrp="1"/>
           </p:cNvGraphicFramePr>
           <p:nvPr/>
         </p:nvGraphicFramePr>
         <p:xfrm>
-          <a:off x="914400" y="1600200"/>
-          <a:ext cx="10637212" cy="3657600"/>
+          <a:off x="640080" y="1600200"/>
+          <a:ext cx="10911532" cy="3657600"/>
         </p:xfrm>
         <a:graphic>
           <a:graphicData uri="http://schemas.openxmlformats.org/drawingml/2006/table">
@@ -3587,10 +3705,10 @@
                 <a:tableStyleId>{5C22544A-7EE6-4342-B048-85BDC9FD1C3A}</a:tableStyleId>
               </a:tblPr>
               <a:tblGrid>
-                <a:gridCol w="2659303"/>
-                <a:gridCol w="2659303"/>
-                <a:gridCol w="2659303"/>
-                <a:gridCol w="2659303"/>
+                <a:gridCol w="2727883"/>
+                <a:gridCol w="2727883"/>
+                <a:gridCol w="2727883"/>
+                <a:gridCol w="2727883"/>
               </a:tblGrid>
               <a:tr h="731520">
                 <a:tc>
@@ -3602,7 +3720,7 @@
                       <a:r>
                         <a:rPr sz="1600" b="1">
                           <a:solidFill>
-                            <a:srgbClr val="FFFFFF"/>
+                            <a:srgbClr val="26231F"/>
                           </a:solidFill>
                         </a:rPr>
                         <a:t>구분</a:t>
@@ -3612,30 +3730,30 @@
                   <a:tcPr anchor="ctr" marL="73152" marR="73152">
                     <a:lnL w="9525" cap="flat" cmpd="sng" algn="ctr">
                       <a:solidFill>
-                        <a:srgbClr val="CA7021"/>
+                        <a:srgbClr val="D8A579"/>
                       </a:solidFill>
                       <a:prstDash val="solid"/>
                     </a:lnL>
                     <a:lnR w="9525" cap="flat" cmpd="sng" algn="ctr">
                       <a:solidFill>
-                        <a:srgbClr val="CA7021"/>
+                        <a:srgbClr val="D8A579"/>
                       </a:solidFill>
                       <a:prstDash val="solid"/>
                     </a:lnR>
                     <a:lnT w="9525" cap="flat" cmpd="sng" algn="ctr">
                       <a:solidFill>
-                        <a:srgbClr val="CA7021"/>
+                        <a:srgbClr val="D8A579"/>
                       </a:solidFill>
                       <a:prstDash val="solid"/>
                     </a:lnT>
                     <a:lnB w="9525" cap="flat" cmpd="sng" algn="ctr">
                       <a:solidFill>
-                        <a:srgbClr val="CA7021"/>
+                        <a:srgbClr val="D8A579"/>
                       </a:solidFill>
                       <a:prstDash val="solid"/>
                     </a:lnB>
                     <a:solidFill>
-                      <a:srgbClr val="CA7021"/>
+                      <a:srgbClr val="D8A579"/>
                     </a:solidFill>
                   </a:tcPr>
                 </a:tc>
@@ -3648,7 +3766,7 @@
                       <a:r>
                         <a:rPr sz="1600" b="1">
                           <a:solidFill>
-                            <a:srgbClr val="FFFFFF"/>
+                            <a:srgbClr val="26231F"/>
                           </a:solidFill>
                         </a:rPr>
                         <a:t>아빠</a:t>
@@ -3658,30 +3776,30 @@
                   <a:tcPr anchor="ctr" marL="73152" marR="73152">
                     <a:lnL w="9525" cap="flat" cmpd="sng" algn="ctr">
                       <a:solidFill>
-                        <a:srgbClr val="CA7021"/>
+                        <a:srgbClr val="D8A579"/>
                       </a:solidFill>
                       <a:prstDash val="solid"/>
                     </a:lnL>
                     <a:lnR w="9525" cap="flat" cmpd="sng" algn="ctr">
                       <a:solidFill>
-                        <a:srgbClr val="CA7021"/>
+                        <a:srgbClr val="D8A579"/>
                       </a:solidFill>
                       <a:prstDash val="solid"/>
                     </a:lnR>
                     <a:lnT w="9525" cap="flat" cmpd="sng" algn="ctr">
                       <a:solidFill>
-                        <a:srgbClr val="CA7021"/>
+                        <a:srgbClr val="D8A579"/>
                       </a:solidFill>
                       <a:prstDash val="solid"/>
                     </a:lnT>
                     <a:lnB w="9525" cap="flat" cmpd="sng" algn="ctr">
                       <a:solidFill>
-                        <a:srgbClr val="CA7021"/>
+                        <a:srgbClr val="D8A579"/>
                       </a:solidFill>
                       <a:prstDash val="solid"/>
                     </a:lnB>
                     <a:solidFill>
-                      <a:srgbClr val="CA7021"/>
+                      <a:srgbClr val="D8A579"/>
                     </a:solidFill>
                   </a:tcPr>
                 </a:tc>
@@ -3694,7 +3812,7 @@
                       <a:r>
                         <a:rPr sz="1600" b="1">
                           <a:solidFill>
-                            <a:srgbClr val="FFFFFF"/>
+                            <a:srgbClr val="26231F"/>
                           </a:solidFill>
                         </a:rPr>
                         <a:t>엄마</a:t>
@@ -3704,30 +3822,30 @@
                   <a:tcPr anchor="ctr" marL="73152" marR="73152">
                     <a:lnL w="9525" cap="flat" cmpd="sng" algn="ctr">
                       <a:solidFill>
-                        <a:srgbClr val="CA7021"/>
+                        <a:srgbClr val="D8A579"/>
                       </a:solidFill>
                       <a:prstDash val="solid"/>
                     </a:lnL>
                     <a:lnR w="9525" cap="flat" cmpd="sng" algn="ctr">
                       <a:solidFill>
-                        <a:srgbClr val="CA7021"/>
+                        <a:srgbClr val="D8A579"/>
                       </a:solidFill>
                       <a:prstDash val="solid"/>
                     </a:lnR>
                     <a:lnT w="9525" cap="flat" cmpd="sng" algn="ctr">
                       <a:solidFill>
-                        <a:srgbClr val="CA7021"/>
+                        <a:srgbClr val="D8A579"/>
                       </a:solidFill>
                       <a:prstDash val="solid"/>
                     </a:lnT>
                     <a:lnB w="9525" cap="flat" cmpd="sng" algn="ctr">
                       <a:solidFill>
-                        <a:srgbClr val="CA7021"/>
+                        <a:srgbClr val="D8A579"/>
                       </a:solidFill>
                       <a:prstDash val="solid"/>
                     </a:lnB>
                     <a:solidFill>
-                      <a:srgbClr val="CA7021"/>
+                      <a:srgbClr val="D8A579"/>
                     </a:solidFill>
                   </a:tcPr>
                 </a:tc>
@@ -3740,7 +3858,7 @@
                       <a:r>
                         <a:rPr sz="1600" b="1">
                           <a:solidFill>
-                            <a:srgbClr val="FFFFFF"/>
+                            <a:srgbClr val="26231F"/>
                           </a:solidFill>
                         </a:rPr>
                         <a:t>자녀</a:t>
@@ -3750,30 +3868,30 @@
                   <a:tcPr anchor="ctr" marL="73152" marR="73152">
                     <a:lnL w="9525" cap="flat" cmpd="sng" algn="ctr">
                       <a:solidFill>
-                        <a:srgbClr val="CA7021"/>
+                        <a:srgbClr val="D8A579"/>
                       </a:solidFill>
                       <a:prstDash val="solid"/>
                     </a:lnL>
                     <a:lnR w="9525" cap="flat" cmpd="sng" algn="ctr">
                       <a:solidFill>
-                        <a:srgbClr val="CA7021"/>
+                        <a:srgbClr val="D8A579"/>
                       </a:solidFill>
                       <a:prstDash val="solid"/>
                     </a:lnR>
                     <a:lnT w="9525" cap="flat" cmpd="sng" algn="ctr">
                       <a:solidFill>
-                        <a:srgbClr val="CA7021"/>
+                        <a:srgbClr val="D8A579"/>
                       </a:solidFill>
                       <a:prstDash val="solid"/>
                     </a:lnT>
                     <a:lnB w="9525" cap="flat" cmpd="sng" algn="ctr">
                       <a:solidFill>
-                        <a:srgbClr val="CA7021"/>
+                        <a:srgbClr val="D8A579"/>
                       </a:solidFill>
                       <a:prstDash val="solid"/>
                     </a:lnB>
                     <a:solidFill>
-                      <a:srgbClr val="CA7021"/>
+                      <a:srgbClr val="D8A579"/>
                     </a:solidFill>
                   </a:tcPr>
                 </a:tc>
@@ -3788,7 +3906,7 @@
                       <a:r>
                         <a:rPr sz="1600" b="1">
                           <a:solidFill>
-                            <a:srgbClr val="723F13"/>
+                            <a:srgbClr val="493727"/>
                           </a:solidFill>
                         </a:rPr>
                         <a:t>이름</a:t>
@@ -3798,30 +3916,30 @@
                   <a:tcPr anchor="ctr" marL="73152" marR="73152">
                     <a:lnL w="9525" cap="flat" cmpd="sng" algn="ctr">
                       <a:solidFill>
-                        <a:srgbClr val="F8DFC9"/>
+                        <a:srgbClr val="F6E4D5"/>
                       </a:solidFill>
                       <a:prstDash val="solid"/>
                     </a:lnL>
                     <a:lnR w="9525" cap="flat" cmpd="sng" algn="ctr">
                       <a:solidFill>
-                        <a:srgbClr val="F8DFC9"/>
+                        <a:srgbClr val="F6E4D5"/>
                       </a:solidFill>
                       <a:prstDash val="solid"/>
                     </a:lnR>
                     <a:lnT w="9525" cap="flat" cmpd="sng" algn="ctr">
                       <a:solidFill>
-                        <a:srgbClr val="F8DFC9"/>
+                        <a:srgbClr val="F6E4D5"/>
                       </a:solidFill>
                       <a:prstDash val="solid"/>
                     </a:lnT>
                     <a:lnB w="9525" cap="flat" cmpd="sng" algn="ctr">
                       <a:solidFill>
-                        <a:srgbClr val="F8DFC9"/>
+                        <a:srgbClr val="F6E4D5"/>
                       </a:solidFill>
                       <a:prstDash val="solid"/>
                     </a:lnB>
                     <a:solidFill>
-                      <a:srgbClr val="F8DFC9"/>
+                      <a:srgbClr val="F6E4D5"/>
                     </a:solidFill>
                   </a:tcPr>
                 </a:tc>
@@ -3834,7 +3952,7 @@
                       <a:r>
                         <a:rPr sz="1600" b="0">
                           <a:solidFill>
-                            <a:srgbClr val="2B2B2B"/>
+                            <a:srgbClr val="26231F"/>
                           </a:solidFill>
                         </a:rPr>
                         <a:t/>
@@ -3844,25 +3962,25 @@
                   <a:tcPr anchor="ctr" marL="73152" marR="73152">
                     <a:lnL w="9525" cap="flat" cmpd="sng" algn="ctr">
                       <a:solidFill>
-                        <a:srgbClr val="F8DFC9"/>
+                        <a:srgbClr val="F6E4D5"/>
                       </a:solidFill>
                       <a:prstDash val="solid"/>
                     </a:lnL>
                     <a:lnR w="9525" cap="flat" cmpd="sng" algn="ctr">
                       <a:solidFill>
-                        <a:srgbClr val="F8DFC9"/>
+                        <a:srgbClr val="F6E4D5"/>
                       </a:solidFill>
                       <a:prstDash val="solid"/>
                     </a:lnR>
                     <a:lnT w="9525" cap="flat" cmpd="sng" algn="ctr">
                       <a:solidFill>
-                        <a:srgbClr val="F8DFC9"/>
+                        <a:srgbClr val="F6E4D5"/>
                       </a:solidFill>
                       <a:prstDash val="solid"/>
                     </a:lnT>
                     <a:lnB w="9525" cap="flat" cmpd="sng" algn="ctr">
                       <a:solidFill>
-                        <a:srgbClr val="F8DFC9"/>
+                        <a:srgbClr val="F6E4D5"/>
                       </a:solidFill>
                       <a:prstDash val="solid"/>
                     </a:lnB>
@@ -3880,7 +3998,7 @@
                       <a:r>
                         <a:rPr sz="1600" b="0">
                           <a:solidFill>
-                            <a:srgbClr val="2B2B2B"/>
+                            <a:srgbClr val="26231F"/>
                           </a:solidFill>
                         </a:rPr>
                         <a:t/>
@@ -3890,25 +4008,25 @@
                   <a:tcPr anchor="ctr" marL="73152" marR="73152">
                     <a:lnL w="9525" cap="flat" cmpd="sng" algn="ctr">
                       <a:solidFill>
-                        <a:srgbClr val="F8DFC9"/>
+                        <a:srgbClr val="F6E4D5"/>
                       </a:solidFill>
                       <a:prstDash val="solid"/>
                     </a:lnL>
                     <a:lnR w="9525" cap="flat" cmpd="sng" algn="ctr">
                       <a:solidFill>
-                        <a:srgbClr val="F8DFC9"/>
+                        <a:srgbClr val="F6E4D5"/>
                       </a:solidFill>
                       <a:prstDash val="solid"/>
                     </a:lnR>
                     <a:lnT w="9525" cap="flat" cmpd="sng" algn="ctr">
                       <a:solidFill>
-                        <a:srgbClr val="F8DFC9"/>
+                        <a:srgbClr val="F6E4D5"/>
                       </a:solidFill>
                       <a:prstDash val="solid"/>
                     </a:lnT>
                     <a:lnB w="9525" cap="flat" cmpd="sng" algn="ctr">
                       <a:solidFill>
-                        <a:srgbClr val="F8DFC9"/>
+                        <a:srgbClr val="F6E4D5"/>
                       </a:solidFill>
                       <a:prstDash val="solid"/>
                     </a:lnB>
@@ -3926,7 +4044,7 @@
                       <a:r>
                         <a:rPr sz="1600" b="0">
                           <a:solidFill>
-                            <a:srgbClr val="2B2B2B"/>
+                            <a:srgbClr val="26231F"/>
                           </a:solidFill>
                         </a:rPr>
                         <a:t/>
@@ -3936,25 +4054,25 @@
                   <a:tcPr anchor="ctr" marL="73152" marR="73152">
                     <a:lnL w="9525" cap="flat" cmpd="sng" algn="ctr">
                       <a:solidFill>
-                        <a:srgbClr val="F8DFC9"/>
+                        <a:srgbClr val="F6E4D5"/>
                       </a:solidFill>
                       <a:prstDash val="solid"/>
                     </a:lnL>
                     <a:lnR w="9525" cap="flat" cmpd="sng" algn="ctr">
                       <a:solidFill>
-                        <a:srgbClr val="F8DFC9"/>
+                        <a:srgbClr val="F6E4D5"/>
                       </a:solidFill>
                       <a:prstDash val="solid"/>
                     </a:lnR>
                     <a:lnT w="9525" cap="flat" cmpd="sng" algn="ctr">
                       <a:solidFill>
-                        <a:srgbClr val="F8DFC9"/>
+                        <a:srgbClr val="F6E4D5"/>
                       </a:solidFill>
                       <a:prstDash val="solid"/>
                     </a:lnT>
                     <a:lnB w="9525" cap="flat" cmpd="sng" algn="ctr">
                       <a:solidFill>
-                        <a:srgbClr val="F8DFC9"/>
+                        <a:srgbClr val="F6E4D5"/>
                       </a:solidFill>
                       <a:prstDash val="solid"/>
                     </a:lnB>
@@ -3974,7 +4092,7 @@
                       <a:r>
                         <a:rPr sz="1600" b="1">
                           <a:solidFill>
-                            <a:srgbClr val="723F13"/>
+                            <a:srgbClr val="493727"/>
                           </a:solidFill>
                         </a:rPr>
                         <a:t>나이</a:t>
@@ -3984,30 +4102,30 @@
                   <a:tcPr anchor="ctr" marL="73152" marR="73152">
                     <a:lnL w="9525" cap="flat" cmpd="sng" algn="ctr">
                       <a:solidFill>
-                        <a:srgbClr val="F8DFC9"/>
+                        <a:srgbClr val="F6E4D5"/>
                       </a:solidFill>
                       <a:prstDash val="solid"/>
                     </a:lnL>
                     <a:lnR w="9525" cap="flat" cmpd="sng" algn="ctr">
                       <a:solidFill>
-                        <a:srgbClr val="F8DFC9"/>
+                        <a:srgbClr val="F6E4D5"/>
                       </a:solidFill>
                       <a:prstDash val="solid"/>
                     </a:lnR>
                     <a:lnT w="9525" cap="flat" cmpd="sng" algn="ctr">
                       <a:solidFill>
-                        <a:srgbClr val="F8DFC9"/>
+                        <a:srgbClr val="F6E4D5"/>
                       </a:solidFill>
                       <a:prstDash val="solid"/>
                     </a:lnT>
                     <a:lnB w="9525" cap="flat" cmpd="sng" algn="ctr">
                       <a:solidFill>
-                        <a:srgbClr val="F8DFC9"/>
+                        <a:srgbClr val="F6E4D5"/>
                       </a:solidFill>
                       <a:prstDash val="solid"/>
                     </a:lnB>
                     <a:solidFill>
-                      <a:srgbClr val="F8DFC9"/>
+                      <a:srgbClr val="F6E4D5"/>
                     </a:solidFill>
                   </a:tcPr>
                 </a:tc>
@@ -4020,7 +4138,7 @@
                       <a:r>
                         <a:rPr sz="1600" b="0">
                           <a:solidFill>
-                            <a:srgbClr val="2B2B2B"/>
+                            <a:srgbClr val="26231F"/>
                           </a:solidFill>
                         </a:rPr>
                         <a:t/>
@@ -4030,30 +4148,30 @@
                   <a:tcPr anchor="ctr" marL="73152" marR="73152">
                     <a:lnL w="9525" cap="flat" cmpd="sng" algn="ctr">
                       <a:solidFill>
-                        <a:srgbClr val="F8DFC9"/>
+                        <a:srgbClr val="F6E4D5"/>
                       </a:solidFill>
                       <a:prstDash val="solid"/>
                     </a:lnL>
                     <a:lnR w="9525" cap="flat" cmpd="sng" algn="ctr">
                       <a:solidFill>
-                        <a:srgbClr val="F8DFC9"/>
+                        <a:srgbClr val="F6E4D5"/>
                       </a:solidFill>
                       <a:prstDash val="solid"/>
                     </a:lnR>
                     <a:lnT w="9525" cap="flat" cmpd="sng" algn="ctr">
                       <a:solidFill>
-                        <a:srgbClr val="F8DFC9"/>
+                        <a:srgbClr val="F6E4D5"/>
                       </a:solidFill>
                       <a:prstDash val="solid"/>
                     </a:lnT>
                     <a:lnB w="9525" cap="flat" cmpd="sng" algn="ctr">
                       <a:solidFill>
-                        <a:srgbClr val="F8DFC9"/>
+                        <a:srgbClr val="F6E4D5"/>
                       </a:solidFill>
                       <a:prstDash val="solid"/>
                     </a:lnB>
                     <a:solidFill>
-                      <a:srgbClr val="FCF4ED"/>
+                      <a:srgbClr val="FBF3EC"/>
                     </a:solidFill>
                   </a:tcPr>
                 </a:tc>
@@ -4066,7 +4184,7 @@
                       <a:r>
                         <a:rPr sz="1600" b="0">
                           <a:solidFill>
-                            <a:srgbClr val="2B2B2B"/>
+                            <a:srgbClr val="26231F"/>
                           </a:solidFill>
                         </a:rPr>
                         <a:t/>
@@ -4076,30 +4194,30 @@
                   <a:tcPr anchor="ctr" marL="73152" marR="73152">
                     <a:lnL w="9525" cap="flat" cmpd="sng" algn="ctr">
                       <a:solidFill>
-                        <a:srgbClr val="F8DFC9"/>
+                        <a:srgbClr val="F6E4D5"/>
                       </a:solidFill>
                       <a:prstDash val="solid"/>
                     </a:lnL>
                     <a:lnR w="9525" cap="flat" cmpd="sng" algn="ctr">
                       <a:solidFill>
-                        <a:srgbClr val="F8DFC9"/>
+                        <a:srgbClr val="F6E4D5"/>
                       </a:solidFill>
                       <a:prstDash val="solid"/>
                     </a:lnR>
                     <a:lnT w="9525" cap="flat" cmpd="sng" algn="ctr">
                       <a:solidFill>
-                        <a:srgbClr val="F8DFC9"/>
+                        <a:srgbClr val="F6E4D5"/>
                       </a:solidFill>
                       <a:prstDash val="solid"/>
                     </a:lnT>
                     <a:lnB w="9525" cap="flat" cmpd="sng" algn="ctr">
                       <a:solidFill>
-                        <a:srgbClr val="F8DFC9"/>
+                        <a:srgbClr val="F6E4D5"/>
                       </a:solidFill>
                       <a:prstDash val="solid"/>
                     </a:lnB>
                     <a:solidFill>
-                      <a:srgbClr val="FCF4ED"/>
+                      <a:srgbClr val="FBF3EC"/>
                     </a:solidFill>
                   </a:tcPr>
                 </a:tc>
@@ -4112,7 +4230,7 @@
                       <a:r>
                         <a:rPr sz="1600" b="0">
                           <a:solidFill>
-                            <a:srgbClr val="2B2B2B"/>
+                            <a:srgbClr val="26231F"/>
                           </a:solidFill>
                         </a:rPr>
                         <a:t/>
@@ -4122,30 +4240,30 @@
                   <a:tcPr anchor="ctr" marL="73152" marR="73152">
                     <a:lnL w="9525" cap="flat" cmpd="sng" algn="ctr">
                       <a:solidFill>
-                        <a:srgbClr val="F8DFC9"/>
+                        <a:srgbClr val="F6E4D5"/>
                       </a:solidFill>
                       <a:prstDash val="solid"/>
                     </a:lnL>
                     <a:lnR w="9525" cap="flat" cmpd="sng" algn="ctr">
                       <a:solidFill>
-                        <a:srgbClr val="F8DFC9"/>
+                        <a:srgbClr val="F6E4D5"/>
                       </a:solidFill>
                       <a:prstDash val="solid"/>
                     </a:lnR>
                     <a:lnT w="9525" cap="flat" cmpd="sng" algn="ctr">
                       <a:solidFill>
-                        <a:srgbClr val="F8DFC9"/>
+                        <a:srgbClr val="F6E4D5"/>
                       </a:solidFill>
                       <a:prstDash val="solid"/>
                     </a:lnT>
                     <a:lnB w="9525" cap="flat" cmpd="sng" algn="ctr">
                       <a:solidFill>
-                        <a:srgbClr val="F8DFC9"/>
+                        <a:srgbClr val="F6E4D5"/>
                       </a:solidFill>
                       <a:prstDash val="solid"/>
                     </a:lnB>
                     <a:solidFill>
-                      <a:srgbClr val="FCF4ED"/>
+                      <a:srgbClr val="FBF3EC"/>
                     </a:solidFill>
                   </a:tcPr>
                 </a:tc>
@@ -4160,7 +4278,7 @@
                       <a:r>
                         <a:rPr sz="1600" b="1">
                           <a:solidFill>
-                            <a:srgbClr val="723F13"/>
+                            <a:srgbClr val="493727"/>
                           </a:solidFill>
                         </a:rPr>
                         <a:t>직업·학교</a:t>
@@ -4170,30 +4288,30 @@
                   <a:tcPr anchor="ctr" marL="73152" marR="73152">
                     <a:lnL w="9525" cap="flat" cmpd="sng" algn="ctr">
                       <a:solidFill>
-                        <a:srgbClr val="F8DFC9"/>
+                        <a:srgbClr val="F6E4D5"/>
                       </a:solidFill>
                       <a:prstDash val="solid"/>
                     </a:lnL>
                     <a:lnR w="9525" cap="flat" cmpd="sng" algn="ctr">
                       <a:solidFill>
-                        <a:srgbClr val="F8DFC9"/>
+                        <a:srgbClr val="F6E4D5"/>
                       </a:solidFill>
                       <a:prstDash val="solid"/>
                     </a:lnR>
                     <a:lnT w="9525" cap="flat" cmpd="sng" algn="ctr">
                       <a:solidFill>
-                        <a:srgbClr val="F8DFC9"/>
+                        <a:srgbClr val="F6E4D5"/>
                       </a:solidFill>
                       <a:prstDash val="solid"/>
                     </a:lnT>
                     <a:lnB w="9525" cap="flat" cmpd="sng" algn="ctr">
                       <a:solidFill>
-                        <a:srgbClr val="F8DFC9"/>
+                        <a:srgbClr val="F6E4D5"/>
                       </a:solidFill>
                       <a:prstDash val="solid"/>
                     </a:lnB>
                     <a:solidFill>
-                      <a:srgbClr val="F8DFC9"/>
+                      <a:srgbClr val="F6E4D5"/>
                     </a:solidFill>
                   </a:tcPr>
                 </a:tc>
@@ -4206,7 +4324,7 @@
                       <a:r>
                         <a:rPr sz="1600" b="0">
                           <a:solidFill>
-                            <a:srgbClr val="2B2B2B"/>
+                            <a:srgbClr val="26231F"/>
                           </a:solidFill>
                         </a:rPr>
                         <a:t/>
@@ -4216,25 +4334,25 @@
                   <a:tcPr anchor="ctr" marL="73152" marR="73152">
                     <a:lnL w="9525" cap="flat" cmpd="sng" algn="ctr">
                       <a:solidFill>
-                        <a:srgbClr val="F8DFC9"/>
+                        <a:srgbClr val="F6E4D5"/>
                       </a:solidFill>
                       <a:prstDash val="solid"/>
                     </a:lnL>
                     <a:lnR w="9525" cap="flat" cmpd="sng" algn="ctr">
                       <a:solidFill>
-                        <a:srgbClr val="F8DFC9"/>
+                        <a:srgbClr val="F6E4D5"/>
                       </a:solidFill>
                       <a:prstDash val="solid"/>
                     </a:lnR>
                     <a:lnT w="9525" cap="flat" cmpd="sng" algn="ctr">
                       <a:solidFill>
-                        <a:srgbClr val="F8DFC9"/>
+                        <a:srgbClr val="F6E4D5"/>
                       </a:solidFill>
                       <a:prstDash val="solid"/>
                     </a:lnT>
                     <a:lnB w="9525" cap="flat" cmpd="sng" algn="ctr">
                       <a:solidFill>
-                        <a:srgbClr val="F8DFC9"/>
+                        <a:srgbClr val="F6E4D5"/>
                       </a:solidFill>
                       <a:prstDash val="solid"/>
                     </a:lnB>
@@ -4252,7 +4370,7 @@
                       <a:r>
                         <a:rPr sz="1600" b="0">
                           <a:solidFill>
-                            <a:srgbClr val="2B2B2B"/>
+                            <a:srgbClr val="26231F"/>
                           </a:solidFill>
                         </a:rPr>
                         <a:t/>
@@ -4262,25 +4380,25 @@
                   <a:tcPr anchor="ctr" marL="73152" marR="73152">
                     <a:lnL w="9525" cap="flat" cmpd="sng" algn="ctr">
                       <a:solidFill>
-                        <a:srgbClr val="F8DFC9"/>
+                        <a:srgbClr val="F6E4D5"/>
                       </a:solidFill>
                       <a:prstDash val="solid"/>
                     </a:lnL>
                     <a:lnR w="9525" cap="flat" cmpd="sng" algn="ctr">
                       <a:solidFill>
-                        <a:srgbClr val="F8DFC9"/>
+                        <a:srgbClr val="F6E4D5"/>
                       </a:solidFill>
                       <a:prstDash val="solid"/>
                     </a:lnR>
                     <a:lnT w="9525" cap="flat" cmpd="sng" algn="ctr">
                       <a:solidFill>
-                        <a:srgbClr val="F8DFC9"/>
+                        <a:srgbClr val="F6E4D5"/>
                       </a:solidFill>
                       <a:prstDash val="solid"/>
                     </a:lnT>
                     <a:lnB w="9525" cap="flat" cmpd="sng" algn="ctr">
                       <a:solidFill>
-                        <a:srgbClr val="F8DFC9"/>
+                        <a:srgbClr val="F6E4D5"/>
                       </a:solidFill>
                       <a:prstDash val="solid"/>
                     </a:lnB>
@@ -4298,7 +4416,7 @@
                       <a:r>
                         <a:rPr sz="1600" b="0">
                           <a:solidFill>
-                            <a:srgbClr val="2B2B2B"/>
+                            <a:srgbClr val="26231F"/>
                           </a:solidFill>
                         </a:rPr>
                         <a:t/>
@@ -4308,25 +4426,25 @@
                   <a:tcPr anchor="ctr" marL="73152" marR="73152">
                     <a:lnL w="9525" cap="flat" cmpd="sng" algn="ctr">
                       <a:solidFill>
-                        <a:srgbClr val="F8DFC9"/>
+                        <a:srgbClr val="F6E4D5"/>
                       </a:solidFill>
                       <a:prstDash val="solid"/>
                     </a:lnL>
                     <a:lnR w="9525" cap="flat" cmpd="sng" algn="ctr">
                       <a:solidFill>
-                        <a:srgbClr val="F8DFC9"/>
+                        <a:srgbClr val="F6E4D5"/>
                       </a:solidFill>
                       <a:prstDash val="solid"/>
                     </a:lnR>
                     <a:lnT w="9525" cap="flat" cmpd="sng" algn="ctr">
                       <a:solidFill>
-                        <a:srgbClr val="F8DFC9"/>
+                        <a:srgbClr val="F6E4D5"/>
                       </a:solidFill>
                       <a:prstDash val="solid"/>
                     </a:lnT>
                     <a:lnB w="9525" cap="flat" cmpd="sng" algn="ctr">
                       <a:solidFill>
-                        <a:srgbClr val="F8DFC9"/>
+                        <a:srgbClr val="F6E4D5"/>
                       </a:solidFill>
                       <a:prstDash val="solid"/>
                     </a:lnB>
@@ -4346,7 +4464,7 @@
                       <a:r>
                         <a:rPr sz="1600" b="1">
                           <a:solidFill>
-                            <a:srgbClr val="723F13"/>
+                            <a:srgbClr val="493727"/>
                           </a:solidFill>
                         </a:rPr>
                         <a:t>메모</a:t>
@@ -4356,30 +4474,30 @@
                   <a:tcPr anchor="ctr" marL="73152" marR="73152">
                     <a:lnL w="9525" cap="flat" cmpd="sng" algn="ctr">
                       <a:solidFill>
-                        <a:srgbClr val="F8DFC9"/>
+                        <a:srgbClr val="F6E4D5"/>
                       </a:solidFill>
                       <a:prstDash val="solid"/>
                     </a:lnL>
                     <a:lnR w="9525" cap="flat" cmpd="sng" algn="ctr">
                       <a:solidFill>
-                        <a:srgbClr val="F8DFC9"/>
+                        <a:srgbClr val="F6E4D5"/>
                       </a:solidFill>
                       <a:prstDash val="solid"/>
                     </a:lnR>
                     <a:lnT w="9525" cap="flat" cmpd="sng" algn="ctr">
                       <a:solidFill>
-                        <a:srgbClr val="F8DFC9"/>
+                        <a:srgbClr val="F6E4D5"/>
                       </a:solidFill>
                       <a:prstDash val="solid"/>
                     </a:lnT>
                     <a:lnB w="9525" cap="flat" cmpd="sng" algn="ctr">
                       <a:solidFill>
-                        <a:srgbClr val="F8DFC9"/>
+                        <a:srgbClr val="F6E4D5"/>
                       </a:solidFill>
                       <a:prstDash val="solid"/>
                     </a:lnB>
                     <a:solidFill>
-                      <a:srgbClr val="F8DFC9"/>
+                      <a:srgbClr val="F6E4D5"/>
                     </a:solidFill>
                   </a:tcPr>
                 </a:tc>
@@ -4392,7 +4510,7 @@
                       <a:r>
                         <a:rPr sz="1600" b="0">
                           <a:solidFill>
-                            <a:srgbClr val="2B2B2B"/>
+                            <a:srgbClr val="26231F"/>
                           </a:solidFill>
                         </a:rPr>
                         <a:t/>
@@ -4402,30 +4520,30 @@
                   <a:tcPr anchor="ctr" marL="73152" marR="73152">
                     <a:lnL w="9525" cap="flat" cmpd="sng" algn="ctr">
                       <a:solidFill>
-                        <a:srgbClr val="F8DFC9"/>
+                        <a:srgbClr val="F6E4D5"/>
                       </a:solidFill>
                       <a:prstDash val="solid"/>
                     </a:lnL>
                     <a:lnR w="9525" cap="flat" cmpd="sng" algn="ctr">
                       <a:solidFill>
-                        <a:srgbClr val="F8DFC9"/>
+                        <a:srgbClr val="F6E4D5"/>
                       </a:solidFill>
                       <a:prstDash val="solid"/>
                     </a:lnR>
                     <a:lnT w="9525" cap="flat" cmpd="sng" algn="ctr">
                       <a:solidFill>
-                        <a:srgbClr val="F8DFC9"/>
+                        <a:srgbClr val="F6E4D5"/>
                       </a:solidFill>
                       <a:prstDash val="solid"/>
                     </a:lnT>
                     <a:lnB w="9525" cap="flat" cmpd="sng" algn="ctr">
                       <a:solidFill>
-                        <a:srgbClr val="F8DFC9"/>
+                        <a:srgbClr val="F6E4D5"/>
                       </a:solidFill>
                       <a:prstDash val="solid"/>
                     </a:lnB>
                     <a:solidFill>
-                      <a:srgbClr val="FCF4ED"/>
+                      <a:srgbClr val="FBF3EC"/>
                     </a:solidFill>
                   </a:tcPr>
                 </a:tc>
@@ -4438,7 +4556,7 @@
                       <a:r>
                         <a:rPr sz="1600" b="0">
                           <a:solidFill>
-                            <a:srgbClr val="2B2B2B"/>
+                            <a:srgbClr val="26231F"/>
                           </a:solidFill>
                         </a:rPr>
                         <a:t/>
@@ -4448,30 +4566,30 @@
                   <a:tcPr anchor="ctr" marL="73152" marR="73152">
                     <a:lnL w="9525" cap="flat" cmpd="sng" algn="ctr">
                       <a:solidFill>
-                        <a:srgbClr val="F8DFC9"/>
+                        <a:srgbClr val="F6E4D5"/>
                       </a:solidFill>
                       <a:prstDash val="solid"/>
                     </a:lnL>
                     <a:lnR w="9525" cap="flat" cmpd="sng" algn="ctr">
                       <a:solidFill>
-                        <a:srgbClr val="F8DFC9"/>
+                        <a:srgbClr val="F6E4D5"/>
                       </a:solidFill>
                       <a:prstDash val="solid"/>
                     </a:lnR>
                     <a:lnT w="9525" cap="flat" cmpd="sng" algn="ctr">
                       <a:solidFill>
-                        <a:srgbClr val="F8DFC9"/>
+                        <a:srgbClr val="F6E4D5"/>
                       </a:solidFill>
                       <a:prstDash val="solid"/>
                     </a:lnT>
                     <a:lnB w="9525" cap="flat" cmpd="sng" algn="ctr">
                       <a:solidFill>
-                        <a:srgbClr val="F8DFC9"/>
+                        <a:srgbClr val="F6E4D5"/>
                       </a:solidFill>
                       <a:prstDash val="solid"/>
                     </a:lnB>
                     <a:solidFill>
-                      <a:srgbClr val="FCF4ED"/>
+                      <a:srgbClr val="FBF3EC"/>
                     </a:solidFill>
                   </a:tcPr>
                 </a:tc>
@@ -4484,7 +4602,7 @@
                       <a:r>
                         <a:rPr sz="1600" b="0">
                           <a:solidFill>
-                            <a:srgbClr val="2B2B2B"/>
+                            <a:srgbClr val="26231F"/>
                           </a:solidFill>
                         </a:rPr>
                         <a:t/>
@@ -4494,30 +4612,30 @@
                   <a:tcPr anchor="ctr" marL="73152" marR="73152">
                     <a:lnL w="9525" cap="flat" cmpd="sng" algn="ctr">
                       <a:solidFill>
-                        <a:srgbClr val="F8DFC9"/>
+                        <a:srgbClr val="F6E4D5"/>
                       </a:solidFill>
                       <a:prstDash val="solid"/>
                     </a:lnL>
                     <a:lnR w="9525" cap="flat" cmpd="sng" algn="ctr">
                       <a:solidFill>
-                        <a:srgbClr val="F8DFC9"/>
+                        <a:srgbClr val="F6E4D5"/>
                       </a:solidFill>
                       <a:prstDash val="solid"/>
                     </a:lnR>
                     <a:lnT w="9525" cap="flat" cmpd="sng" algn="ctr">
                       <a:solidFill>
-                        <a:srgbClr val="F8DFC9"/>
+                        <a:srgbClr val="F6E4D5"/>
                       </a:solidFill>
                       <a:prstDash val="solid"/>
                     </a:lnT>
                     <a:lnB w="9525" cap="flat" cmpd="sng" algn="ctr">
                       <a:solidFill>
-                        <a:srgbClr val="F8DFC9"/>
+                        <a:srgbClr val="F6E4D5"/>
                       </a:solidFill>
                       <a:prstDash val="solid"/>
                     </a:lnB>
                     <a:solidFill>
-                      <a:srgbClr val="FCF4ED"/>
+                      <a:srgbClr val="FBF3EC"/>
                     </a:solidFill>
                   </a:tcPr>
                 </a:tc>
@@ -4540,7 +4658,7 @@
     <p:bg>
       <p:bgPr>
         <a:solidFill>
-          <a:srgbClr val="FCF4ED"/>
+          <a:srgbClr val="FBF3EC"/>
         </a:solidFill>
         <a:effectLst/>
       </p:bgPr>
@@ -4560,14 +4678,14 @@
         </p:nvSpPr>
         <p:spPr>
           <a:xfrm>
-            <a:off x="0" y="0"/>
-            <a:ext cx="411480" cy="6858000"/>
+            <a:off x="640080" y="6400800"/>
+            <a:ext cx="10911535" cy="10972"/>
           </a:xfrm>
           <a:prstGeom prst="rect">
             <a:avLst/>
           </a:prstGeom>
           <a:solidFill>
-            <a:srgbClr val="CA7021"/>
+            <a:srgbClr val="26231F"/>
           </a:solidFill>
           <a:ln>
             <a:noFill/>
@@ -4583,20 +4701,58 @@
       </p:sp>
       <p:sp>
         <p:nvSpPr>
-          <p:cNvPr id="4" name="장식"/>
-          <p:cNvSpPr/>
+          <p:cNvPr id="4" name="하단 라벨"/>
+          <p:cNvSpPr txBox="1"/>
           <p:nvPr/>
         </p:nvSpPr>
         <p:spPr>
           <a:xfrm>
-            <a:off x="411480" y="0"/>
-            <a:ext cx="64008" cy="6858000"/>
+            <a:off x="640080" y="6437376"/>
+            <a:ext cx="5486400" cy="274320"/>
           </a:xfrm>
           <a:prstGeom prst="rect">
             <a:avLst/>
           </a:prstGeom>
+          <a:noFill/>
+        </p:spPr>
+        <p:txBody>
+          <a:bodyPr wrap="square" lIns="54864" rIns="54864" tIns="27432" bIns="27432" anchor="ctr">
+            <a:noAutofit/>
+          </a:bodyPr>
+          <a:lstStyle/>
+          <a:p>
+            <a:pPr algn="l">
+              <a:lnSpc>
+                <a:spcPct val="115000"/>
+              </a:lnSpc>
+            </a:pPr>
+            <a:r>
+              <a:rPr sz="900" b="1" i="0" spc="250">
+                <a:solidFill>
+                  <a:srgbClr val="26231F"/>
+                </a:solidFill>
+              </a:rPr>
+              <a:t>INSURANCE CHECK</a:t>
+            </a:r>
+          </a:p>
+        </p:txBody>
+      </p:sp>
+      <p:sp>
+        <p:nvSpPr>
+          <p:cNvPr id="5" name="포인트"/>
+          <p:cNvSpPr/>
+          <p:nvPr/>
+        </p:nvSpPr>
+        <p:spPr>
+          <a:xfrm rot="18900000">
+            <a:off x="11213287" y="6473952"/>
+            <a:ext cx="219456" cy="219456"/>
+          </a:xfrm>
+          <a:prstGeom prst="teardrop">
+            <a:avLst/>
+          </a:prstGeom>
           <a:solidFill>
-            <a:srgbClr val="3B918E"/>
+            <a:srgbClr val="D8A579"/>
           </a:solidFill>
           <a:ln>
             <a:noFill/>
@@ -4622,8 +4778,8 @@
         </p:nvSpPr>
         <p:spPr>
           <a:xfrm>
-            <a:off x="914400" y="457200"/>
-            <a:ext cx="9448495" cy="868680"/>
+            <a:off x="640080" y="502920"/>
+            <a:ext cx="10911535" cy="914400"/>
           </a:xfrm>
         </p:spPr>
         <p:txBody>
@@ -4640,7 +4796,7 @@
             <a:r>
               <a:rPr sz="3000" b="1" i="0">
                 <a:solidFill>
-                  <a:srgbClr val="723F13"/>
+                  <a:srgbClr val="26231F"/>
                 </a:solidFill>
               </a:rPr>
               <a:t>가입한 보험 목록</a:t>
@@ -4650,15 +4806,15 @@
       </p:sp>
       <p:graphicFrame>
         <p:nvGraphicFramePr>
-          <p:cNvPr id="5" name="표"/>
+          <p:cNvPr id="6" name="표"/>
           <p:cNvGraphicFramePr>
             <a:graphicFrameLocks noGrp="1"/>
           </p:cNvGraphicFramePr>
           <p:nvPr/>
         </p:nvGraphicFramePr>
         <p:xfrm>
-          <a:off x="914400" y="1600200"/>
-          <a:ext cx="10637215" cy="4224528"/>
+          <a:off x="640080" y="1600200"/>
+          <a:ext cx="10911535" cy="4224528"/>
         </p:xfrm>
         <a:graphic>
           <a:graphicData uri="http://schemas.openxmlformats.org/drawingml/2006/table">
@@ -4671,7 +4827,7 @@
                 <a:gridCol w="3108960"/>
                 <a:gridCol w="1828800"/>
                 <a:gridCol w="1828800"/>
-                <a:gridCol w="1858975"/>
+                <a:gridCol w="2133295"/>
               </a:tblGrid>
               <a:tr h="603504">
                 <a:tc>
@@ -4683,7 +4839,7 @@
                       <a:r>
                         <a:rPr sz="1400" b="1">
                           <a:solidFill>
-                            <a:srgbClr val="FFFFFF"/>
+                            <a:srgbClr val="26231F"/>
                           </a:solidFill>
                         </a:rPr>
                         <a:t>보험회사</a:t>
@@ -4693,30 +4849,30 @@
                   <a:tcPr anchor="ctr" marL="73152" marR="73152">
                     <a:lnL w="9525" cap="flat" cmpd="sng" algn="ctr">
                       <a:solidFill>
-                        <a:srgbClr val="CA7021"/>
+                        <a:srgbClr val="D8A579"/>
                       </a:solidFill>
                       <a:prstDash val="solid"/>
                     </a:lnL>
                     <a:lnR w="9525" cap="flat" cmpd="sng" algn="ctr">
                       <a:solidFill>
-                        <a:srgbClr val="CA7021"/>
+                        <a:srgbClr val="D8A579"/>
                       </a:solidFill>
                       <a:prstDash val="solid"/>
                     </a:lnR>
                     <a:lnT w="9525" cap="flat" cmpd="sng" algn="ctr">
                       <a:solidFill>
-                        <a:srgbClr val="CA7021"/>
+                        <a:srgbClr val="D8A579"/>
                       </a:solidFill>
                       <a:prstDash val="solid"/>
                     </a:lnT>
                     <a:lnB w="9525" cap="flat" cmpd="sng" algn="ctr">
                       <a:solidFill>
-                        <a:srgbClr val="CA7021"/>
+                        <a:srgbClr val="D8A579"/>
                       </a:solidFill>
                       <a:prstDash val="solid"/>
                     </a:lnB>
                     <a:solidFill>
-                      <a:srgbClr val="CA7021"/>
+                      <a:srgbClr val="D8A579"/>
                     </a:solidFill>
                   </a:tcPr>
                 </a:tc>
@@ -4729,7 +4885,7 @@
                       <a:r>
                         <a:rPr sz="1400" b="1">
                           <a:solidFill>
-                            <a:srgbClr val="FFFFFF"/>
+                            <a:srgbClr val="26231F"/>
                           </a:solidFill>
                         </a:rPr>
                         <a:t>상품명</a:t>
@@ -4739,30 +4895,30 @@
                   <a:tcPr anchor="ctr" marL="73152" marR="73152">
                     <a:lnL w="9525" cap="flat" cmpd="sng" algn="ctr">
                       <a:solidFill>
-                        <a:srgbClr val="CA7021"/>
+                        <a:srgbClr val="D8A579"/>
                       </a:solidFill>
                       <a:prstDash val="solid"/>
                     </a:lnL>
                     <a:lnR w="9525" cap="flat" cmpd="sng" algn="ctr">
                       <a:solidFill>
-                        <a:srgbClr val="CA7021"/>
+                        <a:srgbClr val="D8A579"/>
                       </a:solidFill>
                       <a:prstDash val="solid"/>
                     </a:lnR>
                     <a:lnT w="9525" cap="flat" cmpd="sng" algn="ctr">
                       <a:solidFill>
-                        <a:srgbClr val="CA7021"/>
+                        <a:srgbClr val="D8A579"/>
                       </a:solidFill>
                       <a:prstDash val="solid"/>
                     </a:lnT>
                     <a:lnB w="9525" cap="flat" cmpd="sng" algn="ctr">
                       <a:solidFill>
-                        <a:srgbClr val="CA7021"/>
+                        <a:srgbClr val="D8A579"/>
                       </a:solidFill>
                       <a:prstDash val="solid"/>
                     </a:lnB>
                     <a:solidFill>
-                      <a:srgbClr val="CA7021"/>
+                      <a:srgbClr val="D8A579"/>
                     </a:solidFill>
                   </a:tcPr>
                 </a:tc>
@@ -4775,7 +4931,7 @@
                       <a:r>
                         <a:rPr sz="1400" b="1">
                           <a:solidFill>
-                            <a:srgbClr val="FFFFFF"/>
+                            <a:srgbClr val="26231F"/>
                           </a:solidFill>
                         </a:rPr>
                         <a:t>종류</a:t>
@@ -4785,30 +4941,30 @@
                   <a:tcPr anchor="ctr" marL="73152" marR="73152">
                     <a:lnL w="9525" cap="flat" cmpd="sng" algn="ctr">
                       <a:solidFill>
-                        <a:srgbClr val="CA7021"/>
+                        <a:srgbClr val="D8A579"/>
                       </a:solidFill>
                       <a:prstDash val="solid"/>
                     </a:lnL>
                     <a:lnR w="9525" cap="flat" cmpd="sng" algn="ctr">
                       <a:solidFill>
-                        <a:srgbClr val="CA7021"/>
+                        <a:srgbClr val="D8A579"/>
                       </a:solidFill>
                       <a:prstDash val="solid"/>
                     </a:lnR>
                     <a:lnT w="9525" cap="flat" cmpd="sng" algn="ctr">
                       <a:solidFill>
-                        <a:srgbClr val="CA7021"/>
+                        <a:srgbClr val="D8A579"/>
                       </a:solidFill>
                       <a:prstDash val="solid"/>
                     </a:lnT>
                     <a:lnB w="9525" cap="flat" cmpd="sng" algn="ctr">
                       <a:solidFill>
-                        <a:srgbClr val="CA7021"/>
+                        <a:srgbClr val="D8A579"/>
                       </a:solidFill>
                       <a:prstDash val="solid"/>
                     </a:lnB>
                     <a:solidFill>
-                      <a:srgbClr val="CA7021"/>
+                      <a:srgbClr val="D8A579"/>
                     </a:solidFill>
                   </a:tcPr>
                 </a:tc>
@@ -4821,7 +4977,7 @@
                       <a:r>
                         <a:rPr sz="1400" b="1">
                           <a:solidFill>
-                            <a:srgbClr val="FFFFFF"/>
+                            <a:srgbClr val="26231F"/>
                           </a:solidFill>
                         </a:rPr>
                         <a:t>만기일</a:t>
@@ -4831,30 +4987,30 @@
                   <a:tcPr anchor="ctr" marL="73152" marR="73152">
                     <a:lnL w="9525" cap="flat" cmpd="sng" algn="ctr">
                       <a:solidFill>
-                        <a:srgbClr val="CA7021"/>
+                        <a:srgbClr val="D8A579"/>
                       </a:solidFill>
                       <a:prstDash val="solid"/>
                     </a:lnL>
                     <a:lnR w="9525" cap="flat" cmpd="sng" algn="ctr">
                       <a:solidFill>
-                        <a:srgbClr val="CA7021"/>
+                        <a:srgbClr val="D8A579"/>
                       </a:solidFill>
                       <a:prstDash val="solid"/>
                     </a:lnR>
                     <a:lnT w="9525" cap="flat" cmpd="sng" algn="ctr">
                       <a:solidFill>
-                        <a:srgbClr val="CA7021"/>
+                        <a:srgbClr val="D8A579"/>
                       </a:solidFill>
                       <a:prstDash val="solid"/>
                     </a:lnT>
                     <a:lnB w="9525" cap="flat" cmpd="sng" algn="ctr">
                       <a:solidFill>
-                        <a:srgbClr val="CA7021"/>
+                        <a:srgbClr val="D8A579"/>
                       </a:solidFill>
                       <a:prstDash val="solid"/>
                     </a:lnB>
                     <a:solidFill>
-                      <a:srgbClr val="CA7021"/>
+                      <a:srgbClr val="D8A579"/>
                     </a:solidFill>
                   </a:tcPr>
                 </a:tc>
@@ -4867,7 +5023,7 @@
                       <a:r>
                         <a:rPr sz="1400" b="1">
                           <a:solidFill>
-                            <a:srgbClr val="FFFFFF"/>
+                            <a:srgbClr val="26231F"/>
                           </a:solidFill>
                         </a:rPr>
                         <a:t>월 보험료</a:t>
@@ -4877,30 +5033,30 @@
                   <a:tcPr anchor="ctr" marL="73152" marR="73152">
                     <a:lnL w="9525" cap="flat" cmpd="sng" algn="ctr">
                       <a:solidFill>
-                        <a:srgbClr val="CA7021"/>
+                        <a:srgbClr val="D8A579"/>
                       </a:solidFill>
                       <a:prstDash val="solid"/>
                     </a:lnL>
                     <a:lnR w="9525" cap="flat" cmpd="sng" algn="ctr">
                       <a:solidFill>
-                        <a:srgbClr val="CA7021"/>
+                        <a:srgbClr val="D8A579"/>
                       </a:solidFill>
                       <a:prstDash val="solid"/>
                     </a:lnR>
                     <a:lnT w="9525" cap="flat" cmpd="sng" algn="ctr">
                       <a:solidFill>
-                        <a:srgbClr val="CA7021"/>
+                        <a:srgbClr val="D8A579"/>
                       </a:solidFill>
                       <a:prstDash val="solid"/>
                     </a:lnT>
                     <a:lnB w="9525" cap="flat" cmpd="sng" algn="ctr">
                       <a:solidFill>
-                        <a:srgbClr val="CA7021"/>
+                        <a:srgbClr val="D8A579"/>
                       </a:solidFill>
                       <a:prstDash val="solid"/>
                     </a:lnB>
                     <a:solidFill>
-                      <a:srgbClr val="CA7021"/>
+                      <a:srgbClr val="D8A579"/>
                     </a:solidFill>
                   </a:tcPr>
                 </a:tc>
@@ -4915,7 +5071,7 @@
                       <a:r>
                         <a:rPr sz="1400" b="0">
                           <a:solidFill>
-                            <a:srgbClr val="2B2B2B"/>
+                            <a:srgbClr val="26231F"/>
                           </a:solidFill>
                         </a:rPr>
                         <a:t/>
@@ -4925,25 +5081,25 @@
                   <a:tcPr anchor="ctr" marL="73152" marR="73152">
                     <a:lnL w="9525" cap="flat" cmpd="sng" algn="ctr">
                       <a:solidFill>
-                        <a:srgbClr val="F8DFC9"/>
+                        <a:srgbClr val="F6E4D5"/>
                       </a:solidFill>
                       <a:prstDash val="solid"/>
                     </a:lnL>
                     <a:lnR w="9525" cap="flat" cmpd="sng" algn="ctr">
                       <a:solidFill>
-                        <a:srgbClr val="F8DFC9"/>
+                        <a:srgbClr val="F6E4D5"/>
                       </a:solidFill>
                       <a:prstDash val="solid"/>
                     </a:lnR>
                     <a:lnT w="9525" cap="flat" cmpd="sng" algn="ctr">
                       <a:solidFill>
-                        <a:srgbClr val="F8DFC9"/>
+                        <a:srgbClr val="F6E4D5"/>
                       </a:solidFill>
                       <a:prstDash val="solid"/>
                     </a:lnT>
                     <a:lnB w="9525" cap="flat" cmpd="sng" algn="ctr">
                       <a:solidFill>
-                        <a:srgbClr val="F8DFC9"/>
+                        <a:srgbClr val="F6E4D5"/>
                       </a:solidFill>
                       <a:prstDash val="solid"/>
                     </a:lnB>
@@ -4961,7 +5117,7 @@
                       <a:r>
                         <a:rPr sz="1400" b="0">
                           <a:solidFill>
-                            <a:srgbClr val="2B2B2B"/>
+                            <a:srgbClr val="26231F"/>
                           </a:solidFill>
                         </a:rPr>
                         <a:t/>
@@ -4971,25 +5127,25 @@
                   <a:tcPr anchor="ctr" marL="73152" marR="73152">
                     <a:lnL w="9525" cap="flat" cmpd="sng" algn="ctr">
                       <a:solidFill>
-                        <a:srgbClr val="F8DFC9"/>
+                        <a:srgbClr val="F6E4D5"/>
                       </a:solidFill>
                       <a:prstDash val="solid"/>
                     </a:lnL>
                     <a:lnR w="9525" cap="flat" cmpd="sng" algn="ctr">
                       <a:solidFill>
-                        <a:srgbClr val="F8DFC9"/>
+                        <a:srgbClr val="F6E4D5"/>
                       </a:solidFill>
                       <a:prstDash val="solid"/>
                     </a:lnR>
                     <a:lnT w="9525" cap="flat" cmpd="sng" algn="ctr">
                       <a:solidFill>
-                        <a:srgbClr val="F8DFC9"/>
+                        <a:srgbClr val="F6E4D5"/>
                       </a:solidFill>
                       <a:prstDash val="solid"/>
                     </a:lnT>
                     <a:lnB w="9525" cap="flat" cmpd="sng" algn="ctr">
                       <a:solidFill>
-                        <a:srgbClr val="F8DFC9"/>
+                        <a:srgbClr val="F6E4D5"/>
                       </a:solidFill>
                       <a:prstDash val="solid"/>
                     </a:lnB>
@@ -5007,7 +5163,7 @@
                       <a:r>
                         <a:rPr sz="1400" b="0">
                           <a:solidFill>
-                            <a:srgbClr val="2B2B2B"/>
+                            <a:srgbClr val="26231F"/>
                           </a:solidFill>
                         </a:rPr>
                         <a:t/>
@@ -5017,25 +5173,25 @@
                   <a:tcPr anchor="ctr" marL="73152" marR="73152">
                     <a:lnL w="9525" cap="flat" cmpd="sng" algn="ctr">
                       <a:solidFill>
-                        <a:srgbClr val="F8DFC9"/>
+                        <a:srgbClr val="F6E4D5"/>
                       </a:solidFill>
                       <a:prstDash val="solid"/>
                     </a:lnL>
                     <a:lnR w="9525" cap="flat" cmpd="sng" algn="ctr">
                       <a:solidFill>
-                        <a:srgbClr val="F8DFC9"/>
+                        <a:srgbClr val="F6E4D5"/>
                       </a:solidFill>
                       <a:prstDash val="solid"/>
                     </a:lnR>
                     <a:lnT w="9525" cap="flat" cmpd="sng" algn="ctr">
                       <a:solidFill>
-                        <a:srgbClr val="F8DFC9"/>
+                        <a:srgbClr val="F6E4D5"/>
                       </a:solidFill>
                       <a:prstDash val="solid"/>
                     </a:lnT>
                     <a:lnB w="9525" cap="flat" cmpd="sng" algn="ctr">
                       <a:solidFill>
-                        <a:srgbClr val="F8DFC9"/>
+                        <a:srgbClr val="F6E4D5"/>
                       </a:solidFill>
                       <a:prstDash val="solid"/>
                     </a:lnB>
@@ -5053,7 +5209,7 @@
                       <a:r>
                         <a:rPr sz="1400" b="0">
                           <a:solidFill>
-                            <a:srgbClr val="2B2B2B"/>
+                            <a:srgbClr val="26231F"/>
                           </a:solidFill>
                         </a:rPr>
                         <a:t/>
@@ -5063,25 +5219,25 @@
                   <a:tcPr anchor="ctr" marL="73152" marR="73152">
                     <a:lnL w="9525" cap="flat" cmpd="sng" algn="ctr">
                       <a:solidFill>
-                        <a:srgbClr val="F8DFC9"/>
+                        <a:srgbClr val="F6E4D5"/>
                       </a:solidFill>
                       <a:prstDash val="solid"/>
                     </a:lnL>
                     <a:lnR w="9525" cap="flat" cmpd="sng" algn="ctr">
                       <a:solidFill>
-                        <a:srgbClr val="F8DFC9"/>
+                        <a:srgbClr val="F6E4D5"/>
                       </a:solidFill>
                       <a:prstDash val="solid"/>
                     </a:lnR>
                     <a:lnT w="9525" cap="flat" cmpd="sng" algn="ctr">
                       <a:solidFill>
-                        <a:srgbClr val="F8DFC9"/>
+                        <a:srgbClr val="F6E4D5"/>
                       </a:solidFill>
                       <a:prstDash val="solid"/>
                     </a:lnT>
                     <a:lnB w="9525" cap="flat" cmpd="sng" algn="ctr">
                       <a:solidFill>
-                        <a:srgbClr val="F8DFC9"/>
+                        <a:srgbClr val="F6E4D5"/>
                       </a:solidFill>
                       <a:prstDash val="solid"/>
                     </a:lnB>
@@ -5099,7 +5255,7 @@
                       <a:r>
                         <a:rPr sz="1400" b="0">
                           <a:solidFill>
-                            <a:srgbClr val="2B2B2B"/>
+                            <a:srgbClr val="26231F"/>
                           </a:solidFill>
                         </a:rPr>
                         <a:t/>
@@ -5109,25 +5265,25 @@
                   <a:tcPr anchor="ctr" marL="73152" marR="73152">
                     <a:lnL w="9525" cap="flat" cmpd="sng" algn="ctr">
                       <a:solidFill>
-                        <a:srgbClr val="F8DFC9"/>
+                        <a:srgbClr val="F6E4D5"/>
                       </a:solidFill>
                       <a:prstDash val="solid"/>
                     </a:lnL>
                     <a:lnR w="9525" cap="flat" cmpd="sng" algn="ctr">
                       <a:solidFill>
-                        <a:srgbClr val="F8DFC9"/>
+                        <a:srgbClr val="F6E4D5"/>
                       </a:solidFill>
                       <a:prstDash val="solid"/>
                     </a:lnR>
                     <a:lnT w="9525" cap="flat" cmpd="sng" algn="ctr">
                       <a:solidFill>
-                        <a:srgbClr val="F8DFC9"/>
+                        <a:srgbClr val="F6E4D5"/>
                       </a:solidFill>
                       <a:prstDash val="solid"/>
                     </a:lnT>
                     <a:lnB w="9525" cap="flat" cmpd="sng" algn="ctr">
                       <a:solidFill>
-                        <a:srgbClr val="F8DFC9"/>
+                        <a:srgbClr val="F6E4D5"/>
                       </a:solidFill>
                       <a:prstDash val="solid"/>
                     </a:lnB>
@@ -5147,7 +5303,7 @@
                       <a:r>
                         <a:rPr sz="1400" b="0">
                           <a:solidFill>
-                            <a:srgbClr val="2B2B2B"/>
+                            <a:srgbClr val="26231F"/>
                           </a:solidFill>
                         </a:rPr>
                         <a:t/>
@@ -5157,30 +5313,30 @@
                   <a:tcPr anchor="ctr" marL="73152" marR="73152">
                     <a:lnL w="9525" cap="flat" cmpd="sng" algn="ctr">
                       <a:solidFill>
-                        <a:srgbClr val="F8DFC9"/>
+                        <a:srgbClr val="F6E4D5"/>
                       </a:solidFill>
                       <a:prstDash val="solid"/>
                     </a:lnL>
                     <a:lnR w="9525" cap="flat" cmpd="sng" algn="ctr">
                       <a:solidFill>
-                        <a:srgbClr val="F8DFC9"/>
+                        <a:srgbClr val="F6E4D5"/>
                       </a:solidFill>
                       <a:prstDash val="solid"/>
                     </a:lnR>
                     <a:lnT w="9525" cap="flat" cmpd="sng" algn="ctr">
                       <a:solidFill>
-                        <a:srgbClr val="F8DFC9"/>
+                        <a:srgbClr val="F6E4D5"/>
                       </a:solidFill>
                       <a:prstDash val="solid"/>
                     </a:lnT>
                     <a:lnB w="9525" cap="flat" cmpd="sng" algn="ctr">
                       <a:solidFill>
-                        <a:srgbClr val="F8DFC9"/>
+                        <a:srgbClr val="F6E4D5"/>
                       </a:solidFill>
                       <a:prstDash val="solid"/>
                     </a:lnB>
                     <a:solidFill>
-                      <a:srgbClr val="FCF4ED"/>
+                      <a:srgbClr val="FBF3EC"/>
                     </a:solidFill>
                   </a:tcPr>
                 </a:tc>
@@ -5193,7 +5349,7 @@
                       <a:r>
                         <a:rPr sz="1400" b="0">
                           <a:solidFill>
-                            <a:srgbClr val="2B2B2B"/>
+                            <a:srgbClr val="26231F"/>
                           </a:solidFill>
                         </a:rPr>
                         <a:t/>
@@ -5203,30 +5359,30 @@
                   <a:tcPr anchor="ctr" marL="73152" marR="73152">
                     <a:lnL w="9525" cap="flat" cmpd="sng" algn="ctr">
                       <a:solidFill>
-                        <a:srgbClr val="F8DFC9"/>
+                        <a:srgbClr val="F6E4D5"/>
                       </a:solidFill>
                       <a:prstDash val="solid"/>
                     </a:lnL>
                     <a:lnR w="9525" cap="flat" cmpd="sng" algn="ctr">
                       <a:solidFill>
-                        <a:srgbClr val="F8DFC9"/>
+                        <a:srgbClr val="F6E4D5"/>
                       </a:solidFill>
                       <a:prstDash val="solid"/>
                     </a:lnR>
                     <a:lnT w="9525" cap="flat" cmpd="sng" algn="ctr">
                       <a:solidFill>
-                        <a:srgbClr val="F8DFC9"/>
+                        <a:srgbClr val="F6E4D5"/>
                       </a:solidFill>
                       <a:prstDash val="solid"/>
                     </a:lnT>
                     <a:lnB w="9525" cap="flat" cmpd="sng" algn="ctr">
                       <a:solidFill>
-                        <a:srgbClr val="F8DFC9"/>
+                        <a:srgbClr val="F6E4D5"/>
                       </a:solidFill>
                       <a:prstDash val="solid"/>
                     </a:lnB>
                     <a:solidFill>
-                      <a:srgbClr val="FCF4ED"/>
+                      <a:srgbClr val="FBF3EC"/>
                     </a:solidFill>
                   </a:tcPr>
                 </a:tc>
@@ -5239,7 +5395,7 @@
                       <a:r>
                         <a:rPr sz="1400" b="0">
                           <a:solidFill>
-                            <a:srgbClr val="2B2B2B"/>
+                            <a:srgbClr val="26231F"/>
                           </a:solidFill>
                         </a:rPr>
                         <a:t/>
@@ -5249,30 +5405,30 @@
                   <a:tcPr anchor="ctr" marL="73152" marR="73152">
                     <a:lnL w="9525" cap="flat" cmpd="sng" algn="ctr">
                       <a:solidFill>
-                        <a:srgbClr val="F8DFC9"/>
+                        <a:srgbClr val="F6E4D5"/>
                       </a:solidFill>
                       <a:prstDash val="solid"/>
                     </a:lnL>
                     <a:lnR w="9525" cap="flat" cmpd="sng" algn="ctr">
                       <a:solidFill>
-                        <a:srgbClr val="F8DFC9"/>
+                        <a:srgbClr val="F6E4D5"/>
                       </a:solidFill>
                       <a:prstDash val="solid"/>
                     </a:lnR>
                     <a:lnT w="9525" cap="flat" cmpd="sng" algn="ctr">
                       <a:solidFill>
-                        <a:srgbClr val="F8DFC9"/>
+                        <a:srgbClr val="F6E4D5"/>
                       </a:solidFill>
                       <a:prstDash val="solid"/>
                     </a:lnT>
                     <a:lnB w="9525" cap="flat" cmpd="sng" algn="ctr">
                       <a:solidFill>
-                        <a:srgbClr val="F8DFC9"/>
+                        <a:srgbClr val="F6E4D5"/>
                       </a:solidFill>
                       <a:prstDash val="solid"/>
                     </a:lnB>
                     <a:solidFill>
-                      <a:srgbClr val="FCF4ED"/>
+                      <a:srgbClr val="FBF3EC"/>
                     </a:solidFill>
                   </a:tcPr>
                 </a:tc>
@@ -5285,7 +5441,7 @@
                       <a:r>
                         <a:rPr sz="1400" b="0">
                           <a:solidFill>
-                            <a:srgbClr val="2B2B2B"/>
+                            <a:srgbClr val="26231F"/>
                           </a:solidFill>
                         </a:rPr>
                         <a:t/>
@@ -5295,30 +5451,30 @@
                   <a:tcPr anchor="ctr" marL="73152" marR="73152">
                     <a:lnL w="9525" cap="flat" cmpd="sng" algn="ctr">
                       <a:solidFill>
-                        <a:srgbClr val="F8DFC9"/>
+                        <a:srgbClr val="F6E4D5"/>
                       </a:solidFill>
                       <a:prstDash val="solid"/>
                     </a:lnL>
                     <a:lnR w="9525" cap="flat" cmpd="sng" algn="ctr">
                       <a:solidFill>
-                        <a:srgbClr val="F8DFC9"/>
+                        <a:srgbClr val="F6E4D5"/>
                       </a:solidFill>
                       <a:prstDash val="solid"/>
                     </a:lnR>
                     <a:lnT w="9525" cap="flat" cmpd="sng" algn="ctr">
                       <a:solidFill>
-                        <a:srgbClr val="F8DFC9"/>
+                        <a:srgbClr val="F6E4D5"/>
                       </a:solidFill>
                       <a:prstDash val="solid"/>
                     </a:lnT>
                     <a:lnB w="9525" cap="flat" cmpd="sng" algn="ctr">
                       <a:solidFill>
-                        <a:srgbClr val="F8DFC9"/>
+                        <a:srgbClr val="F6E4D5"/>
                       </a:solidFill>
                       <a:prstDash val="solid"/>
                     </a:lnB>
                     <a:solidFill>
-                      <a:srgbClr val="FCF4ED"/>
+                      <a:srgbClr val="FBF3EC"/>
                     </a:solidFill>
                   </a:tcPr>
                 </a:tc>
@@ -5331,7 +5487,7 @@
                       <a:r>
                         <a:rPr sz="1400" b="0">
                           <a:solidFill>
-                            <a:srgbClr val="2B2B2B"/>
+                            <a:srgbClr val="26231F"/>
                           </a:solidFill>
                         </a:rPr>
                         <a:t/>
@@ -5341,30 +5497,30 @@
                   <a:tcPr anchor="ctr" marL="73152" marR="73152">
                     <a:lnL w="9525" cap="flat" cmpd="sng" algn="ctr">
                       <a:solidFill>
-                        <a:srgbClr val="F8DFC9"/>
+                        <a:srgbClr val="F6E4D5"/>
                       </a:solidFill>
                       <a:prstDash val="solid"/>
                     </a:lnL>
                     <a:lnR w="9525" cap="flat" cmpd="sng" algn="ctr">
                       <a:solidFill>
-                        <a:srgbClr val="F8DFC9"/>
+                        <a:srgbClr val="F6E4D5"/>
                       </a:solidFill>
                       <a:prstDash val="solid"/>
                     </a:lnR>
                     <a:lnT w="9525" cap="flat" cmpd="sng" algn="ctr">
                       <a:solidFill>
-                        <a:srgbClr val="F8DFC9"/>
+                        <a:srgbClr val="F6E4D5"/>
                       </a:solidFill>
                       <a:prstDash val="solid"/>
                     </a:lnT>
                     <a:lnB w="9525" cap="flat" cmpd="sng" algn="ctr">
                       <a:solidFill>
-                        <a:srgbClr val="F8DFC9"/>
+                        <a:srgbClr val="F6E4D5"/>
                       </a:solidFill>
                       <a:prstDash val="solid"/>
                     </a:lnB>
                     <a:solidFill>
-                      <a:srgbClr val="FCF4ED"/>
+                      <a:srgbClr val="FBF3EC"/>
                     </a:solidFill>
                   </a:tcPr>
                 </a:tc>
@@ -5379,7 +5535,7 @@
                       <a:r>
                         <a:rPr sz="1400" b="0">
                           <a:solidFill>
-                            <a:srgbClr val="2B2B2B"/>
+                            <a:srgbClr val="26231F"/>
                           </a:solidFill>
                         </a:rPr>
                         <a:t/>
@@ -5389,25 +5545,25 @@
                   <a:tcPr anchor="ctr" marL="73152" marR="73152">
                     <a:lnL w="9525" cap="flat" cmpd="sng" algn="ctr">
                       <a:solidFill>
-                        <a:srgbClr val="F8DFC9"/>
+                        <a:srgbClr val="F6E4D5"/>
                       </a:solidFill>
                       <a:prstDash val="solid"/>
                     </a:lnL>
                     <a:lnR w="9525" cap="flat" cmpd="sng" algn="ctr">
                       <a:solidFill>
-                        <a:srgbClr val="F8DFC9"/>
+                        <a:srgbClr val="F6E4D5"/>
                       </a:solidFill>
                       <a:prstDash val="solid"/>
                     </a:lnR>
                     <a:lnT w="9525" cap="flat" cmpd="sng" algn="ctr">
                       <a:solidFill>
-                        <a:srgbClr val="F8DFC9"/>
+                        <a:srgbClr val="F6E4D5"/>
                       </a:solidFill>
                       <a:prstDash val="solid"/>
                     </a:lnT>
                     <a:lnB w="9525" cap="flat" cmpd="sng" algn="ctr">
                       <a:solidFill>
-                        <a:srgbClr val="F8DFC9"/>
+                        <a:srgbClr val="F6E4D5"/>
                       </a:solidFill>
                       <a:prstDash val="solid"/>
                     </a:lnB>
@@ -5425,7 +5581,7 @@
                       <a:r>
                         <a:rPr sz="1400" b="0">
                           <a:solidFill>
-                            <a:srgbClr val="2B2B2B"/>
+                            <a:srgbClr val="26231F"/>
                           </a:solidFill>
                         </a:rPr>
                         <a:t/>
@@ -5435,25 +5591,25 @@
                   <a:tcPr anchor="ctr" marL="73152" marR="73152">
                     <a:lnL w="9525" cap="flat" cmpd="sng" algn="ctr">
                       <a:solidFill>
-                        <a:srgbClr val="F8DFC9"/>
+                        <a:srgbClr val="F6E4D5"/>
                       </a:solidFill>
                       <a:prstDash val="solid"/>
                     </a:lnL>
                     <a:lnR w="9525" cap="flat" cmpd="sng" algn="ctr">
                       <a:solidFill>
-                        <a:srgbClr val="F8DFC9"/>
+                        <a:srgbClr val="F6E4D5"/>
                       </a:solidFill>
                       <a:prstDash val="solid"/>
                     </a:lnR>
                     <a:lnT w="9525" cap="flat" cmpd="sng" algn="ctr">
                       <a:solidFill>
-                        <a:srgbClr val="F8DFC9"/>
+                        <a:srgbClr val="F6E4D5"/>
                       </a:solidFill>
                       <a:prstDash val="solid"/>
                     </a:lnT>
                     <a:lnB w="9525" cap="flat" cmpd="sng" algn="ctr">
                       <a:solidFill>
-                        <a:srgbClr val="F8DFC9"/>
+                        <a:srgbClr val="F6E4D5"/>
                       </a:solidFill>
                       <a:prstDash val="solid"/>
                     </a:lnB>
@@ -5471,7 +5627,7 @@
                       <a:r>
                         <a:rPr sz="1400" b="0">
                           <a:solidFill>
-                            <a:srgbClr val="2B2B2B"/>
+                            <a:srgbClr val="26231F"/>
                           </a:solidFill>
                         </a:rPr>
                         <a:t/>
@@ -5481,25 +5637,25 @@
                   <a:tcPr anchor="ctr" marL="73152" marR="73152">
                     <a:lnL w="9525" cap="flat" cmpd="sng" algn="ctr">
                       <a:solidFill>
-                        <a:srgbClr val="F8DFC9"/>
+                        <a:srgbClr val="F6E4D5"/>
                       </a:solidFill>
                       <a:prstDash val="solid"/>
                     </a:lnL>
                     <a:lnR w="9525" cap="flat" cmpd="sng" algn="ctr">
                       <a:solidFill>
-                        <a:srgbClr val="F8DFC9"/>
+                        <a:srgbClr val="F6E4D5"/>
                       </a:solidFill>
                       <a:prstDash val="solid"/>
                     </a:lnR>
                     <a:lnT w="9525" cap="flat" cmpd="sng" algn="ctr">
                       <a:solidFill>
-                        <a:srgbClr val="F8DFC9"/>
+                        <a:srgbClr val="F6E4D5"/>
                       </a:solidFill>
                       <a:prstDash val="solid"/>
                     </a:lnT>
                     <a:lnB w="9525" cap="flat" cmpd="sng" algn="ctr">
                       <a:solidFill>
-                        <a:srgbClr val="F8DFC9"/>
+                        <a:srgbClr val="F6E4D5"/>
                       </a:solidFill>
                       <a:prstDash val="solid"/>
                     </a:lnB>
@@ -5517,7 +5673,7 @@
                       <a:r>
                         <a:rPr sz="1400" b="0">
                           <a:solidFill>
-                            <a:srgbClr val="2B2B2B"/>
+                            <a:srgbClr val="26231F"/>
                           </a:solidFill>
                         </a:rPr>
                         <a:t/>
@@ -5527,25 +5683,25 @@
                   <a:tcPr anchor="ctr" marL="73152" marR="73152">
                     <a:lnL w="9525" cap="flat" cmpd="sng" algn="ctr">
                       <a:solidFill>
-                        <a:srgbClr val="F8DFC9"/>
+                        <a:srgbClr val="F6E4D5"/>
                       </a:solidFill>
                       <a:prstDash val="solid"/>
                     </a:lnL>
                     <a:lnR w="9525" cap="flat" cmpd="sng" algn="ctr">
                       <a:solidFill>
-                        <a:srgbClr val="F8DFC9"/>
+                        <a:srgbClr val="F6E4D5"/>
                       </a:solidFill>
                       <a:prstDash val="solid"/>
                     </a:lnR>
                     <a:lnT w="9525" cap="flat" cmpd="sng" algn="ctr">
                       <a:solidFill>
-                        <a:srgbClr val="F8DFC9"/>
+                        <a:srgbClr val="F6E4D5"/>
                       </a:solidFill>
                       <a:prstDash val="solid"/>
                     </a:lnT>
                     <a:lnB w="9525" cap="flat" cmpd="sng" algn="ctr">
                       <a:solidFill>
-                        <a:srgbClr val="F8DFC9"/>
+                        <a:srgbClr val="F6E4D5"/>
                       </a:solidFill>
                       <a:prstDash val="solid"/>
                     </a:lnB>
@@ -5563,7 +5719,7 @@
                       <a:r>
                         <a:rPr sz="1400" b="0">
                           <a:solidFill>
-                            <a:srgbClr val="2B2B2B"/>
+                            <a:srgbClr val="26231F"/>
                           </a:solidFill>
                         </a:rPr>
                         <a:t/>
@@ -5573,25 +5729,25 @@
                   <a:tcPr anchor="ctr" marL="73152" marR="73152">
                     <a:lnL w="9525" cap="flat" cmpd="sng" algn="ctr">
                       <a:solidFill>
-                        <a:srgbClr val="F8DFC9"/>
+                        <a:srgbClr val="F6E4D5"/>
                       </a:solidFill>
                       <a:prstDash val="solid"/>
                     </a:lnL>
                     <a:lnR w="9525" cap="flat" cmpd="sng" algn="ctr">
                       <a:solidFill>
-                        <a:srgbClr val="F8DFC9"/>
+                        <a:srgbClr val="F6E4D5"/>
                       </a:solidFill>
                       <a:prstDash val="solid"/>
                     </a:lnR>
                     <a:lnT w="9525" cap="flat" cmpd="sng" algn="ctr">
                       <a:solidFill>
-                        <a:srgbClr val="F8DFC9"/>
+                        <a:srgbClr val="F6E4D5"/>
                       </a:solidFill>
                       <a:prstDash val="solid"/>
                     </a:lnT>
                     <a:lnB w="9525" cap="flat" cmpd="sng" algn="ctr">
                       <a:solidFill>
-                        <a:srgbClr val="F8DFC9"/>
+                        <a:srgbClr val="F6E4D5"/>
                       </a:solidFill>
                       <a:prstDash val="solid"/>
                     </a:lnB>
@@ -5611,7 +5767,7 @@
                       <a:r>
                         <a:rPr sz="1400" b="0">
                           <a:solidFill>
-                            <a:srgbClr val="2B2B2B"/>
+                            <a:srgbClr val="26231F"/>
                           </a:solidFill>
                         </a:rPr>
                         <a:t/>
@@ -5621,30 +5777,30 @@
                   <a:tcPr anchor="ctr" marL="73152" marR="73152">
                     <a:lnL w="9525" cap="flat" cmpd="sng" algn="ctr">
                       <a:solidFill>
-                        <a:srgbClr val="F8DFC9"/>
+                        <a:srgbClr val="F6E4D5"/>
                       </a:solidFill>
                       <a:prstDash val="solid"/>
                     </a:lnL>
                     <a:lnR w="9525" cap="flat" cmpd="sng" algn="ctr">
                       <a:solidFill>
-                        <a:srgbClr val="F8DFC9"/>
+                        <a:srgbClr val="F6E4D5"/>
                       </a:solidFill>
                       <a:prstDash val="solid"/>
                     </a:lnR>
                     <a:lnT w="9525" cap="flat" cmpd="sng" algn="ctr">
                       <a:solidFill>
-                        <a:srgbClr val="F8DFC9"/>
+                        <a:srgbClr val="F6E4D5"/>
                       </a:solidFill>
                       <a:prstDash val="solid"/>
                     </a:lnT>
                     <a:lnB w="9525" cap="flat" cmpd="sng" algn="ctr">
                       <a:solidFill>
-                        <a:srgbClr val="F8DFC9"/>
+                        <a:srgbClr val="F6E4D5"/>
                       </a:solidFill>
                       <a:prstDash val="solid"/>
                     </a:lnB>
                     <a:solidFill>
-                      <a:srgbClr val="FCF4ED"/>
+                      <a:srgbClr val="FBF3EC"/>
                     </a:solidFill>
                   </a:tcPr>
                 </a:tc>
@@ -5657,7 +5813,7 @@
                       <a:r>
                         <a:rPr sz="1400" b="0">
                           <a:solidFill>
-                            <a:srgbClr val="2B2B2B"/>
+                            <a:srgbClr val="26231F"/>
                           </a:solidFill>
                         </a:rPr>
                         <a:t/>
@@ -5667,30 +5823,30 @@
                   <a:tcPr anchor="ctr" marL="73152" marR="73152">
                     <a:lnL w="9525" cap="flat" cmpd="sng" algn="ctr">
                       <a:solidFill>
-                        <a:srgbClr val="F8DFC9"/>
+                        <a:srgbClr val="F6E4D5"/>
                       </a:solidFill>
                       <a:prstDash val="solid"/>
                     </a:lnL>
                     <a:lnR w="9525" cap="flat" cmpd="sng" algn="ctr">
                       <a:solidFill>
-                        <a:srgbClr val="F8DFC9"/>
+                        <a:srgbClr val="F6E4D5"/>
                       </a:solidFill>
                       <a:prstDash val="solid"/>
                     </a:lnR>
                     <a:lnT w="9525" cap="flat" cmpd="sng" algn="ctr">
                       <a:solidFill>
-                        <a:srgbClr val="F8DFC9"/>
+                        <a:srgbClr val="F6E4D5"/>
                       </a:solidFill>
                       <a:prstDash val="solid"/>
                     </a:lnT>
                     <a:lnB w="9525" cap="flat" cmpd="sng" algn="ctr">
                       <a:solidFill>
-                        <a:srgbClr val="F8DFC9"/>
+                        <a:srgbClr val="F6E4D5"/>
                       </a:solidFill>
                       <a:prstDash val="solid"/>
                     </a:lnB>
                     <a:solidFill>
-                      <a:srgbClr val="FCF4ED"/>
+                      <a:srgbClr val="FBF3EC"/>
                     </a:solidFill>
                   </a:tcPr>
                 </a:tc>
@@ -5703,7 +5859,7 @@
                       <a:r>
                         <a:rPr sz="1400" b="0">
                           <a:solidFill>
-                            <a:srgbClr val="2B2B2B"/>
+                            <a:srgbClr val="26231F"/>
                           </a:solidFill>
                         </a:rPr>
                         <a:t/>
@@ -5713,30 +5869,30 @@
                   <a:tcPr anchor="ctr" marL="73152" marR="73152">
                     <a:lnL w="9525" cap="flat" cmpd="sng" algn="ctr">
                       <a:solidFill>
-                        <a:srgbClr val="F8DFC9"/>
+                        <a:srgbClr val="F6E4D5"/>
                       </a:solidFill>
                       <a:prstDash val="solid"/>
                     </a:lnL>
                     <a:lnR w="9525" cap="flat" cmpd="sng" algn="ctr">
                       <a:solidFill>
-                        <a:srgbClr val="F8DFC9"/>
+                        <a:srgbClr val="F6E4D5"/>
                       </a:solidFill>
                       <a:prstDash val="solid"/>
                     </a:lnR>
                     <a:lnT w="9525" cap="flat" cmpd="sng" algn="ctr">
                       <a:solidFill>
-                        <a:srgbClr val="F8DFC9"/>
+                        <a:srgbClr val="F6E4D5"/>
                       </a:solidFill>
                       <a:prstDash val="solid"/>
                     </a:lnT>
                     <a:lnB w="9525" cap="flat" cmpd="sng" algn="ctr">
                       <a:solidFill>
-                        <a:srgbClr val="F8DFC9"/>
+                        <a:srgbClr val="F6E4D5"/>
                       </a:solidFill>
                       <a:prstDash val="solid"/>
                     </a:lnB>
                     <a:solidFill>
-                      <a:srgbClr val="FCF4ED"/>
+                      <a:srgbClr val="FBF3EC"/>
                     </a:solidFill>
                   </a:tcPr>
                 </a:tc>
@@ -5749,7 +5905,7 @@
                       <a:r>
                         <a:rPr sz="1400" b="0">
                           <a:solidFill>
-                            <a:srgbClr val="2B2B2B"/>
+                            <a:srgbClr val="26231F"/>
                           </a:solidFill>
                         </a:rPr>
                         <a:t/>
@@ -5759,30 +5915,30 @@
                   <a:tcPr anchor="ctr" marL="73152" marR="73152">
                     <a:lnL w="9525" cap="flat" cmpd="sng" algn="ctr">
                       <a:solidFill>
-                        <a:srgbClr val="F8DFC9"/>
+                        <a:srgbClr val="F6E4D5"/>
                       </a:solidFill>
                       <a:prstDash val="solid"/>
                     </a:lnL>
                     <a:lnR w="9525" cap="flat" cmpd="sng" algn="ctr">
                       <a:solidFill>
-                        <a:srgbClr val="F8DFC9"/>
+                        <a:srgbClr val="F6E4D5"/>
                       </a:solidFill>
                       <a:prstDash val="solid"/>
                     </a:lnR>
                     <a:lnT w="9525" cap="flat" cmpd="sng" algn="ctr">
                       <a:solidFill>
-                        <a:srgbClr val="F8DFC9"/>
+                        <a:srgbClr val="F6E4D5"/>
                       </a:solidFill>
                       <a:prstDash val="solid"/>
                     </a:lnT>
                     <a:lnB w="9525" cap="flat" cmpd="sng" algn="ctr">
                       <a:solidFill>
-                        <a:srgbClr val="F8DFC9"/>
+                        <a:srgbClr val="F6E4D5"/>
                       </a:solidFill>
                       <a:prstDash val="solid"/>
                     </a:lnB>
                     <a:solidFill>
-                      <a:srgbClr val="FCF4ED"/>
+                      <a:srgbClr val="FBF3EC"/>
                     </a:solidFill>
                   </a:tcPr>
                 </a:tc>
@@ -5795,7 +5951,7 @@
                       <a:r>
                         <a:rPr sz="1400" b="0">
                           <a:solidFill>
-                            <a:srgbClr val="2B2B2B"/>
+                            <a:srgbClr val="26231F"/>
                           </a:solidFill>
                         </a:rPr>
                         <a:t/>
@@ -5805,30 +5961,30 @@
                   <a:tcPr anchor="ctr" marL="73152" marR="73152">
                     <a:lnL w="9525" cap="flat" cmpd="sng" algn="ctr">
                       <a:solidFill>
-                        <a:srgbClr val="F8DFC9"/>
+                        <a:srgbClr val="F6E4D5"/>
                       </a:solidFill>
                       <a:prstDash val="solid"/>
                     </a:lnL>
                     <a:lnR w="9525" cap="flat" cmpd="sng" algn="ctr">
                       <a:solidFill>
-                        <a:srgbClr val="F8DFC9"/>
+                        <a:srgbClr val="F6E4D5"/>
                       </a:solidFill>
                       <a:prstDash val="solid"/>
                     </a:lnR>
                     <a:lnT w="9525" cap="flat" cmpd="sng" algn="ctr">
                       <a:solidFill>
-                        <a:srgbClr val="F8DFC9"/>
+                        <a:srgbClr val="F6E4D5"/>
                       </a:solidFill>
                       <a:prstDash val="solid"/>
                     </a:lnT>
                     <a:lnB w="9525" cap="flat" cmpd="sng" algn="ctr">
                       <a:solidFill>
-                        <a:srgbClr val="F8DFC9"/>
+                        <a:srgbClr val="F6E4D5"/>
                       </a:solidFill>
                       <a:prstDash val="solid"/>
                     </a:lnB>
                     <a:solidFill>
-                      <a:srgbClr val="FCF4ED"/>
+                      <a:srgbClr val="FBF3EC"/>
                     </a:solidFill>
                   </a:tcPr>
                 </a:tc>
@@ -5843,7 +5999,7 @@
                       <a:r>
                         <a:rPr sz="1400" b="0">
                           <a:solidFill>
-                            <a:srgbClr val="2B2B2B"/>
+                            <a:srgbClr val="26231F"/>
                           </a:solidFill>
                         </a:rPr>
                         <a:t/>
@@ -5853,25 +6009,25 @@
                   <a:tcPr anchor="ctr" marL="73152" marR="73152">
                     <a:lnL w="9525" cap="flat" cmpd="sng" algn="ctr">
                       <a:solidFill>
-                        <a:srgbClr val="F8DFC9"/>
+                        <a:srgbClr val="F6E4D5"/>
                       </a:solidFill>
                       <a:prstDash val="solid"/>
                     </a:lnL>
                     <a:lnR w="9525" cap="flat" cmpd="sng" algn="ctr">
                       <a:solidFill>
-                        <a:srgbClr val="F8DFC9"/>
+                        <a:srgbClr val="F6E4D5"/>
                       </a:solidFill>
                       <a:prstDash val="solid"/>
                     </a:lnR>
                     <a:lnT w="9525" cap="flat" cmpd="sng" algn="ctr">
                       <a:solidFill>
-                        <a:srgbClr val="F8DFC9"/>
+                        <a:srgbClr val="F6E4D5"/>
                       </a:solidFill>
                       <a:prstDash val="solid"/>
                     </a:lnT>
                     <a:lnB w="9525" cap="flat" cmpd="sng" algn="ctr">
                       <a:solidFill>
-                        <a:srgbClr val="F8DFC9"/>
+                        <a:srgbClr val="F6E4D5"/>
                       </a:solidFill>
                       <a:prstDash val="solid"/>
                     </a:lnB>
@@ -5889,7 +6045,7 @@
                       <a:r>
                         <a:rPr sz="1400" b="0">
                           <a:solidFill>
-                            <a:srgbClr val="2B2B2B"/>
+                            <a:srgbClr val="26231F"/>
                           </a:solidFill>
                         </a:rPr>
                         <a:t/>
@@ -5899,25 +6055,25 @@
                   <a:tcPr anchor="ctr" marL="73152" marR="73152">
                     <a:lnL w="9525" cap="flat" cmpd="sng" algn="ctr">
                       <a:solidFill>
-                        <a:srgbClr val="F8DFC9"/>
+                        <a:srgbClr val="F6E4D5"/>
                       </a:solidFill>
                       <a:prstDash val="solid"/>
                     </a:lnL>
                     <a:lnR w="9525" cap="flat" cmpd="sng" algn="ctr">
                       <a:solidFill>
-                        <a:srgbClr val="F8DFC9"/>
+                        <a:srgbClr val="F6E4D5"/>
                       </a:solidFill>
                       <a:prstDash val="solid"/>
                     </a:lnR>
                     <a:lnT w="9525" cap="flat" cmpd="sng" algn="ctr">
                       <a:solidFill>
-                        <a:srgbClr val="F8DFC9"/>
+                        <a:srgbClr val="F6E4D5"/>
                       </a:solidFill>
                       <a:prstDash val="solid"/>
                     </a:lnT>
                     <a:lnB w="9525" cap="flat" cmpd="sng" algn="ctr">
                       <a:solidFill>
-                        <a:srgbClr val="F8DFC9"/>
+                        <a:srgbClr val="F6E4D5"/>
                       </a:solidFill>
                       <a:prstDash val="solid"/>
                     </a:lnB>
@@ -5935,7 +6091,7 @@
                       <a:r>
                         <a:rPr sz="1400" b="0">
                           <a:solidFill>
-                            <a:srgbClr val="2B2B2B"/>
+                            <a:srgbClr val="26231F"/>
                           </a:solidFill>
                         </a:rPr>
                         <a:t/>
@@ -5945,25 +6101,25 @@
                   <a:tcPr anchor="ctr" marL="73152" marR="73152">
                     <a:lnL w="9525" cap="flat" cmpd="sng" algn="ctr">
                       <a:solidFill>
-                        <a:srgbClr val="F8DFC9"/>
+                        <a:srgbClr val="F6E4D5"/>
                       </a:solidFill>
                       <a:prstDash val="solid"/>
                     </a:lnL>
                     <a:lnR w="9525" cap="flat" cmpd="sng" algn="ctr">
                       <a:solidFill>
-                        <a:srgbClr val="F8DFC9"/>
+                        <a:srgbClr val="F6E4D5"/>
                       </a:solidFill>
                       <a:prstDash val="solid"/>
                     </a:lnR>
                     <a:lnT w="9525" cap="flat" cmpd="sng" algn="ctr">
                       <a:solidFill>
-                        <a:srgbClr val="F8DFC9"/>
+                        <a:srgbClr val="F6E4D5"/>
                       </a:solidFill>
                       <a:prstDash val="solid"/>
                     </a:lnT>
                     <a:lnB w="9525" cap="flat" cmpd="sng" algn="ctr">
                       <a:solidFill>
-                        <a:srgbClr val="F8DFC9"/>
+                        <a:srgbClr val="F6E4D5"/>
                       </a:solidFill>
                       <a:prstDash val="solid"/>
                     </a:lnB>
@@ -5981,7 +6137,7 @@
                       <a:r>
                         <a:rPr sz="1400" b="0">
                           <a:solidFill>
-                            <a:srgbClr val="2B2B2B"/>
+                            <a:srgbClr val="26231F"/>
                           </a:solidFill>
                         </a:rPr>
                         <a:t/>
@@ -5991,25 +6147,25 @@
                   <a:tcPr anchor="ctr" marL="73152" marR="73152">
                     <a:lnL w="9525" cap="flat" cmpd="sng" algn="ctr">
                       <a:solidFill>
-                        <a:srgbClr val="F8DFC9"/>
+                        <a:srgbClr val="F6E4D5"/>
                       </a:solidFill>
                       <a:prstDash val="solid"/>
                     </a:lnL>
                     <a:lnR w="9525" cap="flat" cmpd="sng" algn="ctr">
                       <a:solidFill>
-                        <a:srgbClr val="F8DFC9"/>
+                        <a:srgbClr val="F6E4D5"/>
                       </a:solidFill>
                       <a:prstDash val="solid"/>
                     </a:lnR>
                     <a:lnT w="9525" cap="flat" cmpd="sng" algn="ctr">
                       <a:solidFill>
-                        <a:srgbClr val="F8DFC9"/>
+                        <a:srgbClr val="F6E4D5"/>
                       </a:solidFill>
                       <a:prstDash val="solid"/>
                     </a:lnT>
                     <a:lnB w="9525" cap="flat" cmpd="sng" algn="ctr">
                       <a:solidFill>
-                        <a:srgbClr val="F8DFC9"/>
+                        <a:srgbClr val="F6E4D5"/>
                       </a:solidFill>
                       <a:prstDash val="solid"/>
                     </a:lnB>
@@ -6027,7 +6183,7 @@
                       <a:r>
                         <a:rPr sz="1400" b="0">
                           <a:solidFill>
-                            <a:srgbClr val="2B2B2B"/>
+                            <a:srgbClr val="26231F"/>
                           </a:solidFill>
                         </a:rPr>
                         <a:t/>
@@ -6037,25 +6193,25 @@
                   <a:tcPr anchor="ctr" marL="73152" marR="73152">
                     <a:lnL w="9525" cap="flat" cmpd="sng" algn="ctr">
                       <a:solidFill>
-                        <a:srgbClr val="F8DFC9"/>
+                        <a:srgbClr val="F6E4D5"/>
                       </a:solidFill>
                       <a:prstDash val="solid"/>
                     </a:lnL>
                     <a:lnR w="9525" cap="flat" cmpd="sng" algn="ctr">
                       <a:solidFill>
-                        <a:srgbClr val="F8DFC9"/>
+                        <a:srgbClr val="F6E4D5"/>
                       </a:solidFill>
                       <a:prstDash val="solid"/>
                     </a:lnR>
                     <a:lnT w="9525" cap="flat" cmpd="sng" algn="ctr">
                       <a:solidFill>
-                        <a:srgbClr val="F8DFC9"/>
+                        <a:srgbClr val="F6E4D5"/>
                       </a:solidFill>
                       <a:prstDash val="solid"/>
                     </a:lnT>
                     <a:lnB w="9525" cap="flat" cmpd="sng" algn="ctr">
                       <a:solidFill>
-                        <a:srgbClr val="F8DFC9"/>
+                        <a:srgbClr val="F6E4D5"/>
                       </a:solidFill>
                       <a:prstDash val="solid"/>
                     </a:lnB>
@@ -6075,7 +6231,7 @@
                       <a:r>
                         <a:rPr sz="1400" b="0">
                           <a:solidFill>
-                            <a:srgbClr val="2B2B2B"/>
+                            <a:srgbClr val="26231F"/>
                           </a:solidFill>
                         </a:rPr>
                         <a:t/>
@@ -6085,30 +6241,30 @@
                   <a:tcPr anchor="ctr" marL="73152" marR="73152">
                     <a:lnL w="9525" cap="flat" cmpd="sng" algn="ctr">
                       <a:solidFill>
-                        <a:srgbClr val="F8DFC9"/>
+                        <a:srgbClr val="F6E4D5"/>
                       </a:solidFill>
                       <a:prstDash val="solid"/>
                     </a:lnL>
                     <a:lnR w="9525" cap="flat" cmpd="sng" algn="ctr">
                       <a:solidFill>
-                        <a:srgbClr val="F8DFC9"/>
+                        <a:srgbClr val="F6E4D5"/>
                       </a:solidFill>
                       <a:prstDash val="solid"/>
                     </a:lnR>
                     <a:lnT w="9525" cap="flat" cmpd="sng" algn="ctr">
                       <a:solidFill>
-                        <a:srgbClr val="F8DFC9"/>
+                        <a:srgbClr val="F6E4D5"/>
                       </a:solidFill>
                       <a:prstDash val="solid"/>
                     </a:lnT>
                     <a:lnB w="9525" cap="flat" cmpd="sng" algn="ctr">
                       <a:solidFill>
-                        <a:srgbClr val="F8DFC9"/>
+                        <a:srgbClr val="F6E4D5"/>
                       </a:solidFill>
                       <a:prstDash val="solid"/>
                     </a:lnB>
                     <a:solidFill>
-                      <a:srgbClr val="FCF4ED"/>
+                      <a:srgbClr val="FBF3EC"/>
                     </a:solidFill>
                   </a:tcPr>
                 </a:tc>
@@ -6121,7 +6277,7 @@
                       <a:r>
                         <a:rPr sz="1400" b="0">
                           <a:solidFill>
-                            <a:srgbClr val="2B2B2B"/>
+                            <a:srgbClr val="26231F"/>
                           </a:solidFill>
                         </a:rPr>
                         <a:t/>
@@ -6131,30 +6287,30 @@
                   <a:tcPr anchor="ctr" marL="73152" marR="73152">
                     <a:lnL w="9525" cap="flat" cmpd="sng" algn="ctr">
                       <a:solidFill>
-                        <a:srgbClr val="F8DFC9"/>
+                        <a:srgbClr val="F6E4D5"/>
                       </a:solidFill>
                       <a:prstDash val="solid"/>
                     </a:lnL>
                     <a:lnR w="9525" cap="flat" cmpd="sng" algn="ctr">
                       <a:solidFill>
-                        <a:srgbClr val="F8DFC9"/>
+                        <a:srgbClr val="F6E4D5"/>
                       </a:solidFill>
                       <a:prstDash val="solid"/>
                     </a:lnR>
                     <a:lnT w="9525" cap="flat" cmpd="sng" algn="ctr">
                       <a:solidFill>
-                        <a:srgbClr val="F8DFC9"/>
+                        <a:srgbClr val="F6E4D5"/>
                       </a:solidFill>
                       <a:prstDash val="solid"/>
                     </a:lnT>
                     <a:lnB w="9525" cap="flat" cmpd="sng" algn="ctr">
                       <a:solidFill>
-                        <a:srgbClr val="F8DFC9"/>
+                        <a:srgbClr val="F6E4D5"/>
                       </a:solidFill>
                       <a:prstDash val="solid"/>
                     </a:lnB>
                     <a:solidFill>
-                      <a:srgbClr val="FCF4ED"/>
+                      <a:srgbClr val="FBF3EC"/>
                     </a:solidFill>
                   </a:tcPr>
                 </a:tc>
@@ -6167,7 +6323,7 @@
                       <a:r>
                         <a:rPr sz="1400" b="0">
                           <a:solidFill>
-                            <a:srgbClr val="2B2B2B"/>
+                            <a:srgbClr val="26231F"/>
                           </a:solidFill>
                         </a:rPr>
                         <a:t/>
@@ -6177,30 +6333,30 @@
                   <a:tcPr anchor="ctr" marL="73152" marR="73152">
                     <a:lnL w="9525" cap="flat" cmpd="sng" algn="ctr">
                       <a:solidFill>
-                        <a:srgbClr val="F8DFC9"/>
+                        <a:srgbClr val="F6E4D5"/>
                       </a:solidFill>
                       <a:prstDash val="solid"/>
                     </a:lnL>
                     <a:lnR w="9525" cap="flat" cmpd="sng" algn="ctr">
                       <a:solidFill>
-                        <a:srgbClr val="F8DFC9"/>
+                        <a:srgbClr val="F6E4D5"/>
                       </a:solidFill>
                       <a:prstDash val="solid"/>
                     </a:lnR>
                     <a:lnT w="9525" cap="flat" cmpd="sng" algn="ctr">
                       <a:solidFill>
-                        <a:srgbClr val="F8DFC9"/>
+                        <a:srgbClr val="F6E4D5"/>
                       </a:solidFill>
                       <a:prstDash val="solid"/>
                     </a:lnT>
                     <a:lnB w="9525" cap="flat" cmpd="sng" algn="ctr">
                       <a:solidFill>
-                        <a:srgbClr val="F8DFC9"/>
+                        <a:srgbClr val="F6E4D5"/>
                       </a:solidFill>
                       <a:prstDash val="solid"/>
                     </a:lnB>
                     <a:solidFill>
-                      <a:srgbClr val="FCF4ED"/>
+                      <a:srgbClr val="FBF3EC"/>
                     </a:solidFill>
                   </a:tcPr>
                 </a:tc>
@@ -6213,7 +6369,7 @@
                       <a:r>
                         <a:rPr sz="1400" b="0">
                           <a:solidFill>
-                            <a:srgbClr val="2B2B2B"/>
+                            <a:srgbClr val="26231F"/>
                           </a:solidFill>
                         </a:rPr>
                         <a:t/>
@@ -6223,30 +6379,30 @@
                   <a:tcPr anchor="ctr" marL="73152" marR="73152">
                     <a:lnL w="9525" cap="flat" cmpd="sng" algn="ctr">
                       <a:solidFill>
-                        <a:srgbClr val="F8DFC9"/>
+                        <a:srgbClr val="F6E4D5"/>
                       </a:solidFill>
                       <a:prstDash val="solid"/>
                     </a:lnL>
                     <a:lnR w="9525" cap="flat" cmpd="sng" algn="ctr">
                       <a:solidFill>
-                        <a:srgbClr val="F8DFC9"/>
+                        <a:srgbClr val="F6E4D5"/>
                       </a:solidFill>
                       <a:prstDash val="solid"/>
                     </a:lnR>
                     <a:lnT w="9525" cap="flat" cmpd="sng" algn="ctr">
                       <a:solidFill>
-                        <a:srgbClr val="F8DFC9"/>
+                        <a:srgbClr val="F6E4D5"/>
                       </a:solidFill>
                       <a:prstDash val="solid"/>
                     </a:lnT>
                     <a:lnB w="9525" cap="flat" cmpd="sng" algn="ctr">
                       <a:solidFill>
-                        <a:srgbClr val="F8DFC9"/>
+                        <a:srgbClr val="F6E4D5"/>
                       </a:solidFill>
                       <a:prstDash val="solid"/>
                     </a:lnB>
                     <a:solidFill>
-                      <a:srgbClr val="FCF4ED"/>
+                      <a:srgbClr val="FBF3EC"/>
                     </a:solidFill>
                   </a:tcPr>
                 </a:tc>
@@ -6259,7 +6415,7 @@
                       <a:r>
                         <a:rPr sz="1400" b="0">
                           <a:solidFill>
-                            <a:srgbClr val="2B2B2B"/>
+                            <a:srgbClr val="26231F"/>
                           </a:solidFill>
                         </a:rPr>
                         <a:t/>
@@ -6269,30 +6425,30 @@
                   <a:tcPr anchor="ctr" marL="73152" marR="73152">
                     <a:lnL w="9525" cap="flat" cmpd="sng" algn="ctr">
                       <a:solidFill>
-                        <a:srgbClr val="F8DFC9"/>
+                        <a:srgbClr val="F6E4D5"/>
                       </a:solidFill>
                       <a:prstDash val="solid"/>
                     </a:lnL>
                     <a:lnR w="9525" cap="flat" cmpd="sng" algn="ctr">
                       <a:solidFill>
-                        <a:srgbClr val="F8DFC9"/>
+                        <a:srgbClr val="F6E4D5"/>
                       </a:solidFill>
                       <a:prstDash val="solid"/>
                     </a:lnR>
                     <a:lnT w="9525" cap="flat" cmpd="sng" algn="ctr">
                       <a:solidFill>
-                        <a:srgbClr val="F8DFC9"/>
+                        <a:srgbClr val="F6E4D5"/>
                       </a:solidFill>
                       <a:prstDash val="solid"/>
                     </a:lnT>
                     <a:lnB w="9525" cap="flat" cmpd="sng" algn="ctr">
                       <a:solidFill>
-                        <a:srgbClr val="F8DFC9"/>
+                        <a:srgbClr val="F6E4D5"/>
                       </a:solidFill>
                       <a:prstDash val="solid"/>
                     </a:lnB>
                     <a:solidFill>
-                      <a:srgbClr val="FCF4ED"/>
+                      <a:srgbClr val="FBF3EC"/>
                     </a:solidFill>
                   </a:tcPr>
                 </a:tc>
@@ -6315,7 +6471,7 @@
     <p:bg>
       <p:bgPr>
         <a:solidFill>
-          <a:srgbClr val="FCF4ED"/>
+          <a:srgbClr val="FBF3EC"/>
         </a:solidFill>
         <a:effectLst/>
       </p:bgPr>
@@ -6335,14 +6491,14 @@
         </p:nvSpPr>
         <p:spPr>
           <a:xfrm>
-            <a:off x="0" y="0"/>
-            <a:ext cx="411480" cy="6858000"/>
+            <a:off x="640080" y="6400800"/>
+            <a:ext cx="10911535" cy="10972"/>
           </a:xfrm>
           <a:prstGeom prst="rect">
             <a:avLst/>
           </a:prstGeom>
           <a:solidFill>
-            <a:srgbClr val="CA7021"/>
+            <a:srgbClr val="26231F"/>
           </a:solidFill>
           <a:ln>
             <a:noFill/>
@@ -6358,20 +6514,58 @@
       </p:sp>
       <p:sp>
         <p:nvSpPr>
-          <p:cNvPr id="4" name="장식"/>
-          <p:cNvSpPr/>
+          <p:cNvPr id="4" name="하단 라벨"/>
+          <p:cNvSpPr txBox="1"/>
           <p:nvPr/>
         </p:nvSpPr>
         <p:spPr>
           <a:xfrm>
-            <a:off x="411480" y="0"/>
-            <a:ext cx="64008" cy="6858000"/>
+            <a:off x="640080" y="6437376"/>
+            <a:ext cx="5486400" cy="274320"/>
           </a:xfrm>
           <a:prstGeom prst="rect">
             <a:avLst/>
           </a:prstGeom>
+          <a:noFill/>
+        </p:spPr>
+        <p:txBody>
+          <a:bodyPr wrap="square" lIns="54864" rIns="54864" tIns="27432" bIns="27432" anchor="ctr">
+            <a:noAutofit/>
+          </a:bodyPr>
+          <a:lstStyle/>
+          <a:p>
+            <a:pPr algn="l">
+              <a:lnSpc>
+                <a:spcPct val="115000"/>
+              </a:lnSpc>
+            </a:pPr>
+            <a:r>
+              <a:rPr sz="900" b="1" i="0" spc="250">
+                <a:solidFill>
+                  <a:srgbClr val="26231F"/>
+                </a:solidFill>
+              </a:rPr>
+              <a:t>INSURANCE CHECK</a:t>
+            </a:r>
+          </a:p>
+        </p:txBody>
+      </p:sp>
+      <p:sp>
+        <p:nvSpPr>
+          <p:cNvPr id="5" name="포인트"/>
+          <p:cNvSpPr/>
+          <p:nvPr/>
+        </p:nvSpPr>
+        <p:spPr>
+          <a:xfrm rot="18900000">
+            <a:off x="11213287" y="6473952"/>
+            <a:ext cx="219456" cy="219456"/>
+          </a:xfrm>
+          <a:prstGeom prst="teardrop">
+            <a:avLst/>
+          </a:prstGeom>
           <a:solidFill>
-            <a:srgbClr val="3B918E"/>
+            <a:srgbClr val="D8A579"/>
           </a:solidFill>
           <a:ln>
             <a:noFill/>
@@ -6397,8 +6591,8 @@
         </p:nvSpPr>
         <p:spPr>
           <a:xfrm>
-            <a:off x="914400" y="457200"/>
-            <a:ext cx="9448495" cy="868680"/>
+            <a:off x="640080" y="502920"/>
+            <a:ext cx="10911535" cy="914400"/>
           </a:xfrm>
         </p:spPr>
         <p:txBody>
@@ -6415,7 +6609,7 @@
             <a:r>
               <a:rPr sz="3000" b="1" i="0">
                 <a:solidFill>
-                  <a:srgbClr val="723F13"/>
+                  <a:srgbClr val="26231F"/>
                 </a:solidFill>
               </a:rPr>
               <a:t>보장 항목 체크</a:t>
@@ -6425,15 +6619,15 @@
       </p:sp>
       <p:graphicFrame>
         <p:nvGraphicFramePr>
-          <p:cNvPr id="5" name="표"/>
+          <p:cNvPr id="6" name="표"/>
           <p:cNvGraphicFramePr>
             <a:graphicFrameLocks noGrp="1"/>
           </p:cNvGraphicFramePr>
           <p:nvPr/>
         </p:nvGraphicFramePr>
         <p:xfrm>
-          <a:off x="914400" y="1600200"/>
-          <a:ext cx="10637214" cy="4773168"/>
+          <a:off x="640080" y="1600200"/>
+          <a:ext cx="10911534" cy="4773168"/>
         </p:xfrm>
         <a:graphic>
           <a:graphicData uri="http://schemas.openxmlformats.org/drawingml/2006/table">
@@ -6443,9 +6637,9 @@
               </a:tblPr>
               <a:tblGrid>
                 <a:gridCol w="3657600"/>
-                <a:gridCol w="2326538"/>
-                <a:gridCol w="2326538"/>
-                <a:gridCol w="2326538"/>
+                <a:gridCol w="2417978"/>
+                <a:gridCol w="2417978"/>
+                <a:gridCol w="2417978"/>
               </a:tblGrid>
               <a:tr h="530352">
                 <a:tc>
@@ -6457,7 +6651,7 @@
                       <a:r>
                         <a:rPr sz="1400" b="1">
                           <a:solidFill>
-                            <a:srgbClr val="FFFFFF"/>
+                            <a:srgbClr val="26231F"/>
                           </a:solidFill>
                         </a:rPr>
                         <a:t>보장 항목</a:t>
@@ -6467,30 +6661,30 @@
                   <a:tcPr anchor="ctr" marL="73152" marR="73152">
                     <a:lnL w="9525" cap="flat" cmpd="sng" algn="ctr">
                       <a:solidFill>
-                        <a:srgbClr val="CA7021"/>
+                        <a:srgbClr val="D8A579"/>
                       </a:solidFill>
                       <a:prstDash val="solid"/>
                     </a:lnL>
                     <a:lnR w="9525" cap="flat" cmpd="sng" algn="ctr">
                       <a:solidFill>
-                        <a:srgbClr val="CA7021"/>
+                        <a:srgbClr val="D8A579"/>
                       </a:solidFill>
                       <a:prstDash val="solid"/>
                     </a:lnR>
                     <a:lnT w="9525" cap="flat" cmpd="sng" algn="ctr">
                       <a:solidFill>
-                        <a:srgbClr val="CA7021"/>
+                        <a:srgbClr val="D8A579"/>
                       </a:solidFill>
                       <a:prstDash val="solid"/>
                     </a:lnT>
                     <a:lnB w="9525" cap="flat" cmpd="sng" algn="ctr">
                       <a:solidFill>
-                        <a:srgbClr val="CA7021"/>
+                        <a:srgbClr val="D8A579"/>
                       </a:solidFill>
                       <a:prstDash val="solid"/>
                     </a:lnB>
                     <a:solidFill>
-                      <a:srgbClr val="CA7021"/>
+                      <a:srgbClr val="D8A579"/>
                     </a:solidFill>
                   </a:tcPr>
                 </a:tc>
@@ -6503,7 +6697,7 @@
                       <a:r>
                         <a:rPr sz="1400" b="1">
                           <a:solidFill>
-                            <a:srgbClr val="FFFFFF"/>
+                            <a:srgbClr val="26231F"/>
                           </a:solidFill>
                         </a:rPr>
                         <a:t>가입 확인</a:t>
@@ -6513,30 +6707,30 @@
                   <a:tcPr anchor="ctr" marL="73152" marR="73152">
                     <a:lnL w="9525" cap="flat" cmpd="sng" algn="ctr">
                       <a:solidFill>
-                        <a:srgbClr val="CA7021"/>
+                        <a:srgbClr val="D8A579"/>
                       </a:solidFill>
                       <a:prstDash val="solid"/>
                     </a:lnL>
                     <a:lnR w="9525" cap="flat" cmpd="sng" algn="ctr">
                       <a:solidFill>
-                        <a:srgbClr val="CA7021"/>
+                        <a:srgbClr val="D8A579"/>
                       </a:solidFill>
                       <a:prstDash val="solid"/>
                     </a:lnR>
                     <a:lnT w="9525" cap="flat" cmpd="sng" algn="ctr">
                       <a:solidFill>
-                        <a:srgbClr val="CA7021"/>
+                        <a:srgbClr val="D8A579"/>
                       </a:solidFill>
                       <a:prstDash val="solid"/>
                     </a:lnT>
                     <a:lnB w="9525" cap="flat" cmpd="sng" algn="ctr">
                       <a:solidFill>
-                        <a:srgbClr val="CA7021"/>
+                        <a:srgbClr val="D8A579"/>
                       </a:solidFill>
                       <a:prstDash val="solid"/>
                     </a:lnB>
                     <a:solidFill>
-                      <a:srgbClr val="CA7021"/>
+                      <a:srgbClr val="D8A579"/>
                     </a:solidFill>
                   </a:tcPr>
                 </a:tc>
@@ -6549,7 +6743,7 @@
                       <a:r>
                         <a:rPr sz="1400" b="1">
                           <a:solidFill>
-                            <a:srgbClr val="FFFFFF"/>
+                            <a:srgbClr val="26231F"/>
                           </a:solidFill>
                         </a:rPr>
                         <a:t>확인 필요</a:t>
@@ -6559,30 +6753,30 @@
                   <a:tcPr anchor="ctr" marL="73152" marR="73152">
                     <a:lnL w="9525" cap="flat" cmpd="sng" algn="ctr">
                       <a:solidFill>
-                        <a:srgbClr val="CA7021"/>
+                        <a:srgbClr val="D8A579"/>
                       </a:solidFill>
                       <a:prstDash val="solid"/>
                     </a:lnL>
                     <a:lnR w="9525" cap="flat" cmpd="sng" algn="ctr">
                       <a:solidFill>
-                        <a:srgbClr val="CA7021"/>
+                        <a:srgbClr val="D8A579"/>
                       </a:solidFill>
                       <a:prstDash val="solid"/>
                     </a:lnR>
                     <a:lnT w="9525" cap="flat" cmpd="sng" algn="ctr">
                       <a:solidFill>
-                        <a:srgbClr val="CA7021"/>
+                        <a:srgbClr val="D8A579"/>
                       </a:solidFill>
                       <a:prstDash val="solid"/>
                     </a:lnT>
                     <a:lnB w="9525" cap="flat" cmpd="sng" algn="ctr">
                       <a:solidFill>
-                        <a:srgbClr val="CA7021"/>
+                        <a:srgbClr val="D8A579"/>
                       </a:solidFill>
                       <a:prstDash val="solid"/>
                     </a:lnB>
                     <a:solidFill>
-                      <a:srgbClr val="CA7021"/>
+                      <a:srgbClr val="D8A579"/>
                     </a:solidFill>
                   </a:tcPr>
                 </a:tc>
@@ -6595,7 +6789,7 @@
                       <a:r>
                         <a:rPr sz="1400" b="1">
                           <a:solidFill>
-                            <a:srgbClr val="FFFFFF"/>
+                            <a:srgbClr val="26231F"/>
                           </a:solidFill>
                         </a:rPr>
                         <a:t>해당 없음</a:t>
@@ -6605,30 +6799,30 @@
                   <a:tcPr anchor="ctr" marL="73152" marR="73152">
                     <a:lnL w="9525" cap="flat" cmpd="sng" algn="ctr">
                       <a:solidFill>
-                        <a:srgbClr val="CA7021"/>
+                        <a:srgbClr val="D8A579"/>
                       </a:solidFill>
                       <a:prstDash val="solid"/>
                     </a:lnL>
                     <a:lnR w="9525" cap="flat" cmpd="sng" algn="ctr">
                       <a:solidFill>
-                        <a:srgbClr val="CA7021"/>
+                        <a:srgbClr val="D8A579"/>
                       </a:solidFill>
                       <a:prstDash val="solid"/>
                     </a:lnR>
                     <a:lnT w="9525" cap="flat" cmpd="sng" algn="ctr">
                       <a:solidFill>
-                        <a:srgbClr val="CA7021"/>
+                        <a:srgbClr val="D8A579"/>
                       </a:solidFill>
                       <a:prstDash val="solid"/>
                     </a:lnT>
                     <a:lnB w="9525" cap="flat" cmpd="sng" algn="ctr">
                       <a:solidFill>
-                        <a:srgbClr val="CA7021"/>
+                        <a:srgbClr val="D8A579"/>
                       </a:solidFill>
                       <a:prstDash val="solid"/>
                     </a:lnB>
                     <a:solidFill>
-                      <a:srgbClr val="CA7021"/>
+                      <a:srgbClr val="D8A579"/>
                     </a:solidFill>
                   </a:tcPr>
                 </a:tc>
@@ -6643,7 +6837,7 @@
                       <a:r>
                         <a:rPr sz="1400" b="1">
                           <a:solidFill>
-                            <a:srgbClr val="723F13"/>
+                            <a:srgbClr val="493727"/>
                           </a:solidFill>
                         </a:rPr>
                         <a:t>사망·재해</a:t>
@@ -6653,30 +6847,30 @@
                   <a:tcPr anchor="ctr" marL="73152" marR="73152">
                     <a:lnL w="9525" cap="flat" cmpd="sng" algn="ctr">
                       <a:solidFill>
-                        <a:srgbClr val="F8DFC9"/>
+                        <a:srgbClr val="F6E4D5"/>
                       </a:solidFill>
                       <a:prstDash val="solid"/>
                     </a:lnL>
                     <a:lnR w="9525" cap="flat" cmpd="sng" algn="ctr">
                       <a:solidFill>
-                        <a:srgbClr val="F8DFC9"/>
+                        <a:srgbClr val="F6E4D5"/>
                       </a:solidFill>
                       <a:prstDash val="solid"/>
                     </a:lnR>
                     <a:lnT w="9525" cap="flat" cmpd="sng" algn="ctr">
                       <a:solidFill>
-                        <a:srgbClr val="F8DFC9"/>
+                        <a:srgbClr val="F6E4D5"/>
                       </a:solidFill>
                       <a:prstDash val="solid"/>
                     </a:lnT>
                     <a:lnB w="9525" cap="flat" cmpd="sng" algn="ctr">
                       <a:solidFill>
-                        <a:srgbClr val="F8DFC9"/>
+                        <a:srgbClr val="F6E4D5"/>
                       </a:solidFill>
                       <a:prstDash val="solid"/>
                     </a:lnB>
                     <a:solidFill>
-                      <a:srgbClr val="F8DFC9"/>
+                      <a:srgbClr val="F6E4D5"/>
                     </a:solidFill>
                   </a:tcPr>
                 </a:tc>
@@ -6689,7 +6883,7 @@
                       <a:r>
                         <a:rPr sz="1400" b="0">
                           <a:solidFill>
-                            <a:srgbClr val="2B2B2B"/>
+                            <a:srgbClr val="26231F"/>
                           </a:solidFill>
                         </a:rPr>
                         <a:t>□</a:t>
@@ -6699,25 +6893,25 @@
                   <a:tcPr anchor="ctr" marL="73152" marR="73152">
                     <a:lnL w="9525" cap="flat" cmpd="sng" algn="ctr">
                       <a:solidFill>
-                        <a:srgbClr val="F8DFC9"/>
+                        <a:srgbClr val="F6E4D5"/>
                       </a:solidFill>
                       <a:prstDash val="solid"/>
                     </a:lnL>
                     <a:lnR w="9525" cap="flat" cmpd="sng" algn="ctr">
                       <a:solidFill>
-                        <a:srgbClr val="F8DFC9"/>
+                        <a:srgbClr val="F6E4D5"/>
                       </a:solidFill>
                       <a:prstDash val="solid"/>
                     </a:lnR>
                     <a:lnT w="9525" cap="flat" cmpd="sng" algn="ctr">
                       <a:solidFill>
-                        <a:srgbClr val="F8DFC9"/>
+                        <a:srgbClr val="F6E4D5"/>
                       </a:solidFill>
                       <a:prstDash val="solid"/>
                     </a:lnT>
                     <a:lnB w="9525" cap="flat" cmpd="sng" algn="ctr">
                       <a:solidFill>
-                        <a:srgbClr val="F8DFC9"/>
+                        <a:srgbClr val="F6E4D5"/>
                       </a:solidFill>
                       <a:prstDash val="solid"/>
                     </a:lnB>
@@ -6735,7 +6929,7 @@
                       <a:r>
                         <a:rPr sz="1400" b="0">
                           <a:solidFill>
-                            <a:srgbClr val="2B2B2B"/>
+                            <a:srgbClr val="26231F"/>
                           </a:solidFill>
                         </a:rPr>
                         <a:t>□</a:t>
@@ -6745,25 +6939,25 @@
                   <a:tcPr anchor="ctr" marL="73152" marR="73152">
                     <a:lnL w="9525" cap="flat" cmpd="sng" algn="ctr">
                       <a:solidFill>
-                        <a:srgbClr val="F8DFC9"/>
+                        <a:srgbClr val="F6E4D5"/>
                       </a:solidFill>
                       <a:prstDash val="solid"/>
                     </a:lnL>
                     <a:lnR w="9525" cap="flat" cmpd="sng" algn="ctr">
                       <a:solidFill>
-                        <a:srgbClr val="F8DFC9"/>
+                        <a:srgbClr val="F6E4D5"/>
                       </a:solidFill>
                       <a:prstDash val="solid"/>
                     </a:lnR>
                     <a:lnT w="9525" cap="flat" cmpd="sng" algn="ctr">
                       <a:solidFill>
-                        <a:srgbClr val="F8DFC9"/>
+                        <a:srgbClr val="F6E4D5"/>
                       </a:solidFill>
                       <a:prstDash val="solid"/>
                     </a:lnT>
                     <a:lnB w="9525" cap="flat" cmpd="sng" algn="ctr">
                       <a:solidFill>
-                        <a:srgbClr val="F8DFC9"/>
+                        <a:srgbClr val="F6E4D5"/>
                       </a:solidFill>
                       <a:prstDash val="solid"/>
                     </a:lnB>
@@ -6781,7 +6975,7 @@
                       <a:r>
                         <a:rPr sz="1400" b="0">
                           <a:solidFill>
-                            <a:srgbClr val="2B2B2B"/>
+                            <a:srgbClr val="26231F"/>
                           </a:solidFill>
                         </a:rPr>
                         <a:t>□</a:t>
@@ -6791,25 +6985,25 @@
                   <a:tcPr anchor="ctr" marL="73152" marR="73152">
                     <a:lnL w="9525" cap="flat" cmpd="sng" algn="ctr">
                       <a:solidFill>
-                        <a:srgbClr val="F8DFC9"/>
+                        <a:srgbClr val="F6E4D5"/>
                       </a:solidFill>
                       <a:prstDash val="solid"/>
                     </a:lnL>
                     <a:lnR w="9525" cap="flat" cmpd="sng" algn="ctr">
                       <a:solidFill>
-                        <a:srgbClr val="F8DFC9"/>
+                        <a:srgbClr val="F6E4D5"/>
                       </a:solidFill>
                       <a:prstDash val="solid"/>
                     </a:lnR>
                     <a:lnT w="9525" cap="flat" cmpd="sng" algn="ctr">
                       <a:solidFill>
-                        <a:srgbClr val="F8DFC9"/>
+                        <a:srgbClr val="F6E4D5"/>
                       </a:solidFill>
                       <a:prstDash val="solid"/>
                     </a:lnT>
                     <a:lnB w="9525" cap="flat" cmpd="sng" algn="ctr">
                       <a:solidFill>
-                        <a:srgbClr val="F8DFC9"/>
+                        <a:srgbClr val="F6E4D5"/>
                       </a:solidFill>
                       <a:prstDash val="solid"/>
                     </a:lnB>
@@ -6829,7 +7023,7 @@
                       <a:r>
                         <a:rPr sz="1400" b="1">
                           <a:solidFill>
-                            <a:srgbClr val="723F13"/>
+                            <a:srgbClr val="493727"/>
                           </a:solidFill>
                         </a:rPr>
                         <a:t>질병 진단</a:t>
@@ -6839,30 +7033,30 @@
                   <a:tcPr anchor="ctr" marL="73152" marR="73152">
                     <a:lnL w="9525" cap="flat" cmpd="sng" algn="ctr">
                       <a:solidFill>
-                        <a:srgbClr val="F8DFC9"/>
+                        <a:srgbClr val="F6E4D5"/>
                       </a:solidFill>
                       <a:prstDash val="solid"/>
                     </a:lnL>
                     <a:lnR w="9525" cap="flat" cmpd="sng" algn="ctr">
                       <a:solidFill>
-                        <a:srgbClr val="F8DFC9"/>
+                        <a:srgbClr val="F6E4D5"/>
                       </a:solidFill>
                       <a:prstDash val="solid"/>
                     </a:lnR>
                     <a:lnT w="9525" cap="flat" cmpd="sng" algn="ctr">
                       <a:solidFill>
-                        <a:srgbClr val="F8DFC9"/>
+                        <a:srgbClr val="F6E4D5"/>
                       </a:solidFill>
                       <a:prstDash val="solid"/>
                     </a:lnT>
                     <a:lnB w="9525" cap="flat" cmpd="sng" algn="ctr">
                       <a:solidFill>
-                        <a:srgbClr val="F8DFC9"/>
+                        <a:srgbClr val="F6E4D5"/>
                       </a:solidFill>
                       <a:prstDash val="solid"/>
                     </a:lnB>
                     <a:solidFill>
-                      <a:srgbClr val="F8DFC9"/>
+                      <a:srgbClr val="F6E4D5"/>
                     </a:solidFill>
                   </a:tcPr>
                 </a:tc>
@@ -6875,7 +7069,7 @@
                       <a:r>
                         <a:rPr sz="1400" b="0">
                           <a:solidFill>
-                            <a:srgbClr val="2B2B2B"/>
+                            <a:srgbClr val="26231F"/>
                           </a:solidFill>
                         </a:rPr>
                         <a:t>□</a:t>
@@ -6885,30 +7079,30 @@
                   <a:tcPr anchor="ctr" marL="73152" marR="73152">
                     <a:lnL w="9525" cap="flat" cmpd="sng" algn="ctr">
                       <a:solidFill>
-                        <a:srgbClr val="F8DFC9"/>
+                        <a:srgbClr val="F6E4D5"/>
                       </a:solidFill>
                       <a:prstDash val="solid"/>
                     </a:lnL>
                     <a:lnR w="9525" cap="flat" cmpd="sng" algn="ctr">
                       <a:solidFill>
-                        <a:srgbClr val="F8DFC9"/>
+                        <a:srgbClr val="F6E4D5"/>
                       </a:solidFill>
                       <a:prstDash val="solid"/>
                     </a:lnR>
                     <a:lnT w="9525" cap="flat" cmpd="sng" algn="ctr">
                       <a:solidFill>
-                        <a:srgbClr val="F8DFC9"/>
+                        <a:srgbClr val="F6E4D5"/>
                       </a:solidFill>
                       <a:prstDash val="solid"/>
                     </a:lnT>
                     <a:lnB w="9525" cap="flat" cmpd="sng" algn="ctr">
                       <a:solidFill>
-                        <a:srgbClr val="F8DFC9"/>
+                        <a:srgbClr val="F6E4D5"/>
                       </a:solidFill>
                       <a:prstDash val="solid"/>
                     </a:lnB>
                     <a:solidFill>
-                      <a:srgbClr val="FCF4ED"/>
+                      <a:srgbClr val="FBF3EC"/>
                     </a:solidFill>
                   </a:tcPr>
                 </a:tc>
@@ -6921,7 +7115,7 @@
                       <a:r>
                         <a:rPr sz="1400" b="0">
                           <a:solidFill>
-                            <a:srgbClr val="2B2B2B"/>
+                            <a:srgbClr val="26231F"/>
                           </a:solidFill>
                         </a:rPr>
                         <a:t>□</a:t>
@@ -6931,30 +7125,30 @@
                   <a:tcPr anchor="ctr" marL="73152" marR="73152">
                     <a:lnL w="9525" cap="flat" cmpd="sng" algn="ctr">
                       <a:solidFill>
-                        <a:srgbClr val="F8DFC9"/>
+                        <a:srgbClr val="F6E4D5"/>
                       </a:solidFill>
                       <a:prstDash val="solid"/>
                     </a:lnL>
                     <a:lnR w="9525" cap="flat" cmpd="sng" algn="ctr">
                       <a:solidFill>
-                        <a:srgbClr val="F8DFC9"/>
+                        <a:srgbClr val="F6E4D5"/>
                       </a:solidFill>
                       <a:prstDash val="solid"/>
                     </a:lnR>
                     <a:lnT w="9525" cap="flat" cmpd="sng" algn="ctr">
                       <a:solidFill>
-                        <a:srgbClr val="F8DFC9"/>
+                        <a:srgbClr val="F6E4D5"/>
                       </a:solidFill>
                       <a:prstDash val="solid"/>
                     </a:lnT>
                     <a:lnB w="9525" cap="flat" cmpd="sng" algn="ctr">
                       <a:solidFill>
-                        <a:srgbClr val="F8DFC9"/>
+                        <a:srgbClr val="F6E4D5"/>
                       </a:solidFill>
                       <a:prstDash val="solid"/>
                     </a:lnB>
                     <a:solidFill>
-                      <a:srgbClr val="FCF4ED"/>
+                      <a:srgbClr val="FBF3EC"/>
                     </a:solidFill>
                   </a:tcPr>
                 </a:tc>
@@ -6967,7 +7161,7 @@
                       <a:r>
                         <a:rPr sz="1400" b="0">
                           <a:solidFill>
-                            <a:srgbClr val="2B2B2B"/>
+                            <a:srgbClr val="26231F"/>
                           </a:solidFill>
                         </a:rPr>
                         <a:t>□</a:t>
@@ -6977,30 +7171,30 @@
                   <a:tcPr anchor="ctr" marL="73152" marR="73152">
                     <a:lnL w="9525" cap="flat" cmpd="sng" algn="ctr">
                       <a:solidFill>
-                        <a:srgbClr val="F8DFC9"/>
+                        <a:srgbClr val="F6E4D5"/>
                       </a:solidFill>
                       <a:prstDash val="solid"/>
                     </a:lnL>
                     <a:lnR w="9525" cap="flat" cmpd="sng" algn="ctr">
                       <a:solidFill>
-                        <a:srgbClr val="F8DFC9"/>
+                        <a:srgbClr val="F6E4D5"/>
                       </a:solidFill>
                       <a:prstDash val="solid"/>
                     </a:lnR>
                     <a:lnT w="9525" cap="flat" cmpd="sng" algn="ctr">
                       <a:solidFill>
-                        <a:srgbClr val="F8DFC9"/>
+                        <a:srgbClr val="F6E4D5"/>
                       </a:solidFill>
                       <a:prstDash val="solid"/>
                     </a:lnT>
                     <a:lnB w="9525" cap="flat" cmpd="sng" algn="ctr">
                       <a:solidFill>
-                        <a:srgbClr val="F8DFC9"/>
+                        <a:srgbClr val="F6E4D5"/>
                       </a:solidFill>
                       <a:prstDash val="solid"/>
                     </a:lnB>
                     <a:solidFill>
-                      <a:srgbClr val="FCF4ED"/>
+                      <a:srgbClr val="FBF3EC"/>
                     </a:solidFill>
                   </a:tcPr>
                 </a:tc>
@@ -7015,7 +7209,7 @@
                       <a:r>
                         <a:rPr sz="1400" b="1">
                           <a:solidFill>
-                            <a:srgbClr val="723F13"/>
+                            <a:srgbClr val="493727"/>
                           </a:solidFill>
                         </a:rPr>
                         <a:t>암</a:t>
@@ -7025,30 +7219,30 @@
                   <a:tcPr anchor="ctr" marL="73152" marR="73152">
                     <a:lnL w="9525" cap="flat" cmpd="sng" algn="ctr">
                       <a:solidFill>
-                        <a:srgbClr val="F8DFC9"/>
+                        <a:srgbClr val="F6E4D5"/>
                       </a:solidFill>
                       <a:prstDash val="solid"/>
                     </a:lnL>
                     <a:lnR w="9525" cap="flat" cmpd="sng" algn="ctr">
                       <a:solidFill>
-                        <a:srgbClr val="F8DFC9"/>
+                        <a:srgbClr val="F6E4D5"/>
                       </a:solidFill>
                       <a:prstDash val="solid"/>
                     </a:lnR>
                     <a:lnT w="9525" cap="flat" cmpd="sng" algn="ctr">
                       <a:solidFill>
-                        <a:srgbClr val="F8DFC9"/>
+                        <a:srgbClr val="F6E4D5"/>
                       </a:solidFill>
                       <a:prstDash val="solid"/>
                     </a:lnT>
                     <a:lnB w="9525" cap="flat" cmpd="sng" algn="ctr">
                       <a:solidFill>
-                        <a:srgbClr val="F8DFC9"/>
+                        <a:srgbClr val="F6E4D5"/>
                       </a:solidFill>
                       <a:prstDash val="solid"/>
                     </a:lnB>
                     <a:solidFill>
-                      <a:srgbClr val="F8DFC9"/>
+                      <a:srgbClr val="F6E4D5"/>
                     </a:solidFill>
                   </a:tcPr>
                 </a:tc>
@@ -7061,7 +7255,7 @@
                       <a:r>
                         <a:rPr sz="1400" b="0">
                           <a:solidFill>
-                            <a:srgbClr val="2B2B2B"/>
+                            <a:srgbClr val="26231F"/>
                           </a:solidFill>
                         </a:rPr>
                         <a:t>□</a:t>
@@ -7071,25 +7265,25 @@
                   <a:tcPr anchor="ctr" marL="73152" marR="73152">
                     <a:lnL w="9525" cap="flat" cmpd="sng" algn="ctr">
                       <a:solidFill>
-                        <a:srgbClr val="F8DFC9"/>
+                        <a:srgbClr val="F6E4D5"/>
                       </a:solidFill>
                       <a:prstDash val="solid"/>
                     </a:lnL>
                     <a:lnR w="9525" cap="flat" cmpd="sng" algn="ctr">
                       <a:solidFill>
-                        <a:srgbClr val="F8DFC9"/>
+                        <a:srgbClr val="F6E4D5"/>
                       </a:solidFill>
                       <a:prstDash val="solid"/>
                     </a:lnR>
                     <a:lnT w="9525" cap="flat" cmpd="sng" algn="ctr">
                       <a:solidFill>
-                        <a:srgbClr val="F8DFC9"/>
+                        <a:srgbClr val="F6E4D5"/>
                       </a:solidFill>
                       <a:prstDash val="solid"/>
                     </a:lnT>
                     <a:lnB w="9525" cap="flat" cmpd="sng" algn="ctr">
                       <a:solidFill>
-                        <a:srgbClr val="F8DFC9"/>
+                        <a:srgbClr val="F6E4D5"/>
                       </a:solidFill>
                       <a:prstDash val="solid"/>
                     </a:lnB>
@@ -7107,7 +7301,7 @@
                       <a:r>
                         <a:rPr sz="1400" b="0">
                           <a:solidFill>
-                            <a:srgbClr val="2B2B2B"/>
+                            <a:srgbClr val="26231F"/>
                           </a:solidFill>
                         </a:rPr>
                         <a:t>□</a:t>
@@ -7117,25 +7311,25 @@
                   <a:tcPr anchor="ctr" marL="73152" marR="73152">
                     <a:lnL w="9525" cap="flat" cmpd="sng" algn="ctr">
                       <a:solidFill>
-                        <a:srgbClr val="F8DFC9"/>
+                        <a:srgbClr val="F6E4D5"/>
                       </a:solidFill>
                       <a:prstDash val="solid"/>
                     </a:lnL>
                     <a:lnR w="9525" cap="flat" cmpd="sng" algn="ctr">
                       <a:solidFill>
-                        <a:srgbClr val="F8DFC9"/>
+                        <a:srgbClr val="F6E4D5"/>
                       </a:solidFill>
                       <a:prstDash val="solid"/>
                     </a:lnR>
                     <a:lnT w="9525" cap="flat" cmpd="sng" algn="ctr">
                       <a:solidFill>
-                        <a:srgbClr val="F8DFC9"/>
+                        <a:srgbClr val="F6E4D5"/>
                       </a:solidFill>
                       <a:prstDash val="solid"/>
                     </a:lnT>
                     <a:lnB w="9525" cap="flat" cmpd="sng" algn="ctr">
                       <a:solidFill>
-                        <a:srgbClr val="F8DFC9"/>
+                        <a:srgbClr val="F6E4D5"/>
                       </a:solidFill>
                       <a:prstDash val="solid"/>
                     </a:lnB>
@@ -7153,7 +7347,7 @@
                       <a:r>
                         <a:rPr sz="1400" b="0">
                           <a:solidFill>
-                            <a:srgbClr val="2B2B2B"/>
+                            <a:srgbClr val="26231F"/>
                           </a:solidFill>
                         </a:rPr>
                         <a:t>□</a:t>
@@ -7163,25 +7357,25 @@
                   <a:tcPr anchor="ctr" marL="73152" marR="73152">
                     <a:lnL w="9525" cap="flat" cmpd="sng" algn="ctr">
                       <a:solidFill>
-                        <a:srgbClr val="F8DFC9"/>
+                        <a:srgbClr val="F6E4D5"/>
                       </a:solidFill>
                       <a:prstDash val="solid"/>
                     </a:lnL>
                     <a:lnR w="9525" cap="flat" cmpd="sng" algn="ctr">
                       <a:solidFill>
-                        <a:srgbClr val="F8DFC9"/>
+                        <a:srgbClr val="F6E4D5"/>
                       </a:solidFill>
                       <a:prstDash val="solid"/>
                     </a:lnR>
                     <a:lnT w="9525" cap="flat" cmpd="sng" algn="ctr">
                       <a:solidFill>
-                        <a:srgbClr val="F8DFC9"/>
+                        <a:srgbClr val="F6E4D5"/>
                       </a:solidFill>
                       <a:prstDash val="solid"/>
                     </a:lnT>
                     <a:lnB w="9525" cap="flat" cmpd="sng" algn="ctr">
                       <a:solidFill>
-                        <a:srgbClr val="F8DFC9"/>
+                        <a:srgbClr val="F6E4D5"/>
                       </a:solidFill>
                       <a:prstDash val="solid"/>
                     </a:lnB>
@@ -7201,7 +7395,7 @@
                       <a:r>
                         <a:rPr sz="1400" b="1">
                           <a:solidFill>
-                            <a:srgbClr val="723F13"/>
+                            <a:srgbClr val="493727"/>
                           </a:solidFill>
                         </a:rPr>
                         <a:t>뇌·심장</a:t>
@@ -7211,30 +7405,30 @@
                   <a:tcPr anchor="ctr" marL="73152" marR="73152">
                     <a:lnL w="9525" cap="flat" cmpd="sng" algn="ctr">
                       <a:solidFill>
-                        <a:srgbClr val="F8DFC9"/>
+                        <a:srgbClr val="F6E4D5"/>
                       </a:solidFill>
                       <a:prstDash val="solid"/>
                     </a:lnL>
                     <a:lnR w="9525" cap="flat" cmpd="sng" algn="ctr">
                       <a:solidFill>
-                        <a:srgbClr val="F8DFC9"/>
+                        <a:srgbClr val="F6E4D5"/>
                       </a:solidFill>
                       <a:prstDash val="solid"/>
                     </a:lnR>
                     <a:lnT w="9525" cap="flat" cmpd="sng" algn="ctr">
                       <a:solidFill>
-                        <a:srgbClr val="F8DFC9"/>
+                        <a:srgbClr val="F6E4D5"/>
                       </a:solidFill>
                       <a:prstDash val="solid"/>
                     </a:lnT>
                     <a:lnB w="9525" cap="flat" cmpd="sng" algn="ctr">
                       <a:solidFill>
-                        <a:srgbClr val="F8DFC9"/>
+                        <a:srgbClr val="F6E4D5"/>
                       </a:solidFill>
                       <a:prstDash val="solid"/>
                     </a:lnB>
                     <a:solidFill>
-                      <a:srgbClr val="F8DFC9"/>
+                      <a:srgbClr val="F6E4D5"/>
                     </a:solidFill>
                   </a:tcPr>
                 </a:tc>
@@ -7247,7 +7441,7 @@
                       <a:r>
                         <a:rPr sz="1400" b="0">
                           <a:solidFill>
-                            <a:srgbClr val="2B2B2B"/>
+                            <a:srgbClr val="26231F"/>
                           </a:solidFill>
                         </a:rPr>
                         <a:t>□</a:t>
@@ -7257,30 +7451,30 @@
                   <a:tcPr anchor="ctr" marL="73152" marR="73152">
                     <a:lnL w="9525" cap="flat" cmpd="sng" algn="ctr">
                       <a:solidFill>
-                        <a:srgbClr val="F8DFC9"/>
+                        <a:srgbClr val="F6E4D5"/>
                       </a:solidFill>
                       <a:prstDash val="solid"/>
                     </a:lnL>
                     <a:lnR w="9525" cap="flat" cmpd="sng" algn="ctr">
                       <a:solidFill>
-                        <a:srgbClr val="F8DFC9"/>
+                        <a:srgbClr val="F6E4D5"/>
                       </a:solidFill>
                       <a:prstDash val="solid"/>
                     </a:lnR>
                     <a:lnT w="9525" cap="flat" cmpd="sng" algn="ctr">
                       <a:solidFill>
-                        <a:srgbClr val="F8DFC9"/>
+                        <a:srgbClr val="F6E4D5"/>
                       </a:solidFill>
                       <a:prstDash val="solid"/>
                     </a:lnT>
                     <a:lnB w="9525" cap="flat" cmpd="sng" algn="ctr">
                       <a:solidFill>
-                        <a:srgbClr val="F8DFC9"/>
+                        <a:srgbClr val="F6E4D5"/>
                       </a:solidFill>
                       <a:prstDash val="solid"/>
                     </a:lnB>
                     <a:solidFill>
-                      <a:srgbClr val="FCF4ED"/>
+                      <a:srgbClr val="FBF3EC"/>
                     </a:solidFill>
                   </a:tcPr>
                 </a:tc>
@@ -7293,7 +7487,7 @@
                       <a:r>
                         <a:rPr sz="1400" b="0">
                           <a:solidFill>
-                            <a:srgbClr val="2B2B2B"/>
+                            <a:srgbClr val="26231F"/>
                           </a:solidFill>
                         </a:rPr>
                         <a:t>□</a:t>
@@ -7303,30 +7497,30 @@
                   <a:tcPr anchor="ctr" marL="73152" marR="73152">
                     <a:lnL w="9525" cap="flat" cmpd="sng" algn="ctr">
                       <a:solidFill>
-                        <a:srgbClr val="F8DFC9"/>
+                        <a:srgbClr val="F6E4D5"/>
                       </a:solidFill>
                       <a:prstDash val="solid"/>
                     </a:lnL>
                     <a:lnR w="9525" cap="flat" cmpd="sng" algn="ctr">
                       <a:solidFill>
-                        <a:srgbClr val="F8DFC9"/>
+                        <a:srgbClr val="F6E4D5"/>
                       </a:solidFill>
                       <a:prstDash val="solid"/>
                     </a:lnR>
                     <a:lnT w="9525" cap="flat" cmpd="sng" algn="ctr">
                       <a:solidFill>
-                        <a:srgbClr val="F8DFC9"/>
+                        <a:srgbClr val="F6E4D5"/>
                       </a:solidFill>
                       <a:prstDash val="solid"/>
                     </a:lnT>
                     <a:lnB w="9525" cap="flat" cmpd="sng" algn="ctr">
                       <a:solidFill>
-                        <a:srgbClr val="F8DFC9"/>
+                        <a:srgbClr val="F6E4D5"/>
                       </a:solidFill>
                       <a:prstDash val="solid"/>
                     </a:lnB>
                     <a:solidFill>
-                      <a:srgbClr val="FCF4ED"/>
+                      <a:srgbClr val="FBF3EC"/>
                     </a:solidFill>
                   </a:tcPr>
                 </a:tc>
@@ -7339,7 +7533,7 @@
                       <a:r>
                         <a:rPr sz="1400" b="0">
                           <a:solidFill>
-                            <a:srgbClr val="2B2B2B"/>
+                            <a:srgbClr val="26231F"/>
                           </a:solidFill>
                         </a:rPr>
                         <a:t>□</a:t>
@@ -7349,30 +7543,30 @@
                   <a:tcPr anchor="ctr" marL="73152" marR="73152">
                     <a:lnL w="9525" cap="flat" cmpd="sng" algn="ctr">
                       <a:solidFill>
-                        <a:srgbClr val="F8DFC9"/>
+                        <a:srgbClr val="F6E4D5"/>
                       </a:solidFill>
                       <a:prstDash val="solid"/>
                     </a:lnL>
                     <a:lnR w="9525" cap="flat" cmpd="sng" algn="ctr">
                       <a:solidFill>
-                        <a:srgbClr val="F8DFC9"/>
+                        <a:srgbClr val="F6E4D5"/>
                       </a:solidFill>
                       <a:prstDash val="solid"/>
                     </a:lnR>
                     <a:lnT w="9525" cap="flat" cmpd="sng" algn="ctr">
                       <a:solidFill>
-                        <a:srgbClr val="F8DFC9"/>
+                        <a:srgbClr val="F6E4D5"/>
                       </a:solidFill>
                       <a:prstDash val="solid"/>
                     </a:lnT>
                     <a:lnB w="9525" cap="flat" cmpd="sng" algn="ctr">
                       <a:solidFill>
-                        <a:srgbClr val="F8DFC9"/>
+                        <a:srgbClr val="F6E4D5"/>
                       </a:solidFill>
                       <a:prstDash val="solid"/>
                     </a:lnB>
                     <a:solidFill>
-                      <a:srgbClr val="FCF4ED"/>
+                      <a:srgbClr val="FBF3EC"/>
                     </a:solidFill>
                   </a:tcPr>
                 </a:tc>
@@ -7387,7 +7581,7 @@
                       <a:r>
                         <a:rPr sz="1400" b="1">
                           <a:solidFill>
-                            <a:srgbClr val="723F13"/>
+                            <a:srgbClr val="493727"/>
                           </a:solidFill>
                         </a:rPr>
                         <a:t>입원·수술</a:t>
@@ -7397,30 +7591,30 @@
                   <a:tcPr anchor="ctr" marL="73152" marR="73152">
                     <a:lnL w="9525" cap="flat" cmpd="sng" algn="ctr">
                       <a:solidFill>
-                        <a:srgbClr val="F8DFC9"/>
+                        <a:srgbClr val="F6E4D5"/>
                       </a:solidFill>
                       <a:prstDash val="solid"/>
                     </a:lnL>
                     <a:lnR w="9525" cap="flat" cmpd="sng" algn="ctr">
                       <a:solidFill>
-                        <a:srgbClr val="F8DFC9"/>
+                        <a:srgbClr val="F6E4D5"/>
                       </a:solidFill>
                       <a:prstDash val="solid"/>
                     </a:lnR>
                     <a:lnT w="9525" cap="flat" cmpd="sng" algn="ctr">
                       <a:solidFill>
-                        <a:srgbClr val="F8DFC9"/>
+                        <a:srgbClr val="F6E4D5"/>
                       </a:solidFill>
                       <a:prstDash val="solid"/>
                     </a:lnT>
                     <a:lnB w="9525" cap="flat" cmpd="sng" algn="ctr">
                       <a:solidFill>
-                        <a:srgbClr val="F8DFC9"/>
+                        <a:srgbClr val="F6E4D5"/>
                       </a:solidFill>
                       <a:prstDash val="solid"/>
                     </a:lnB>
                     <a:solidFill>
-                      <a:srgbClr val="F8DFC9"/>
+                      <a:srgbClr val="F6E4D5"/>
                     </a:solidFill>
                   </a:tcPr>
                 </a:tc>
@@ -7433,7 +7627,7 @@
                       <a:r>
                         <a:rPr sz="1400" b="0">
                           <a:solidFill>
-                            <a:srgbClr val="2B2B2B"/>
+                            <a:srgbClr val="26231F"/>
                           </a:solidFill>
                         </a:rPr>
                         <a:t>□</a:t>
@@ -7443,25 +7637,25 @@
                   <a:tcPr anchor="ctr" marL="73152" marR="73152">
                     <a:lnL w="9525" cap="flat" cmpd="sng" algn="ctr">
                       <a:solidFill>
-                        <a:srgbClr val="F8DFC9"/>
+                        <a:srgbClr val="F6E4D5"/>
                       </a:solidFill>
                       <a:prstDash val="solid"/>
                     </a:lnL>
                     <a:lnR w="9525" cap="flat" cmpd="sng" algn="ctr">
                       <a:solidFill>
-                        <a:srgbClr val="F8DFC9"/>
+                        <a:srgbClr val="F6E4D5"/>
                       </a:solidFill>
                       <a:prstDash val="solid"/>
                     </a:lnR>
                     <a:lnT w="9525" cap="flat" cmpd="sng" algn="ctr">
                       <a:solidFill>
-                        <a:srgbClr val="F8DFC9"/>
+                        <a:srgbClr val="F6E4D5"/>
                       </a:solidFill>
                       <a:prstDash val="solid"/>
                     </a:lnT>
                     <a:lnB w="9525" cap="flat" cmpd="sng" algn="ctr">
                       <a:solidFill>
-                        <a:srgbClr val="F8DFC9"/>
+                        <a:srgbClr val="F6E4D5"/>
                       </a:solidFill>
                       <a:prstDash val="solid"/>
                     </a:lnB>
@@ -7479,7 +7673,7 @@
                       <a:r>
                         <a:rPr sz="1400" b="0">
                           <a:solidFill>
-                            <a:srgbClr val="2B2B2B"/>
+                            <a:srgbClr val="26231F"/>
                           </a:solidFill>
                         </a:rPr>
                         <a:t>□</a:t>
@@ -7489,25 +7683,25 @@
                   <a:tcPr anchor="ctr" marL="73152" marR="73152">
                     <a:lnL w="9525" cap="flat" cmpd="sng" algn="ctr">
                       <a:solidFill>
-                        <a:srgbClr val="F8DFC9"/>
+                        <a:srgbClr val="F6E4D5"/>
                       </a:solidFill>
                       <a:prstDash val="solid"/>
                     </a:lnL>
                     <a:lnR w="9525" cap="flat" cmpd="sng" algn="ctr">
                       <a:solidFill>
-                        <a:srgbClr val="F8DFC9"/>
+                        <a:srgbClr val="F6E4D5"/>
                       </a:solidFill>
                       <a:prstDash val="solid"/>
                     </a:lnR>
                     <a:lnT w="9525" cap="flat" cmpd="sng" algn="ctr">
                       <a:solidFill>
-                        <a:srgbClr val="F8DFC9"/>
+                        <a:srgbClr val="F6E4D5"/>
                       </a:solidFill>
                       <a:prstDash val="solid"/>
                     </a:lnT>
                     <a:lnB w="9525" cap="flat" cmpd="sng" algn="ctr">
                       <a:solidFill>
-                        <a:srgbClr val="F8DFC9"/>
+                        <a:srgbClr val="F6E4D5"/>
                       </a:solidFill>
                       <a:prstDash val="solid"/>
                     </a:lnB>
@@ -7525,7 +7719,7 @@
                       <a:r>
                         <a:rPr sz="1400" b="0">
                           <a:solidFill>
-                            <a:srgbClr val="2B2B2B"/>
+                            <a:srgbClr val="26231F"/>
                           </a:solidFill>
                         </a:rPr>
                         <a:t>□</a:t>
@@ -7535,25 +7729,25 @@
                   <a:tcPr anchor="ctr" marL="73152" marR="73152">
                     <a:lnL w="9525" cap="flat" cmpd="sng" algn="ctr">
                       <a:solidFill>
-                        <a:srgbClr val="F8DFC9"/>
+                        <a:srgbClr val="F6E4D5"/>
                       </a:solidFill>
                       <a:prstDash val="solid"/>
                     </a:lnL>
                     <a:lnR w="9525" cap="flat" cmpd="sng" algn="ctr">
                       <a:solidFill>
-                        <a:srgbClr val="F8DFC9"/>
+                        <a:srgbClr val="F6E4D5"/>
                       </a:solidFill>
                       <a:prstDash val="solid"/>
                     </a:lnR>
                     <a:lnT w="9525" cap="flat" cmpd="sng" algn="ctr">
                       <a:solidFill>
-                        <a:srgbClr val="F8DFC9"/>
+                        <a:srgbClr val="F6E4D5"/>
                       </a:solidFill>
                       <a:prstDash val="solid"/>
                     </a:lnT>
                     <a:lnB w="9525" cap="flat" cmpd="sng" algn="ctr">
                       <a:solidFill>
-                        <a:srgbClr val="F8DFC9"/>
+                        <a:srgbClr val="F6E4D5"/>
                       </a:solidFill>
                       <a:prstDash val="solid"/>
                     </a:lnB>
@@ -7573,7 +7767,7 @@
                       <a:r>
                         <a:rPr sz="1400" b="1">
                           <a:solidFill>
-                            <a:srgbClr val="723F13"/>
+                            <a:srgbClr val="493727"/>
                           </a:solidFill>
                         </a:rPr>
                         <a:t>상해</a:t>
@@ -7583,30 +7777,30 @@
                   <a:tcPr anchor="ctr" marL="73152" marR="73152">
                     <a:lnL w="9525" cap="flat" cmpd="sng" algn="ctr">
                       <a:solidFill>
-                        <a:srgbClr val="F8DFC9"/>
+                        <a:srgbClr val="F6E4D5"/>
                       </a:solidFill>
                       <a:prstDash val="solid"/>
                     </a:lnL>
                     <a:lnR w="9525" cap="flat" cmpd="sng" algn="ctr">
                       <a:solidFill>
-                        <a:srgbClr val="F8DFC9"/>
+                        <a:srgbClr val="F6E4D5"/>
                       </a:solidFill>
                       <a:prstDash val="solid"/>
                     </a:lnR>
                     <a:lnT w="9525" cap="flat" cmpd="sng" algn="ctr">
                       <a:solidFill>
-                        <a:srgbClr val="F8DFC9"/>
+                        <a:srgbClr val="F6E4D5"/>
                       </a:solidFill>
                       <a:prstDash val="solid"/>
                     </a:lnT>
                     <a:lnB w="9525" cap="flat" cmpd="sng" algn="ctr">
                       <a:solidFill>
-                        <a:srgbClr val="F8DFC9"/>
+                        <a:srgbClr val="F6E4D5"/>
                       </a:solidFill>
                       <a:prstDash val="solid"/>
                     </a:lnB>
                     <a:solidFill>
-                      <a:srgbClr val="F8DFC9"/>
+                      <a:srgbClr val="F6E4D5"/>
                     </a:solidFill>
                   </a:tcPr>
                 </a:tc>
@@ -7619,7 +7813,7 @@
                       <a:r>
                         <a:rPr sz="1400" b="0">
                           <a:solidFill>
-                            <a:srgbClr val="2B2B2B"/>
+                            <a:srgbClr val="26231F"/>
                           </a:solidFill>
                         </a:rPr>
                         <a:t>□</a:t>
@@ -7629,30 +7823,30 @@
                   <a:tcPr anchor="ctr" marL="73152" marR="73152">
                     <a:lnL w="9525" cap="flat" cmpd="sng" algn="ctr">
                       <a:solidFill>
-                        <a:srgbClr val="F8DFC9"/>
+                        <a:srgbClr val="F6E4D5"/>
                       </a:solidFill>
                       <a:prstDash val="solid"/>
                     </a:lnL>
                     <a:lnR w="9525" cap="flat" cmpd="sng" algn="ctr">
                       <a:solidFill>
-                        <a:srgbClr val="F8DFC9"/>
+                        <a:srgbClr val="F6E4D5"/>
                       </a:solidFill>
                       <a:prstDash val="solid"/>
                     </a:lnR>
                     <a:lnT w="9525" cap="flat" cmpd="sng" algn="ctr">
                       <a:solidFill>
-                        <a:srgbClr val="F8DFC9"/>
+                        <a:srgbClr val="F6E4D5"/>
                       </a:solidFill>
                       <a:prstDash val="solid"/>
                     </a:lnT>
                     <a:lnB w="9525" cap="flat" cmpd="sng" algn="ctr">
                       <a:solidFill>
-                        <a:srgbClr val="F8DFC9"/>
+                        <a:srgbClr val="F6E4D5"/>
                       </a:solidFill>
                       <a:prstDash val="solid"/>
                     </a:lnB>
                     <a:solidFill>
-                      <a:srgbClr val="FCF4ED"/>
+                      <a:srgbClr val="FBF3EC"/>
                     </a:solidFill>
                   </a:tcPr>
                 </a:tc>
@@ -7665,7 +7859,7 @@
                       <a:r>
                         <a:rPr sz="1400" b="0">
                           <a:solidFill>
-                            <a:srgbClr val="2B2B2B"/>
+                            <a:srgbClr val="26231F"/>
                           </a:solidFill>
                         </a:rPr>
                         <a:t>□</a:t>
@@ -7675,30 +7869,30 @@
                   <a:tcPr anchor="ctr" marL="73152" marR="73152">
                     <a:lnL w="9525" cap="flat" cmpd="sng" algn="ctr">
                       <a:solidFill>
-                        <a:srgbClr val="F8DFC9"/>
+                        <a:srgbClr val="F6E4D5"/>
                       </a:solidFill>
                       <a:prstDash val="solid"/>
                     </a:lnL>
                     <a:lnR w="9525" cap="flat" cmpd="sng" algn="ctr">
                       <a:solidFill>
-                        <a:srgbClr val="F8DFC9"/>
+                        <a:srgbClr val="F6E4D5"/>
                       </a:solidFill>
                       <a:prstDash val="solid"/>
                     </a:lnR>
                     <a:lnT w="9525" cap="flat" cmpd="sng" algn="ctr">
                       <a:solidFill>
-                        <a:srgbClr val="F8DFC9"/>
+                        <a:srgbClr val="F6E4D5"/>
                       </a:solidFill>
                       <a:prstDash val="solid"/>
                     </a:lnT>
                     <a:lnB w="9525" cap="flat" cmpd="sng" algn="ctr">
                       <a:solidFill>
-                        <a:srgbClr val="F8DFC9"/>
+                        <a:srgbClr val="F6E4D5"/>
                       </a:solidFill>
                       <a:prstDash val="solid"/>
                     </a:lnB>
                     <a:solidFill>
-                      <a:srgbClr val="FCF4ED"/>
+                      <a:srgbClr val="FBF3EC"/>
                     </a:solidFill>
                   </a:tcPr>
                 </a:tc>
@@ -7711,7 +7905,7 @@
                       <a:r>
                         <a:rPr sz="1400" b="0">
                           <a:solidFill>
-                            <a:srgbClr val="2B2B2B"/>
+                            <a:srgbClr val="26231F"/>
                           </a:solidFill>
                         </a:rPr>
                         <a:t>□</a:t>
@@ -7721,30 +7915,30 @@
                   <a:tcPr anchor="ctr" marL="73152" marR="73152">
                     <a:lnL w="9525" cap="flat" cmpd="sng" algn="ctr">
                       <a:solidFill>
-                        <a:srgbClr val="F8DFC9"/>
+                        <a:srgbClr val="F6E4D5"/>
                       </a:solidFill>
                       <a:prstDash val="solid"/>
                     </a:lnL>
                     <a:lnR w="9525" cap="flat" cmpd="sng" algn="ctr">
                       <a:solidFill>
-                        <a:srgbClr val="F8DFC9"/>
+                        <a:srgbClr val="F6E4D5"/>
                       </a:solidFill>
                       <a:prstDash val="solid"/>
                     </a:lnR>
                     <a:lnT w="9525" cap="flat" cmpd="sng" algn="ctr">
                       <a:solidFill>
-                        <a:srgbClr val="F8DFC9"/>
+                        <a:srgbClr val="F6E4D5"/>
                       </a:solidFill>
                       <a:prstDash val="solid"/>
                     </a:lnT>
                     <a:lnB w="9525" cap="flat" cmpd="sng" algn="ctr">
                       <a:solidFill>
-                        <a:srgbClr val="F8DFC9"/>
+                        <a:srgbClr val="F6E4D5"/>
                       </a:solidFill>
                       <a:prstDash val="solid"/>
                     </a:lnB>
                     <a:solidFill>
-                      <a:srgbClr val="FCF4ED"/>
+                      <a:srgbClr val="FBF3EC"/>
                     </a:solidFill>
                   </a:tcPr>
                 </a:tc>
@@ -7759,7 +7953,7 @@
                       <a:r>
                         <a:rPr sz="1400" b="1">
                           <a:solidFill>
-                            <a:srgbClr val="723F13"/>
+                            <a:srgbClr val="493727"/>
                           </a:solidFill>
                         </a:rPr>
                         <a:t>실손의료</a:t>
@@ -7769,30 +7963,30 @@
                   <a:tcPr anchor="ctr" marL="73152" marR="73152">
                     <a:lnL w="9525" cap="flat" cmpd="sng" algn="ctr">
                       <a:solidFill>
-                        <a:srgbClr val="F8DFC9"/>
+                        <a:srgbClr val="F6E4D5"/>
                       </a:solidFill>
                       <a:prstDash val="solid"/>
                     </a:lnL>
                     <a:lnR w="9525" cap="flat" cmpd="sng" algn="ctr">
                       <a:solidFill>
-                        <a:srgbClr val="F8DFC9"/>
+                        <a:srgbClr val="F6E4D5"/>
                       </a:solidFill>
                       <a:prstDash val="solid"/>
                     </a:lnR>
                     <a:lnT w="9525" cap="flat" cmpd="sng" algn="ctr">
                       <a:solidFill>
-                        <a:srgbClr val="F8DFC9"/>
+                        <a:srgbClr val="F6E4D5"/>
                       </a:solidFill>
                       <a:prstDash val="solid"/>
                     </a:lnT>
                     <a:lnB w="9525" cap="flat" cmpd="sng" algn="ctr">
                       <a:solidFill>
-                        <a:srgbClr val="F8DFC9"/>
+                        <a:srgbClr val="F6E4D5"/>
                       </a:solidFill>
                       <a:prstDash val="solid"/>
                     </a:lnB>
                     <a:solidFill>
-                      <a:srgbClr val="F8DFC9"/>
+                      <a:srgbClr val="F6E4D5"/>
                     </a:solidFill>
                   </a:tcPr>
                 </a:tc>
@@ -7805,7 +7999,7 @@
                       <a:r>
                         <a:rPr sz="1400" b="0">
                           <a:solidFill>
-                            <a:srgbClr val="2B2B2B"/>
+                            <a:srgbClr val="26231F"/>
                           </a:solidFill>
                         </a:rPr>
                         <a:t>□</a:t>
@@ -7815,25 +8009,25 @@
                   <a:tcPr anchor="ctr" marL="73152" marR="73152">
                     <a:lnL w="9525" cap="flat" cmpd="sng" algn="ctr">
                       <a:solidFill>
-                        <a:srgbClr val="F8DFC9"/>
+                        <a:srgbClr val="F6E4D5"/>
                       </a:solidFill>
                       <a:prstDash val="solid"/>
                     </a:lnL>
                     <a:lnR w="9525" cap="flat" cmpd="sng" algn="ctr">
                       <a:solidFill>
-                        <a:srgbClr val="F8DFC9"/>
+                        <a:srgbClr val="F6E4D5"/>
                       </a:solidFill>
                       <a:prstDash val="solid"/>
                     </a:lnR>
                     <a:lnT w="9525" cap="flat" cmpd="sng" algn="ctr">
                       <a:solidFill>
-                        <a:srgbClr val="F8DFC9"/>
+                        <a:srgbClr val="F6E4D5"/>
                       </a:solidFill>
                       <a:prstDash val="solid"/>
                     </a:lnT>
                     <a:lnB w="9525" cap="flat" cmpd="sng" algn="ctr">
                       <a:solidFill>
-                        <a:srgbClr val="F8DFC9"/>
+                        <a:srgbClr val="F6E4D5"/>
                       </a:solidFill>
                       <a:prstDash val="solid"/>
                     </a:lnB>
@@ -7851,7 +8045,7 @@
                       <a:r>
                         <a:rPr sz="1400" b="0">
                           <a:solidFill>
-                            <a:srgbClr val="2B2B2B"/>
+                            <a:srgbClr val="26231F"/>
                           </a:solidFill>
                         </a:rPr>
                         <a:t>□</a:t>
@@ -7861,25 +8055,25 @@
                   <a:tcPr anchor="ctr" marL="73152" marR="73152">
                     <a:lnL w="9525" cap="flat" cmpd="sng" algn="ctr">
                       <a:solidFill>
-                        <a:srgbClr val="F8DFC9"/>
+                        <a:srgbClr val="F6E4D5"/>
                       </a:solidFill>
                       <a:prstDash val="solid"/>
                     </a:lnL>
                     <a:lnR w="9525" cap="flat" cmpd="sng" algn="ctr">
                       <a:solidFill>
-                        <a:srgbClr val="F8DFC9"/>
+                        <a:srgbClr val="F6E4D5"/>
                       </a:solidFill>
                       <a:prstDash val="solid"/>
                     </a:lnR>
                     <a:lnT w="9525" cap="flat" cmpd="sng" algn="ctr">
                       <a:solidFill>
-                        <a:srgbClr val="F8DFC9"/>
+                        <a:srgbClr val="F6E4D5"/>
                       </a:solidFill>
                       <a:prstDash val="solid"/>
                     </a:lnT>
                     <a:lnB w="9525" cap="flat" cmpd="sng" algn="ctr">
                       <a:solidFill>
-                        <a:srgbClr val="F8DFC9"/>
+                        <a:srgbClr val="F6E4D5"/>
                       </a:solidFill>
                       <a:prstDash val="solid"/>
                     </a:lnB>
@@ -7897,7 +8091,7 @@
                       <a:r>
                         <a:rPr sz="1400" b="0">
                           <a:solidFill>
-                            <a:srgbClr val="2B2B2B"/>
+                            <a:srgbClr val="26231F"/>
                           </a:solidFill>
                         </a:rPr>
                         <a:t>□</a:t>
@@ -7907,25 +8101,25 @@
                   <a:tcPr anchor="ctr" marL="73152" marR="73152">
                     <a:lnL w="9525" cap="flat" cmpd="sng" algn="ctr">
                       <a:solidFill>
-                        <a:srgbClr val="F8DFC9"/>
+                        <a:srgbClr val="F6E4D5"/>
                       </a:solidFill>
                       <a:prstDash val="solid"/>
                     </a:lnL>
                     <a:lnR w="9525" cap="flat" cmpd="sng" algn="ctr">
                       <a:solidFill>
-                        <a:srgbClr val="F8DFC9"/>
+                        <a:srgbClr val="F6E4D5"/>
                       </a:solidFill>
                       <a:prstDash val="solid"/>
                     </a:lnR>
                     <a:lnT w="9525" cap="flat" cmpd="sng" algn="ctr">
                       <a:solidFill>
-                        <a:srgbClr val="F8DFC9"/>
+                        <a:srgbClr val="F6E4D5"/>
                       </a:solidFill>
                       <a:prstDash val="solid"/>
                     </a:lnT>
                     <a:lnB w="9525" cap="flat" cmpd="sng" algn="ctr">
                       <a:solidFill>
-                        <a:srgbClr val="F8DFC9"/>
+                        <a:srgbClr val="F6E4D5"/>
                       </a:solidFill>
                       <a:prstDash val="solid"/>
                     </a:lnB>
@@ -7945,7 +8139,7 @@
                       <a:r>
                         <a:rPr sz="1400" b="1">
                           <a:solidFill>
-                            <a:srgbClr val="723F13"/>
+                            <a:srgbClr val="493727"/>
                           </a:solidFill>
                         </a:rPr>
                         <a:t>연금·노후자금</a:t>
@@ -7955,30 +8149,30 @@
                   <a:tcPr anchor="ctr" marL="73152" marR="73152">
                     <a:lnL w="9525" cap="flat" cmpd="sng" algn="ctr">
                       <a:solidFill>
-                        <a:srgbClr val="F8DFC9"/>
+                        <a:srgbClr val="F6E4D5"/>
                       </a:solidFill>
                       <a:prstDash val="solid"/>
                     </a:lnL>
                     <a:lnR w="9525" cap="flat" cmpd="sng" algn="ctr">
                       <a:solidFill>
-                        <a:srgbClr val="F8DFC9"/>
+                        <a:srgbClr val="F6E4D5"/>
                       </a:solidFill>
                       <a:prstDash val="solid"/>
                     </a:lnR>
                     <a:lnT w="9525" cap="flat" cmpd="sng" algn="ctr">
                       <a:solidFill>
-                        <a:srgbClr val="F8DFC9"/>
+                        <a:srgbClr val="F6E4D5"/>
                       </a:solidFill>
                       <a:prstDash val="solid"/>
                     </a:lnT>
                     <a:lnB w="9525" cap="flat" cmpd="sng" algn="ctr">
                       <a:solidFill>
-                        <a:srgbClr val="F8DFC9"/>
+                        <a:srgbClr val="F6E4D5"/>
                       </a:solidFill>
                       <a:prstDash val="solid"/>
                     </a:lnB>
                     <a:solidFill>
-                      <a:srgbClr val="F8DFC9"/>
+                      <a:srgbClr val="F6E4D5"/>
                     </a:solidFill>
                   </a:tcPr>
                 </a:tc>
@@ -7991,7 +8185,7 @@
                       <a:r>
                         <a:rPr sz="1400" b="0">
                           <a:solidFill>
-                            <a:srgbClr val="2B2B2B"/>
+                            <a:srgbClr val="26231F"/>
                           </a:solidFill>
                         </a:rPr>
                         <a:t>□</a:t>
@@ -8001,30 +8195,30 @@
                   <a:tcPr anchor="ctr" marL="73152" marR="73152">
                     <a:lnL w="9525" cap="flat" cmpd="sng" algn="ctr">
                       <a:solidFill>
-                        <a:srgbClr val="F8DFC9"/>
+                        <a:srgbClr val="F6E4D5"/>
                       </a:solidFill>
                       <a:prstDash val="solid"/>
                     </a:lnL>
                     <a:lnR w="9525" cap="flat" cmpd="sng" algn="ctr">
                       <a:solidFill>
-                        <a:srgbClr val="F8DFC9"/>
+                        <a:srgbClr val="F6E4D5"/>
                       </a:solidFill>
                       <a:prstDash val="solid"/>
                     </a:lnR>
                     <a:lnT w="9525" cap="flat" cmpd="sng" algn="ctr">
                       <a:solidFill>
-                        <a:srgbClr val="F8DFC9"/>
+                        <a:srgbClr val="F6E4D5"/>
                       </a:solidFill>
                       <a:prstDash val="solid"/>
                     </a:lnT>
                     <a:lnB w="9525" cap="flat" cmpd="sng" algn="ctr">
                       <a:solidFill>
-                        <a:srgbClr val="F8DFC9"/>
+                        <a:srgbClr val="F6E4D5"/>
                       </a:solidFill>
                       <a:prstDash val="solid"/>
                     </a:lnB>
                     <a:solidFill>
-                      <a:srgbClr val="FCF4ED"/>
+                      <a:srgbClr val="FBF3EC"/>
                     </a:solidFill>
                   </a:tcPr>
                 </a:tc>
@@ -8037,7 +8231,7 @@
                       <a:r>
                         <a:rPr sz="1400" b="0">
                           <a:solidFill>
-                            <a:srgbClr val="2B2B2B"/>
+                            <a:srgbClr val="26231F"/>
                           </a:solidFill>
                         </a:rPr>
                         <a:t>□</a:t>
@@ -8047,30 +8241,30 @@
                   <a:tcPr anchor="ctr" marL="73152" marR="73152">
                     <a:lnL w="9525" cap="flat" cmpd="sng" algn="ctr">
                       <a:solidFill>
-                        <a:srgbClr val="F8DFC9"/>
+                        <a:srgbClr val="F6E4D5"/>
                       </a:solidFill>
                       <a:prstDash val="solid"/>
                     </a:lnL>
                     <a:lnR w="9525" cap="flat" cmpd="sng" algn="ctr">
                       <a:solidFill>
-                        <a:srgbClr val="F8DFC9"/>
+                        <a:srgbClr val="F6E4D5"/>
                       </a:solidFill>
                       <a:prstDash val="solid"/>
                     </a:lnR>
                     <a:lnT w="9525" cap="flat" cmpd="sng" algn="ctr">
                       <a:solidFill>
-                        <a:srgbClr val="F8DFC9"/>
+                        <a:srgbClr val="F6E4D5"/>
                       </a:solidFill>
                       <a:prstDash val="solid"/>
                     </a:lnT>
                     <a:lnB w="9525" cap="flat" cmpd="sng" algn="ctr">
                       <a:solidFill>
-                        <a:srgbClr val="F8DFC9"/>
+                        <a:srgbClr val="F6E4D5"/>
                       </a:solidFill>
                       <a:prstDash val="solid"/>
                     </a:lnB>
                     <a:solidFill>
-                      <a:srgbClr val="FCF4ED"/>
+                      <a:srgbClr val="FBF3EC"/>
                     </a:solidFill>
                   </a:tcPr>
                 </a:tc>
@@ -8083,7 +8277,7 @@
                       <a:r>
                         <a:rPr sz="1400" b="0">
                           <a:solidFill>
-                            <a:srgbClr val="2B2B2B"/>
+                            <a:srgbClr val="26231F"/>
                           </a:solidFill>
                         </a:rPr>
                         <a:t>□</a:t>
@@ -8093,30 +8287,30 @@
                   <a:tcPr anchor="ctr" marL="73152" marR="73152">
                     <a:lnL w="9525" cap="flat" cmpd="sng" algn="ctr">
                       <a:solidFill>
-                        <a:srgbClr val="F8DFC9"/>
+                        <a:srgbClr val="F6E4D5"/>
                       </a:solidFill>
                       <a:prstDash val="solid"/>
                     </a:lnL>
                     <a:lnR w="9525" cap="flat" cmpd="sng" algn="ctr">
                       <a:solidFill>
-                        <a:srgbClr val="F8DFC9"/>
+                        <a:srgbClr val="F6E4D5"/>
                       </a:solidFill>
                       <a:prstDash val="solid"/>
                     </a:lnR>
                     <a:lnT w="9525" cap="flat" cmpd="sng" algn="ctr">
                       <a:solidFill>
-                        <a:srgbClr val="F8DFC9"/>
+                        <a:srgbClr val="F6E4D5"/>
                       </a:solidFill>
                       <a:prstDash val="solid"/>
                     </a:lnT>
                     <a:lnB w="9525" cap="flat" cmpd="sng" algn="ctr">
                       <a:solidFill>
-                        <a:srgbClr val="F8DFC9"/>
+                        <a:srgbClr val="F6E4D5"/>
                       </a:solidFill>
                       <a:prstDash val="solid"/>
                     </a:lnB>
                     <a:solidFill>
-                      <a:srgbClr val="FCF4ED"/>
+                      <a:srgbClr val="FBF3EC"/>
                     </a:solidFill>
                   </a:tcPr>
                 </a:tc>
@@ -8139,7 +8333,7 @@
     <p:bg>
       <p:bgPr>
         <a:solidFill>
-          <a:srgbClr val="FCF4ED"/>
+          <a:srgbClr val="FBF3EC"/>
         </a:solidFill>
         <a:effectLst/>
       </p:bgPr>
@@ -8159,14 +8353,14 @@
         </p:nvSpPr>
         <p:spPr>
           <a:xfrm>
-            <a:off x="0" y="0"/>
-            <a:ext cx="411480" cy="6858000"/>
+            <a:off x="640080" y="6400800"/>
+            <a:ext cx="10911535" cy="10972"/>
           </a:xfrm>
           <a:prstGeom prst="rect">
             <a:avLst/>
           </a:prstGeom>
           <a:solidFill>
-            <a:srgbClr val="CA7021"/>
+            <a:srgbClr val="26231F"/>
           </a:solidFill>
           <a:ln>
             <a:noFill/>
@@ -8182,20 +8376,58 @@
       </p:sp>
       <p:sp>
         <p:nvSpPr>
-          <p:cNvPr id="4" name="장식"/>
-          <p:cNvSpPr/>
+          <p:cNvPr id="4" name="하단 라벨"/>
+          <p:cNvSpPr txBox="1"/>
           <p:nvPr/>
         </p:nvSpPr>
         <p:spPr>
           <a:xfrm>
-            <a:off x="411480" y="0"/>
-            <a:ext cx="64008" cy="6858000"/>
+            <a:off x="640080" y="6437376"/>
+            <a:ext cx="5486400" cy="274320"/>
           </a:xfrm>
           <a:prstGeom prst="rect">
             <a:avLst/>
           </a:prstGeom>
+          <a:noFill/>
+        </p:spPr>
+        <p:txBody>
+          <a:bodyPr wrap="square" lIns="54864" rIns="54864" tIns="27432" bIns="27432" anchor="ctr">
+            <a:noAutofit/>
+          </a:bodyPr>
+          <a:lstStyle/>
+          <a:p>
+            <a:pPr algn="l">
+              <a:lnSpc>
+                <a:spcPct val="115000"/>
+              </a:lnSpc>
+            </a:pPr>
+            <a:r>
+              <a:rPr sz="900" b="1" i="0" spc="250">
+                <a:solidFill>
+                  <a:srgbClr val="26231F"/>
+                </a:solidFill>
+              </a:rPr>
+              <a:t>INSURANCE CHECK</a:t>
+            </a:r>
+          </a:p>
+        </p:txBody>
+      </p:sp>
+      <p:sp>
+        <p:nvSpPr>
+          <p:cNvPr id="5" name="포인트"/>
+          <p:cNvSpPr/>
+          <p:nvPr/>
+        </p:nvSpPr>
+        <p:spPr>
+          <a:xfrm rot="18900000">
+            <a:off x="11213287" y="6473952"/>
+            <a:ext cx="219456" cy="219456"/>
+          </a:xfrm>
+          <a:prstGeom prst="teardrop">
+            <a:avLst/>
+          </a:prstGeom>
           <a:solidFill>
-            <a:srgbClr val="3B918E"/>
+            <a:srgbClr val="D8A579"/>
           </a:solidFill>
           <a:ln>
             <a:noFill/>
@@ -8221,8 +8453,8 @@
         </p:nvSpPr>
         <p:spPr>
           <a:xfrm>
-            <a:off x="914400" y="457200"/>
-            <a:ext cx="9448495" cy="868680"/>
+            <a:off x="640080" y="502920"/>
+            <a:ext cx="10911535" cy="914400"/>
           </a:xfrm>
         </p:spPr>
         <p:txBody>
@@ -8239,7 +8471,7 @@
             <a:r>
               <a:rPr sz="3000" b="1" i="0">
                 <a:solidFill>
-                  <a:srgbClr val="723F13"/>
+                  <a:srgbClr val="26231F"/>
                 </a:solidFill>
               </a:rPr>
               <a:t>월 보험료 한눈에</a:t>
@@ -8249,26 +8481,26 @@
       </p:sp>
       <p:sp>
         <p:nvSpPr>
-          <p:cNvPr id="5" name="카드 1"/>
+          <p:cNvPr id="6" name="카드 1"/>
           <p:cNvSpPr/>
           <p:nvPr/>
         </p:nvSpPr>
         <p:spPr>
           <a:xfrm>
-            <a:off x="914400" y="1600200"/>
-            <a:ext cx="3393338" cy="2926080"/>
+            <a:off x="640080" y="1600200"/>
+            <a:ext cx="3484778" cy="2926080"/>
           </a:xfrm>
           <a:prstGeom prst="roundRect">
             <a:avLst>
-              <a:gd name="adj" fmla="val 8000"/>
+              <a:gd name="adj" fmla="val 7000"/>
             </a:avLst>
           </a:prstGeom>
           <a:solidFill>
-            <a:srgbClr val="FCF4ED"/>
+            <a:srgbClr val="FFFFFF"/>
           </a:solidFill>
-          <a:ln w="15875">
+          <a:ln w="12700">
             <a:solidFill>
-              <a:srgbClr val="F8DFC9"/>
+              <a:srgbClr val="EBCAAD"/>
             </a:solidFill>
           </a:ln>
         </p:spPr>
@@ -8282,20 +8514,22 @@
       </p:sp>
       <p:sp>
         <p:nvSpPr>
-          <p:cNvPr id="6" name="번호 1"/>
+          <p:cNvPr id="7" name="번호 1"/>
           <p:cNvSpPr/>
           <p:nvPr/>
         </p:nvSpPr>
         <p:spPr>
           <a:xfrm>
-            <a:off x="1097280" y="1783080"/>
+            <a:off x="822959" y="1783080"/>
             <a:ext cx="457200" cy="457200"/>
           </a:xfrm>
-          <a:prstGeom prst="ellipse">
-            <a:avLst/>
+          <a:prstGeom prst="roundRect">
+            <a:avLst>
+              <a:gd name="adj" fmla="val 25000"/>
+            </a:avLst>
           </a:prstGeom>
           <a:solidFill>
-            <a:srgbClr val="CA7021"/>
+            <a:srgbClr val="D8A579"/>
           </a:solidFill>
           <a:ln>
             <a:noFill/>
@@ -8315,7 +8549,7 @@
             <a:r>
               <a:rPr sz="1600" b="1" i="0">
                 <a:solidFill>
-                  <a:srgbClr val="FFFFFF"/>
+                  <a:srgbClr val="26231F"/>
                 </a:solidFill>
               </a:rPr>
               <a:t>1</a:t>
@@ -8325,14 +8559,14 @@
       </p:sp>
       <p:sp>
         <p:nvSpPr>
-          <p:cNvPr id="7" name="TextBox 6"/>
+          <p:cNvPr id="8" name="TextBox 7"/>
           <p:cNvSpPr txBox="1"/>
           <p:nvPr/>
         </p:nvSpPr>
         <p:spPr>
           <a:xfrm>
-            <a:off x="1051560" y="2377440"/>
-            <a:ext cx="3119018" cy="640080"/>
+            <a:off x="777240" y="2377440"/>
+            <a:ext cx="3210458" cy="640080"/>
           </a:xfrm>
           <a:prstGeom prst="rect">
             <a:avLst/>
@@ -8353,7 +8587,7 @@
             <a:r>
               <a:rPr sz="1700" b="1" i="0">
                 <a:solidFill>
-                  <a:srgbClr val="723F13"/>
+                  <a:srgbClr val="493727"/>
                 </a:solidFill>
               </a:rPr>
               <a:t>월 보험료 합계</a:t>
@@ -8363,14 +8597,14 @@
       </p:sp>
       <p:sp>
         <p:nvSpPr>
-          <p:cNvPr id="8" name="TextBox 7"/>
+          <p:cNvPr id="9" name="TextBox 8"/>
           <p:cNvSpPr txBox="1"/>
           <p:nvPr/>
         </p:nvSpPr>
         <p:spPr>
           <a:xfrm>
-            <a:off x="1051560" y="3063240"/>
-            <a:ext cx="3119018" cy="1325880"/>
+            <a:off x="777240" y="3063240"/>
+            <a:ext cx="3210458" cy="1325880"/>
           </a:xfrm>
           <a:prstGeom prst="rect">
             <a:avLst/>
@@ -8391,7 +8625,7 @@
             <a:r>
               <a:rPr sz="3000" b="0" i="0">
                 <a:solidFill>
-                  <a:srgbClr val="2B2B2B"/>
+                  <a:srgbClr val="26231F"/>
                 </a:solidFill>
               </a:rPr>
               <a:t>0원</a:t>
@@ -8401,26 +8635,26 @@
       </p:sp>
       <p:sp>
         <p:nvSpPr>
-          <p:cNvPr id="9" name="카드 2"/>
+          <p:cNvPr id="10" name="카드 2"/>
           <p:cNvSpPr/>
           <p:nvPr/>
         </p:nvSpPr>
         <p:spPr>
           <a:xfrm>
-            <a:off x="4536338" y="1600200"/>
-            <a:ext cx="3393338" cy="2926080"/>
+            <a:off x="4353458" y="1600200"/>
+            <a:ext cx="3484778" cy="2926080"/>
           </a:xfrm>
           <a:prstGeom prst="roundRect">
             <a:avLst>
-              <a:gd name="adj" fmla="val 8000"/>
+              <a:gd name="adj" fmla="val 7000"/>
             </a:avLst>
           </a:prstGeom>
           <a:solidFill>
-            <a:srgbClr val="FCF4ED"/>
+            <a:srgbClr val="FFFFFF"/>
           </a:solidFill>
-          <a:ln w="15875">
+          <a:ln w="12700">
             <a:solidFill>
-              <a:srgbClr val="F8DFC9"/>
+              <a:srgbClr val="EBCAAD"/>
             </a:solidFill>
           </a:ln>
         </p:spPr>
@@ -8434,20 +8668,22 @@
       </p:sp>
       <p:sp>
         <p:nvSpPr>
-          <p:cNvPr id="10" name="번호 2"/>
+          <p:cNvPr id="11" name="번호 2"/>
           <p:cNvSpPr/>
           <p:nvPr/>
         </p:nvSpPr>
         <p:spPr>
           <a:xfrm>
-            <a:off x="4719218" y="1783080"/>
+            <a:off x="4536338" y="1783080"/>
             <a:ext cx="457200" cy="457200"/>
           </a:xfrm>
-          <a:prstGeom prst="ellipse">
-            <a:avLst/>
+          <a:prstGeom prst="roundRect">
+            <a:avLst>
+              <a:gd name="adj" fmla="val 25000"/>
+            </a:avLst>
           </a:prstGeom>
           <a:solidFill>
-            <a:srgbClr val="CA7021"/>
+            <a:srgbClr val="D8A579"/>
           </a:solidFill>
           <a:ln>
             <a:noFill/>
@@ -8467,7 +8703,7 @@
             <a:r>
               <a:rPr sz="1600" b="1" i="0">
                 <a:solidFill>
-                  <a:srgbClr val="FFFFFF"/>
+                  <a:srgbClr val="26231F"/>
                 </a:solidFill>
               </a:rPr>
               <a:t>2</a:t>
@@ -8477,14 +8713,14 @@
       </p:sp>
       <p:sp>
         <p:nvSpPr>
-          <p:cNvPr id="11" name="TextBox 10"/>
+          <p:cNvPr id="12" name="TextBox 11"/>
           <p:cNvSpPr txBox="1"/>
           <p:nvPr/>
         </p:nvSpPr>
         <p:spPr>
           <a:xfrm>
-            <a:off x="4673498" y="2377440"/>
-            <a:ext cx="3119018" cy="640080"/>
+            <a:off x="4490618" y="2377440"/>
+            <a:ext cx="3210458" cy="640080"/>
           </a:xfrm>
           <a:prstGeom prst="rect">
             <a:avLst/>
@@ -8505,7 +8741,7 @@
             <a:r>
               <a:rPr sz="1700" b="1" i="0">
                 <a:solidFill>
-                  <a:srgbClr val="723F13"/>
+                  <a:srgbClr val="493727"/>
                 </a:solidFill>
               </a:rPr>
               <a:t>연 보험료 합계</a:t>
@@ -8515,14 +8751,14 @@
       </p:sp>
       <p:sp>
         <p:nvSpPr>
-          <p:cNvPr id="12" name="TextBox 11"/>
+          <p:cNvPr id="13" name="TextBox 12"/>
           <p:cNvSpPr txBox="1"/>
           <p:nvPr/>
         </p:nvSpPr>
         <p:spPr>
           <a:xfrm>
-            <a:off x="4673498" y="3063240"/>
-            <a:ext cx="3119018" cy="1325880"/>
+            <a:off x="4490618" y="3063240"/>
+            <a:ext cx="3210458" cy="1325880"/>
           </a:xfrm>
           <a:prstGeom prst="rect">
             <a:avLst/>
@@ -8543,7 +8779,7 @@
             <a:r>
               <a:rPr sz="3000" b="0" i="0">
                 <a:solidFill>
-                  <a:srgbClr val="2B2B2B"/>
+                  <a:srgbClr val="26231F"/>
                 </a:solidFill>
               </a:rPr>
               <a:t>0원</a:t>
@@ -8553,26 +8789,26 @@
       </p:sp>
       <p:sp>
         <p:nvSpPr>
-          <p:cNvPr id="13" name="카드 3"/>
+          <p:cNvPr id="14" name="카드 3"/>
           <p:cNvSpPr/>
           <p:nvPr/>
         </p:nvSpPr>
         <p:spPr>
           <a:xfrm>
-            <a:off x="8158276" y="1600200"/>
-            <a:ext cx="3393338" cy="2926080"/>
+            <a:off x="8066836" y="1600200"/>
+            <a:ext cx="3484778" cy="2926080"/>
           </a:xfrm>
           <a:prstGeom prst="roundRect">
             <a:avLst>
-              <a:gd name="adj" fmla="val 8000"/>
+              <a:gd name="adj" fmla="val 7000"/>
             </a:avLst>
           </a:prstGeom>
           <a:solidFill>
-            <a:srgbClr val="FCF4ED"/>
+            <a:srgbClr val="FFFFFF"/>
           </a:solidFill>
-          <a:ln w="15875">
+          <a:ln w="12700">
             <a:solidFill>
-              <a:srgbClr val="F8DFC9"/>
+              <a:srgbClr val="EBCAAD"/>
             </a:solidFill>
           </a:ln>
         </p:spPr>
@@ -8586,20 +8822,22 @@
       </p:sp>
       <p:sp>
         <p:nvSpPr>
-          <p:cNvPr id="14" name="번호 3"/>
+          <p:cNvPr id="15" name="번호 3"/>
           <p:cNvSpPr/>
           <p:nvPr/>
         </p:nvSpPr>
         <p:spPr>
           <a:xfrm>
-            <a:off x="8341156" y="1783080"/>
+            <a:off x="8249716" y="1783080"/>
             <a:ext cx="457200" cy="457200"/>
           </a:xfrm>
-          <a:prstGeom prst="ellipse">
-            <a:avLst/>
+          <a:prstGeom prst="roundRect">
+            <a:avLst>
+              <a:gd name="adj" fmla="val 25000"/>
+            </a:avLst>
           </a:prstGeom>
           <a:solidFill>
-            <a:srgbClr val="CA7021"/>
+            <a:srgbClr val="D8A579"/>
           </a:solidFill>
           <a:ln>
             <a:noFill/>
@@ -8619,7 +8857,7 @@
             <a:r>
               <a:rPr sz="1600" b="1" i="0">
                 <a:solidFill>
-                  <a:srgbClr val="FFFFFF"/>
+                  <a:srgbClr val="26231F"/>
                 </a:solidFill>
               </a:rPr>
               <a:t>3</a:t>
@@ -8629,14 +8867,14 @@
       </p:sp>
       <p:sp>
         <p:nvSpPr>
-          <p:cNvPr id="15" name="TextBox 14"/>
+          <p:cNvPr id="16" name="TextBox 15"/>
           <p:cNvSpPr txBox="1"/>
           <p:nvPr/>
         </p:nvSpPr>
         <p:spPr>
           <a:xfrm>
-            <a:off x="8295436" y="2377440"/>
-            <a:ext cx="3119018" cy="640080"/>
+            <a:off x="8203996" y="2377440"/>
+            <a:ext cx="3210458" cy="640080"/>
           </a:xfrm>
           <a:prstGeom prst="rect">
             <a:avLst/>
@@ -8657,7 +8895,7 @@
             <a:r>
               <a:rPr sz="1700" b="1" i="0">
                 <a:solidFill>
-                  <a:srgbClr val="723F13"/>
+                  <a:srgbClr val="493727"/>
                 </a:solidFill>
               </a:rPr>
               <a:t>월 소득 대비</a:t>
@@ -8667,14 +8905,14 @@
       </p:sp>
       <p:sp>
         <p:nvSpPr>
-          <p:cNvPr id="16" name="TextBox 15"/>
+          <p:cNvPr id="17" name="TextBox 16"/>
           <p:cNvSpPr txBox="1"/>
           <p:nvPr/>
         </p:nvSpPr>
         <p:spPr>
           <a:xfrm>
-            <a:off x="8295436" y="3063240"/>
-            <a:ext cx="3119018" cy="1325880"/>
+            <a:off x="8203996" y="3063240"/>
+            <a:ext cx="3210458" cy="1325880"/>
           </a:xfrm>
           <a:prstGeom prst="rect">
             <a:avLst/>
@@ -8695,7 +8933,7 @@
             <a:r>
               <a:rPr sz="3000" b="0" i="0">
                 <a:solidFill>
-                  <a:srgbClr val="2B2B2B"/>
+                  <a:srgbClr val="26231F"/>
                 </a:solidFill>
               </a:rPr>
               <a:t>0 %</a:t>
@@ -8705,14 +8943,14 @@
       </p:sp>
       <p:sp>
         <p:nvSpPr>
-          <p:cNvPr id="17" name="안내"/>
+          <p:cNvPr id="18" name="안내"/>
           <p:cNvSpPr txBox="1"/>
           <p:nvPr/>
         </p:nvSpPr>
         <p:spPr>
           <a:xfrm>
-            <a:off x="914400" y="4709160"/>
-            <a:ext cx="10637215" cy="365760"/>
+            <a:off x="640080" y="4709160"/>
+            <a:ext cx="10911535" cy="365760"/>
           </a:xfrm>
           <a:prstGeom prst="rect">
             <a:avLst/>
@@ -8755,7 +8993,7 @@
     <p:bg>
       <p:bgPr>
         <a:solidFill>
-          <a:srgbClr val="FCF4ED"/>
+          <a:srgbClr val="FBF3EC"/>
         </a:solidFill>
         <a:effectLst/>
       </p:bgPr>
@@ -8775,14 +9013,14 @@
         </p:nvSpPr>
         <p:spPr>
           <a:xfrm>
-            <a:off x="0" y="0"/>
-            <a:ext cx="411480" cy="6858000"/>
+            <a:off x="640080" y="6400800"/>
+            <a:ext cx="10911535" cy="10972"/>
           </a:xfrm>
           <a:prstGeom prst="rect">
             <a:avLst/>
           </a:prstGeom>
           <a:solidFill>
-            <a:srgbClr val="CA7021"/>
+            <a:srgbClr val="26231F"/>
           </a:solidFill>
           <a:ln>
             <a:noFill/>
@@ -8798,20 +9036,58 @@
       </p:sp>
       <p:sp>
         <p:nvSpPr>
-          <p:cNvPr id="4" name="장식"/>
-          <p:cNvSpPr/>
+          <p:cNvPr id="4" name="하단 라벨"/>
+          <p:cNvSpPr txBox="1"/>
           <p:nvPr/>
         </p:nvSpPr>
         <p:spPr>
           <a:xfrm>
-            <a:off x="411480" y="0"/>
-            <a:ext cx="64008" cy="6858000"/>
+            <a:off x="640080" y="6437376"/>
+            <a:ext cx="5486400" cy="274320"/>
           </a:xfrm>
           <a:prstGeom prst="rect">
             <a:avLst/>
           </a:prstGeom>
+          <a:noFill/>
+        </p:spPr>
+        <p:txBody>
+          <a:bodyPr wrap="square" lIns="54864" rIns="54864" tIns="27432" bIns="27432" anchor="ctr">
+            <a:noAutofit/>
+          </a:bodyPr>
+          <a:lstStyle/>
+          <a:p>
+            <a:pPr algn="l">
+              <a:lnSpc>
+                <a:spcPct val="115000"/>
+              </a:lnSpc>
+            </a:pPr>
+            <a:r>
+              <a:rPr sz="900" b="1" i="0" spc="250">
+                <a:solidFill>
+                  <a:srgbClr val="26231F"/>
+                </a:solidFill>
+              </a:rPr>
+              <a:t>INSURANCE CHECK</a:t>
+            </a:r>
+          </a:p>
+        </p:txBody>
+      </p:sp>
+      <p:sp>
+        <p:nvSpPr>
+          <p:cNvPr id="5" name="포인트"/>
+          <p:cNvSpPr/>
+          <p:nvPr/>
+        </p:nvSpPr>
+        <p:spPr>
+          <a:xfrm rot="18900000">
+            <a:off x="11213287" y="6473952"/>
+            <a:ext cx="219456" cy="219456"/>
+          </a:xfrm>
+          <a:prstGeom prst="teardrop">
+            <a:avLst/>
+          </a:prstGeom>
           <a:solidFill>
-            <a:srgbClr val="3B918E"/>
+            <a:srgbClr val="D8A579"/>
           </a:solidFill>
           <a:ln>
             <a:noFill/>
@@ -8837,8 +9113,8 @@
         </p:nvSpPr>
         <p:spPr>
           <a:xfrm>
-            <a:off x="914400" y="457200"/>
-            <a:ext cx="9448495" cy="868680"/>
+            <a:off x="640080" y="502920"/>
+            <a:ext cx="10911535" cy="914400"/>
           </a:xfrm>
         </p:spPr>
         <p:txBody>
@@ -8855,7 +9131,7 @@
             <a:r>
               <a:rPr sz="3000" b="1" i="0">
                 <a:solidFill>
-                  <a:srgbClr val="723F13"/>
+                  <a:srgbClr val="26231F"/>
                 </a:solidFill>
               </a:rPr>
               <a:t>점검 메모와 다음 할 일</a:t>
@@ -8865,26 +9141,26 @@
       </p:sp>
       <p:sp>
         <p:nvSpPr>
-          <p:cNvPr id="5" name="카드 1"/>
+          <p:cNvPr id="6" name="카드 1"/>
           <p:cNvSpPr/>
           <p:nvPr/>
         </p:nvSpPr>
         <p:spPr>
           <a:xfrm>
-            <a:off x="914400" y="1600200"/>
-            <a:ext cx="3393338" cy="4160520"/>
+            <a:off x="640080" y="1600200"/>
+            <a:ext cx="3484778" cy="3931920"/>
           </a:xfrm>
           <a:prstGeom prst="roundRect">
             <a:avLst>
-              <a:gd name="adj" fmla="val 8000"/>
+              <a:gd name="adj" fmla="val 7000"/>
             </a:avLst>
           </a:prstGeom>
           <a:solidFill>
-            <a:srgbClr val="FCF4ED"/>
+            <a:srgbClr val="FFFFFF"/>
           </a:solidFill>
-          <a:ln w="15875">
+          <a:ln w="12700">
             <a:solidFill>
-              <a:srgbClr val="F8DFC9"/>
+              <a:srgbClr val="EBCAAD"/>
             </a:solidFill>
           </a:ln>
         </p:spPr>
@@ -8898,20 +9174,22 @@
       </p:sp>
       <p:sp>
         <p:nvSpPr>
-          <p:cNvPr id="6" name="번호 1"/>
+          <p:cNvPr id="7" name="번호 1"/>
           <p:cNvSpPr/>
           <p:nvPr/>
         </p:nvSpPr>
         <p:spPr>
           <a:xfrm>
-            <a:off x="1097280" y="1783080"/>
+            <a:off x="822959" y="1783080"/>
             <a:ext cx="457200" cy="457200"/>
           </a:xfrm>
-          <a:prstGeom prst="ellipse">
-            <a:avLst/>
+          <a:prstGeom prst="roundRect">
+            <a:avLst>
+              <a:gd name="adj" fmla="val 25000"/>
+            </a:avLst>
           </a:prstGeom>
           <a:solidFill>
-            <a:srgbClr val="CA7021"/>
+            <a:srgbClr val="D8A579"/>
           </a:solidFill>
           <a:ln>
             <a:noFill/>
@@ -8931,7 +9209,7 @@
             <a:r>
               <a:rPr sz="1600" b="1" i="0">
                 <a:solidFill>
-                  <a:srgbClr val="FFFFFF"/>
+                  <a:srgbClr val="26231F"/>
                 </a:solidFill>
               </a:rPr>
               <a:t>1</a:t>
@@ -8941,14 +9219,14 @@
       </p:sp>
       <p:sp>
         <p:nvSpPr>
-          <p:cNvPr id="7" name="TextBox 6"/>
+          <p:cNvPr id="8" name="TextBox 7"/>
           <p:cNvSpPr txBox="1"/>
           <p:nvPr/>
         </p:nvSpPr>
         <p:spPr>
           <a:xfrm>
-            <a:off x="1051560" y="2377440"/>
-            <a:ext cx="3119018" cy="640080"/>
+            <a:off x="777240" y="2377440"/>
+            <a:ext cx="3210458" cy="640080"/>
           </a:xfrm>
           <a:prstGeom prst="rect">
             <a:avLst/>
@@ -8969,7 +9247,7 @@
             <a:r>
               <a:rPr sz="1800" b="1" i="0">
                 <a:solidFill>
-                  <a:srgbClr val="723F13"/>
+                  <a:srgbClr val="493727"/>
                 </a:solidFill>
               </a:rPr>
               <a:t>확인할 것</a:t>
@@ -8979,14 +9257,14 @@
       </p:sp>
       <p:sp>
         <p:nvSpPr>
-          <p:cNvPr id="8" name="TextBox 7"/>
+          <p:cNvPr id="9" name="TextBox 8"/>
           <p:cNvSpPr txBox="1"/>
           <p:nvPr/>
         </p:nvSpPr>
         <p:spPr>
           <a:xfrm>
-            <a:off x="1051560" y="3063240"/>
-            <a:ext cx="3119018" cy="2560320"/>
+            <a:off x="777240" y="3063240"/>
+            <a:ext cx="3210458" cy="2331720"/>
           </a:xfrm>
           <a:prstGeom prst="rect">
             <a:avLst/>
@@ -9007,7 +9285,7 @@
             <a:r>
               <a:rPr sz="1500" b="0" i="0">
                 <a:solidFill>
-                  <a:srgbClr val="2B2B2B"/>
+                  <a:srgbClr val="26231F"/>
                 </a:solidFill>
               </a:rPr>
               <a:t>내용을 입력하세요</a:t>
@@ -9017,26 +9295,26 @@
       </p:sp>
       <p:sp>
         <p:nvSpPr>
-          <p:cNvPr id="9" name="카드 2"/>
+          <p:cNvPr id="10" name="카드 2"/>
           <p:cNvSpPr/>
           <p:nvPr/>
         </p:nvSpPr>
         <p:spPr>
           <a:xfrm>
-            <a:off x="4536338" y="1600200"/>
-            <a:ext cx="3393338" cy="4160520"/>
+            <a:off x="4353458" y="1600200"/>
+            <a:ext cx="3484778" cy="3931920"/>
           </a:xfrm>
           <a:prstGeom prst="roundRect">
             <a:avLst>
-              <a:gd name="adj" fmla="val 8000"/>
+              <a:gd name="adj" fmla="val 7000"/>
             </a:avLst>
           </a:prstGeom>
           <a:solidFill>
-            <a:srgbClr val="FCF4ED"/>
+            <a:srgbClr val="FFFFFF"/>
           </a:solidFill>
-          <a:ln w="15875">
+          <a:ln w="12700">
             <a:solidFill>
-              <a:srgbClr val="F8DFC9"/>
+              <a:srgbClr val="EBCAAD"/>
             </a:solidFill>
           </a:ln>
         </p:spPr>
@@ -9050,20 +9328,22 @@
       </p:sp>
       <p:sp>
         <p:nvSpPr>
-          <p:cNvPr id="10" name="번호 2"/>
+          <p:cNvPr id="11" name="번호 2"/>
           <p:cNvSpPr/>
           <p:nvPr/>
         </p:nvSpPr>
         <p:spPr>
           <a:xfrm>
-            <a:off x="4719218" y="1783080"/>
+            <a:off x="4536338" y="1783080"/>
             <a:ext cx="457200" cy="457200"/>
           </a:xfrm>
-          <a:prstGeom prst="ellipse">
-            <a:avLst/>
+          <a:prstGeom prst="roundRect">
+            <a:avLst>
+              <a:gd name="adj" fmla="val 25000"/>
+            </a:avLst>
           </a:prstGeom>
           <a:solidFill>
-            <a:srgbClr val="CA7021"/>
+            <a:srgbClr val="D8A579"/>
           </a:solidFill>
           <a:ln>
             <a:noFill/>
@@ -9083,7 +9363,7 @@
             <a:r>
               <a:rPr sz="1600" b="1" i="0">
                 <a:solidFill>
-                  <a:srgbClr val="FFFFFF"/>
+                  <a:srgbClr val="26231F"/>
                 </a:solidFill>
               </a:rPr>
               <a:t>2</a:t>
@@ -9093,14 +9373,14 @@
       </p:sp>
       <p:sp>
         <p:nvSpPr>
-          <p:cNvPr id="11" name="TextBox 10"/>
+          <p:cNvPr id="12" name="TextBox 11"/>
           <p:cNvSpPr txBox="1"/>
           <p:nvPr/>
         </p:nvSpPr>
         <p:spPr>
           <a:xfrm>
-            <a:off x="4673498" y="2377440"/>
-            <a:ext cx="3119018" cy="640080"/>
+            <a:off x="4490618" y="2377440"/>
+            <a:ext cx="3210458" cy="640080"/>
           </a:xfrm>
           <a:prstGeom prst="rect">
             <a:avLst/>
@@ -9121,7 +9401,7 @@
             <a:r>
               <a:rPr sz="1800" b="1" i="0">
                 <a:solidFill>
-                  <a:srgbClr val="723F13"/>
+                  <a:srgbClr val="493727"/>
                 </a:solidFill>
               </a:rPr>
               <a:t>문의할 것</a:t>
@@ -9131,14 +9411,14 @@
       </p:sp>
       <p:sp>
         <p:nvSpPr>
-          <p:cNvPr id="12" name="TextBox 11"/>
+          <p:cNvPr id="13" name="TextBox 12"/>
           <p:cNvSpPr txBox="1"/>
           <p:nvPr/>
         </p:nvSpPr>
         <p:spPr>
           <a:xfrm>
-            <a:off x="4673498" y="3063240"/>
-            <a:ext cx="3119018" cy="2560320"/>
+            <a:off x="4490618" y="3063240"/>
+            <a:ext cx="3210458" cy="2331720"/>
           </a:xfrm>
           <a:prstGeom prst="rect">
             <a:avLst/>
@@ -9159,7 +9439,7 @@
             <a:r>
               <a:rPr sz="1500" b="0" i="0">
                 <a:solidFill>
-                  <a:srgbClr val="2B2B2B"/>
+                  <a:srgbClr val="26231F"/>
                 </a:solidFill>
               </a:rPr>
               <a:t>내용을 입력하세요</a:t>
@@ -9169,26 +9449,26 @@
       </p:sp>
       <p:sp>
         <p:nvSpPr>
-          <p:cNvPr id="13" name="카드 3"/>
+          <p:cNvPr id="14" name="카드 3"/>
           <p:cNvSpPr/>
           <p:nvPr/>
         </p:nvSpPr>
         <p:spPr>
           <a:xfrm>
-            <a:off x="8158276" y="1600200"/>
-            <a:ext cx="3393338" cy="4160520"/>
+            <a:off x="8066836" y="1600200"/>
+            <a:ext cx="3484778" cy="3931920"/>
           </a:xfrm>
           <a:prstGeom prst="roundRect">
             <a:avLst>
-              <a:gd name="adj" fmla="val 8000"/>
+              <a:gd name="adj" fmla="val 7000"/>
             </a:avLst>
           </a:prstGeom>
           <a:solidFill>
-            <a:srgbClr val="FCF4ED"/>
+            <a:srgbClr val="FFFFFF"/>
           </a:solidFill>
-          <a:ln w="15875">
+          <a:ln w="12700">
             <a:solidFill>
-              <a:srgbClr val="F8DFC9"/>
+              <a:srgbClr val="EBCAAD"/>
             </a:solidFill>
           </a:ln>
         </p:spPr>
@@ -9202,20 +9482,22 @@
       </p:sp>
       <p:sp>
         <p:nvSpPr>
-          <p:cNvPr id="14" name="번호 3"/>
+          <p:cNvPr id="15" name="번호 3"/>
           <p:cNvSpPr/>
           <p:nvPr/>
         </p:nvSpPr>
         <p:spPr>
           <a:xfrm>
-            <a:off x="8341156" y="1783080"/>
+            <a:off x="8249716" y="1783080"/>
             <a:ext cx="457200" cy="457200"/>
           </a:xfrm>
-          <a:prstGeom prst="ellipse">
-            <a:avLst/>
+          <a:prstGeom prst="roundRect">
+            <a:avLst>
+              <a:gd name="adj" fmla="val 25000"/>
+            </a:avLst>
           </a:prstGeom>
           <a:solidFill>
-            <a:srgbClr val="CA7021"/>
+            <a:srgbClr val="D8A579"/>
           </a:solidFill>
           <a:ln>
             <a:noFill/>
@@ -9235,7 +9517,7 @@
             <a:r>
               <a:rPr sz="1600" b="1" i="0">
                 <a:solidFill>
-                  <a:srgbClr val="FFFFFF"/>
+                  <a:srgbClr val="26231F"/>
                 </a:solidFill>
               </a:rPr>
               <a:t>3</a:t>
@@ -9245,14 +9527,14 @@
       </p:sp>
       <p:sp>
         <p:nvSpPr>
-          <p:cNvPr id="15" name="TextBox 14"/>
+          <p:cNvPr id="16" name="TextBox 15"/>
           <p:cNvSpPr txBox="1"/>
           <p:nvPr/>
         </p:nvSpPr>
         <p:spPr>
           <a:xfrm>
-            <a:off x="8295436" y="2377440"/>
-            <a:ext cx="3119018" cy="640080"/>
+            <a:off x="8203996" y="2377440"/>
+            <a:ext cx="3210458" cy="640080"/>
           </a:xfrm>
           <a:prstGeom prst="rect">
             <a:avLst/>
@@ -9273,7 +9555,7 @@
             <a:r>
               <a:rPr sz="1800" b="1" i="0">
                 <a:solidFill>
-                  <a:srgbClr val="723F13"/>
+                  <a:srgbClr val="493727"/>
                 </a:solidFill>
               </a:rPr>
               <a:t>정리할 날짜</a:t>
@@ -9283,14 +9565,14 @@
       </p:sp>
       <p:sp>
         <p:nvSpPr>
-          <p:cNvPr id="16" name="TextBox 15"/>
+          <p:cNvPr id="17" name="TextBox 16"/>
           <p:cNvSpPr txBox="1"/>
           <p:nvPr/>
         </p:nvSpPr>
         <p:spPr>
           <a:xfrm>
-            <a:off x="8295436" y="3063240"/>
-            <a:ext cx="3119018" cy="2560320"/>
+            <a:off x="8203996" y="3063240"/>
+            <a:ext cx="3210458" cy="2331720"/>
           </a:xfrm>
           <a:prstGeom prst="rect">
             <a:avLst/>
@@ -9311,7 +9593,7 @@
             <a:r>
               <a:rPr sz="1500" b="0" i="0">
                 <a:solidFill>
-                  <a:srgbClr val="2B2B2B"/>
+                  <a:srgbClr val="26231F"/>
                 </a:solidFill>
               </a:rPr>
               <a:t>내용을 입력하세요</a:t>
@@ -9321,14 +9603,14 @@
       </p:sp>
       <p:sp>
         <p:nvSpPr>
-          <p:cNvPr id="17" name="안내 문구"/>
+          <p:cNvPr id="18" name="안내 문구"/>
           <p:cNvSpPr txBox="1"/>
           <p:nvPr/>
         </p:nvSpPr>
         <p:spPr>
           <a:xfrm>
-            <a:off x="914400" y="5852160"/>
-            <a:ext cx="10637215" cy="548640"/>
+            <a:off x="640080" y="5623560"/>
+            <a:ext cx="10911535" cy="548640"/>
           </a:xfrm>
           <a:prstGeom prst="rect">
             <a:avLst/>
@@ -9376,34 +9658,34 @@
         <a:sysClr val="window" lastClr="FFFFFF"/>
       </a:lt1>
       <a:dk2>
-        <a:srgbClr val="723F13"/>
+        <a:srgbClr val="493727"/>
       </a:dk2>
       <a:lt2>
-        <a:srgbClr val="FCF4ED"/>
+        <a:srgbClr val="FBF3EC"/>
       </a:lt2>
       <a:accent1>
-        <a:srgbClr val="CA7021"/>
+        <a:srgbClr val="D8A579"/>
       </a:accent1>
       <a:accent2>
-        <a:srgbClr val="3B918E"/>
+        <a:srgbClr val="E1DC98"/>
       </a:accent2>
       <a:accent3>
-        <a:srgbClr val="723F13"/>
+        <a:srgbClr val="493727"/>
       </a:accent3>
       <a:accent4>
-        <a:srgbClr val="F8DFC9"/>
+        <a:srgbClr val="F6E4D5"/>
       </a:accent4>
       <a:accent5>
-        <a:srgbClr val="828058"/>
+        <a:srgbClr val="DCC088"/>
       </a:accent5>
       <a:accent6>
-        <a:srgbClr val="AA8C71"/>
+        <a:srgbClr val="92877D"/>
       </a:accent6>
       <a:hlink>
-        <a:srgbClr val="CA7021"/>
+        <a:srgbClr val="D8A579"/>
       </a:hlink>
       <a:folHlink>
-        <a:srgbClr val="723F13"/>
+        <a:srgbClr val="493727"/>
       </a:folHlink>
     </a:clrScheme>
     <a:fontScheme name="Office">
